--- a/3rdSem/Assignments/pptx/dbms/PPT_BTS30102_DBMS_Sayantan_Bharati.pptx
+++ b/3rdSem/Assignments/pptx/dbms/PPT_BTS30102_DBMS_Sayantan_Bharati.pptx
@@ -4,25 +4,25 @@
   <p:sldMasterIdLst>
     <p:sldMasterId id="2147483648" r:id="rId1"/>
   </p:sldMasterIdLst>
+  <p:notesMasterIdLst>
+    <p:notesMasterId r:id="rId16"/>
+  </p:notesMasterIdLst>
   <p:sldIdLst>
-    <p:sldId id="256" r:id="rId7"/>
-    <p:sldId id="257" r:id="rId8"/>
-    <p:sldId id="258" r:id="rId9"/>
-    <p:sldId id="259" r:id="rId10"/>
-    <p:sldId id="260" r:id="rId11"/>
-    <p:sldId id="261" r:id="rId6"/>
-    <p:sldId id="262" r:id="rId5"/>
-    <p:sldId id="263" r:id="rId4"/>
-    <p:sldId id="264" r:id="rId3"/>
-    <p:sldId id="265" r:id="rId2"/>
-    <p:sldId id="266" r:id="rId17"/>
-    <p:sldId id="267" r:id="rId18"/>
-    <p:sldId id="268" r:id="rId19"/>
-    <p:sldId id="269" r:id="rId20"/>
+    <p:sldId id="256" r:id="rId2"/>
+    <p:sldId id="257" r:id="rId3"/>
+    <p:sldId id="258" r:id="rId4"/>
+    <p:sldId id="259" r:id="rId5"/>
+    <p:sldId id="260" r:id="rId6"/>
+    <p:sldId id="261" r:id="rId7"/>
+    <p:sldId id="262" r:id="rId8"/>
+    <p:sldId id="263" r:id="rId9"/>
+    <p:sldId id="264" r:id="rId10"/>
+    <p:sldId id="265" r:id="rId11"/>
+    <p:sldId id="266" r:id="rId12"/>
+    <p:sldId id="267" r:id="rId13"/>
+    <p:sldId id="268" r:id="rId14"/>
+    <p:sldId id="269" r:id="rId15"/>
   </p:sldIdLst>
-  <p:notesMasterIdLst>
-    <p:notesMasterId r:id="rId12"/>
-  </p:notesMasterIdLst>
   <p:sldSz cx="12192000" cy="6858000"/>
   <p:notesSz cx="6858000" cy="12192000"/>
   <p:defaultTextStyle>
@@ -117,6 +117,11 @@
       </a:defRPr>
     </a:lvl9pPr>
   </p:defaultTextStyle>
+  <p:extLst>
+    <p:ext uri="{EFAFB233-063F-42B5-8137-9DF3F51BA10A}">
+      <p15:sldGuideLst xmlns:p15="http://schemas.microsoft.com/office/powerpoint/2012/main"/>
+    </p:ext>
+  </p:extLst>
 </p:presentation>
 </file>
 
@@ -142,234 +147,10 @@
           <a:chExt cx="0" cy="0"/>
         </a:xfrm>
       </p:grpSpPr>
-      <p:sp>
-        <p:nvSpPr>
-          <p:cNvPr id="2" name="Header Placeholder 1"/>
-          <p:cNvSpPr>
-            <a:spLocks noGrp="1"/>
-          </p:cNvSpPr>
-          <p:nvPr>
-            <p:ph type="hdr" sz="quarter"/>
-          </p:nvPr>
-        </p:nvSpPr>
-        <p:spPr>
-          <a:xfrm>
-            <a:off x="0" y="0"/>
-            <a:ext cx="2971800" cy="458788"/>
-          </a:xfrm>
-          <a:prstGeom prst="rect">
-            <a:avLst/>
-          </a:prstGeom>
-        </p:spPr>
-        <p:txBody>
-          <a:bodyPr vert="horz" lIns="91440" tIns="45720" rIns="91440" bIns="45720" rtlCol="0"/>
-          <a:lstStyle>
-            <a:lvl1pPr algn="l">
-              <a:defRPr sz="1200"/>
-            </a:lvl1pPr>
-          </a:lstStyle>
-          <a:p>
-            <a:endParaRPr lang="en-US"/>
-          </a:p>
-        </p:txBody>
-      </p:sp>
-      <p:sp>
-        <p:nvSpPr>
-          <p:cNvPr id="3" name="Date Placeholder 2"/>
-          <p:cNvSpPr>
-            <a:spLocks noGrp="1"/>
-          </p:cNvSpPr>
-          <p:nvPr>
-            <p:ph type="dt" idx="1"/>
-          </p:nvPr>
-        </p:nvSpPr>
-        <p:spPr>
-          <a:xfrm>
-            <a:off x="3884613" y="0"/>
-            <a:ext cx="2971800" cy="458788"/>
-          </a:xfrm>
-          <a:prstGeom prst="rect">
-            <a:avLst/>
-          </a:prstGeom>
-        </p:spPr>
-        <p:txBody>
-          <a:bodyPr vert="horz" lIns="91440" tIns="45720" rIns="91440" bIns="45720" rtlCol="0"/>
-          <a:lstStyle>
-            <a:lvl1pPr algn="r">
-              <a:defRPr sz="1200"/>
-            </a:lvl1pPr>
-          </a:lstStyle>
-          <a:p>
-            <a:fld id="{5282F153-3F37-0F45-9E97-73ACFA13230C}" type="datetimeFigureOut">
-              <a:rPr lang="en-US"/>
-              <a:t>7/23/19</a:t>
-            </a:fld>
-            <a:endParaRPr lang="en-US"/>
-          </a:p>
-        </p:txBody>
-      </p:sp>
-      <p:sp>
-        <p:nvSpPr>
-          <p:cNvPr id="4" name="Slide Image Placeholder 3"/>
-          <p:cNvSpPr>
-            <a:spLocks noGrp="1" noRot="1" noChangeAspect="1"/>
-          </p:cNvSpPr>
-          <p:nvPr>
-            <p:ph type="sldImg" idx="2"/>
-          </p:nvPr>
-        </p:nvSpPr>
-        <p:spPr>
-          <a:xfrm>
-            <a:off x="685800" y="1143000"/>
-            <a:ext cx="5486400" cy="3086100"/>
-          </a:xfrm>
-          <a:prstGeom prst="rect">
-            <a:avLst/>
-          </a:prstGeom>
-          <a:noFill/>
-          <a:ln w="12700">
-            <a:solidFill>
-              <a:prstClr val="black"/>
-            </a:solidFill>
-          </a:ln>
-        </p:spPr>
-        <p:txBody>
-          <a:bodyPr vert="horz" lIns="91440" tIns="45720" rIns="91440" bIns="45720" rtlCol="0" anchor="ctr"/>
-          <a:lstStyle/>
-          <a:p>
-            <a:endParaRPr lang="en-US"/>
-          </a:p>
-        </p:txBody>
-      </p:sp>
-      <p:sp>
-        <p:nvSpPr>
-          <p:cNvPr id="5" name="Notes Placeholder 4"/>
-          <p:cNvSpPr>
-            <a:spLocks noGrp="1"/>
-          </p:cNvSpPr>
-          <p:nvPr>
-            <p:ph type="body" sz="quarter" idx="3"/>
-          </p:nvPr>
-        </p:nvSpPr>
-        <p:spPr>
-          <a:xfrm>
-            <a:off x="685800" y="4400550"/>
-            <a:ext cx="5486400" cy="3600450"/>
-          </a:xfrm>
-          <a:prstGeom prst="rect">
-            <a:avLst/>
-          </a:prstGeom>
-        </p:spPr>
-        <p:txBody>
-          <a:bodyPr vert="horz" lIns="91440" tIns="45720" rIns="91440" bIns="45720" rtlCol="0"/>
-          <a:lstStyle/>
-          <a:p>
-            <a:pPr lvl="0"/>
-            <a:r>
-              <a:rPr lang="en-US"/>
-              <a:t>Click to edit Master text styles</a:t>
-            </a:r>
-          </a:p>
-          <a:p>
-            <a:pPr lvl="1"/>
-            <a:r>
-              <a:rPr lang="en-US"/>
-              <a:t>Second level</a:t>
-            </a:r>
-          </a:p>
-          <a:p>
-            <a:pPr lvl="2"/>
-            <a:r>
-              <a:rPr lang="en-US"/>
-              <a:t>Third level</a:t>
-            </a:r>
-          </a:p>
-          <a:p>
-            <a:pPr lvl="3"/>
-            <a:r>
-              <a:rPr lang="en-US"/>
-              <a:t>Fourth level</a:t>
-            </a:r>
-          </a:p>
-          <a:p>
-            <a:pPr lvl="4"/>
-            <a:r>
-              <a:rPr lang="en-US"/>
-              <a:t>Fifth level</a:t>
-            </a:r>
-          </a:p>
-        </p:txBody>
-      </p:sp>
-      <p:sp>
-        <p:nvSpPr>
-          <p:cNvPr id="6" name="Footer Placeholder 5"/>
-          <p:cNvSpPr>
-            <a:spLocks noGrp="1"/>
-          </p:cNvSpPr>
-          <p:nvPr>
-            <p:ph type="ftr" sz="quarter" idx="4"/>
-          </p:nvPr>
-        </p:nvSpPr>
-        <p:spPr>
-          <a:xfrm>
-            <a:off x="0" y="8685213"/>
-            <a:ext cx="2971800" cy="458787"/>
-          </a:xfrm>
-          <a:prstGeom prst="rect">
-            <a:avLst/>
-          </a:prstGeom>
-        </p:spPr>
-        <p:txBody>
-          <a:bodyPr vert="horz" lIns="91440" tIns="45720" rIns="91440" bIns="45720" rtlCol="0" anchor="b"/>
-          <a:lstStyle>
-            <a:lvl1pPr algn="l">
-              <a:defRPr sz="1200"/>
-            </a:lvl1pPr>
-          </a:lstStyle>
-          <a:p>
-            <a:endParaRPr lang="en-US"/>
-          </a:p>
-        </p:txBody>
-      </p:sp>
-      <p:sp>
-        <p:nvSpPr>
-          <p:cNvPr id="7" name="Slide Number Placeholder 6"/>
-          <p:cNvSpPr>
-            <a:spLocks noGrp="1"/>
-          </p:cNvSpPr>
-          <p:nvPr>
-            <p:ph type="sldNum" sz="quarter" idx="5"/>
-          </p:nvPr>
-        </p:nvSpPr>
-        <p:spPr>
-          <a:xfrm>
-            <a:off x="3884613" y="8685213"/>
-            <a:ext cx="2971800" cy="458787"/>
-          </a:xfrm>
-          <a:prstGeom prst="rect">
-            <a:avLst/>
-          </a:prstGeom>
-        </p:spPr>
-        <p:txBody>
-          <a:bodyPr vert="horz" lIns="91440" tIns="45720" rIns="91440" bIns="45720" rtlCol="0" anchor="b"/>
-          <a:lstStyle>
-            <a:lvl1pPr algn="r">
-              <a:defRPr sz="1200"/>
-            </a:lvl1pPr>
-          </a:lstStyle>
-          <a:p>
-            <a:fld id="{CE5E9CC1-C706-0F49-92D6-E571CC5EEA8F}" type="slidenum">
-              <a:rPr lang="en-US"/>
-              <a:t>‹#›</a:t>
-            </a:fld>
-            <a:endParaRPr lang="en-US"/>
-          </a:p>
-        </p:txBody>
-      </p:sp>
     </p:spTree>
     <p:extLst>
       <p:ext uri="{BB962C8B-B14F-4D97-AF65-F5344CB8AC3E}">
-        <p14:creationId xmlns:p14="http://schemas.microsoft.com/office/powerpoint/2010/main" val="1024086991"/>
+        <p14:creationId xmlns:p14="http://schemas.microsoft.com/office/powerpoint/2010/main" val="3193778209"/>
       </p:ext>
     </p:extLst>
   </p:cSld>
@@ -470,7 +251,7 @@
 </file>
 
 <file path=ppt/notesSlides/notesSlide1.xml><?xml version="1.0" encoding="utf-8"?>
-<p:notes xmlns:a="http://schemas.openxmlformats.org/drawingml/2006/main" xmlns:p="http://schemas.openxmlformats.org/presentationml/2006/main" xmlns:r="http://schemas.openxmlformats.org/officeDocument/2006/relationships">
+<p:notes xmlns:a="http://schemas.openxmlformats.org/drawingml/2006/main" xmlns:r="http://schemas.openxmlformats.org/officeDocument/2006/relationships" xmlns:p="http://schemas.openxmlformats.org/presentationml/2006/main">
   <p:cSld>
     <p:spTree>
       <p:nvGrpSpPr>
@@ -490,7 +271,7 @@
         <p:nvSpPr>
           <p:cNvPr id="2" name="Slide Image Placeholder 1"/>
           <p:cNvSpPr>
-            <a:spLocks noGrp="1"/>
+            <a:spLocks noGrp="1" noRot="1" noChangeAspect="1"/>
           </p:cNvSpPr>
           <p:nvPr>
             <p:ph type="sldImg" idx="2"/>
@@ -505,7 +286,7 @@
             <a:spLocks noGrp="1"/>
           </p:cNvSpPr>
           <p:nvPr>
-            <p:ph type="body" idx="3" sz="quarter"/>
+            <p:ph type="body" sz="quarter" idx="3"/>
           </p:nvPr>
         </p:nvSpPr>
         <p:spPr/>
@@ -514,7 +295,14 @@
           <a:lstStyle/>
           <a:p>
             <a:r>
-              <a:t>Good morning. I am Sayantan Bharati. My topic is Temporal Databases — how a database can store not just the current value of data, but its entire history over time, and why that matters in the real world.</a:t>
+              <a:t>Good morning. I am Sayantan Bharati. My topic is Temporal Databases </a:t>
+            </a:r>
+            <a:r>
+              <a:rPr lang="en-IN"/>
+              <a:t>:</a:t>
+            </a:r>
+            <a:r>
+              <a:t> how a database can store not just the current value of data, but its entire history over time, and why that matters in the real world.</a:t>
             </a:r>
           </a:p>
         </p:txBody>
@@ -526,7 +314,7 @@
             <a:spLocks noGrp="1"/>
           </p:cNvSpPr>
           <p:nvPr>
-            <p:ph type="sldNum" idx="5" sz="quarter"/>
+            <p:ph type="sldNum" sz="quarter" idx="5"/>
           </p:nvPr>
         </p:nvSpPr>
         <p:spPr/>
@@ -540,7 +328,7 @@
 </file>
 
 <file path=ppt/notesSlides/notesSlide10.xml><?xml version="1.0" encoding="utf-8"?>
-<p:notes xmlns:a="http://schemas.openxmlformats.org/drawingml/2006/main" xmlns:p="http://schemas.openxmlformats.org/presentationml/2006/main" xmlns:r="http://schemas.openxmlformats.org/officeDocument/2006/relationships">
+<p:notes xmlns:a="http://schemas.openxmlformats.org/drawingml/2006/main" xmlns:r="http://schemas.openxmlformats.org/officeDocument/2006/relationships" xmlns:p="http://schemas.openxmlformats.org/presentationml/2006/main">
   <p:cSld>
     <p:spTree>
       <p:nvGrpSpPr>
@@ -560,7 +348,7 @@
         <p:nvSpPr>
           <p:cNvPr id="2" name="Slide Image Placeholder 1"/>
           <p:cNvSpPr>
-            <a:spLocks noGrp="1"/>
+            <a:spLocks noGrp="1" noRot="1" noChangeAspect="1"/>
           </p:cNvSpPr>
           <p:nvPr>
             <p:ph type="sldImg" idx="2"/>
@@ -575,7 +363,7 @@
             <a:spLocks noGrp="1"/>
           </p:cNvSpPr>
           <p:nvPr>
-            <p:ph type="body" idx="3" sz="quarter"/>
+            <p:ph type="body" sz="quarter" idx="3"/>
           </p:nvPr>
         </p:nvSpPr>
         <p:spPr/>
@@ -596,7 +384,7 @@
             <a:spLocks noGrp="1"/>
           </p:cNvSpPr>
           <p:nvPr>
-            <p:ph type="sldNum" idx="5" sz="quarter"/>
+            <p:ph type="sldNum" sz="quarter" idx="5"/>
           </p:nvPr>
         </p:nvSpPr>
         <p:spPr/>
@@ -610,7 +398,7 @@
 </file>
 
 <file path=ppt/notesSlides/notesSlide11.xml><?xml version="1.0" encoding="utf-8"?>
-<p:notes xmlns:a="http://schemas.openxmlformats.org/drawingml/2006/main" xmlns:p="http://schemas.openxmlformats.org/presentationml/2006/main" xmlns:r="http://schemas.openxmlformats.org/officeDocument/2006/relationships">
+<p:notes xmlns:a="http://schemas.openxmlformats.org/drawingml/2006/main" xmlns:r="http://schemas.openxmlformats.org/officeDocument/2006/relationships" xmlns:p="http://schemas.openxmlformats.org/presentationml/2006/main">
   <p:cSld>
     <p:spTree>
       <p:nvGrpSpPr>
@@ -630,7 +418,7 @@
         <p:nvSpPr>
           <p:cNvPr id="2" name="Slide Image Placeholder 1"/>
           <p:cNvSpPr>
-            <a:spLocks noGrp="1"/>
+            <a:spLocks noGrp="1" noRot="1" noChangeAspect="1"/>
           </p:cNvSpPr>
           <p:nvPr>
             <p:ph type="sldImg" idx="2"/>
@@ -645,7 +433,7 @@
             <a:spLocks noGrp="1"/>
           </p:cNvSpPr>
           <p:nvPr>
-            <p:ph type="body" idx="3" sz="quarter"/>
+            <p:ph type="body" sz="quarter" idx="3"/>
           </p:nvPr>
         </p:nvSpPr>
         <p:spPr/>
@@ -666,7 +454,7 @@
             <a:spLocks noGrp="1"/>
           </p:cNvSpPr>
           <p:nvPr>
-            <p:ph type="sldNum" idx="5" sz="quarter"/>
+            <p:ph type="sldNum" sz="quarter" idx="5"/>
           </p:nvPr>
         </p:nvSpPr>
         <p:spPr/>
@@ -680,7 +468,7 @@
 </file>
 
 <file path=ppt/notesSlides/notesSlide12.xml><?xml version="1.0" encoding="utf-8"?>
-<p:notes xmlns:a="http://schemas.openxmlformats.org/drawingml/2006/main" xmlns:p="http://schemas.openxmlformats.org/presentationml/2006/main" xmlns:r="http://schemas.openxmlformats.org/officeDocument/2006/relationships">
+<p:notes xmlns:a="http://schemas.openxmlformats.org/drawingml/2006/main" xmlns:r="http://schemas.openxmlformats.org/officeDocument/2006/relationships" xmlns:p="http://schemas.openxmlformats.org/presentationml/2006/main">
   <p:cSld>
     <p:spTree>
       <p:nvGrpSpPr>
@@ -700,7 +488,7 @@
         <p:nvSpPr>
           <p:cNvPr id="2" name="Slide Image Placeholder 1"/>
           <p:cNvSpPr>
-            <a:spLocks noGrp="1"/>
+            <a:spLocks noGrp="1" noRot="1" noChangeAspect="1"/>
           </p:cNvSpPr>
           <p:nvPr>
             <p:ph type="sldImg" idx="2"/>
@@ -715,7 +503,7 @@
             <a:spLocks noGrp="1"/>
           </p:cNvSpPr>
           <p:nvPr>
-            <p:ph type="body" idx="3" sz="quarter"/>
+            <p:ph type="body" sz="quarter" idx="3"/>
           </p:nvPr>
         </p:nvSpPr>
         <p:spPr/>
@@ -736,7 +524,7 @@
             <a:spLocks noGrp="1"/>
           </p:cNvSpPr>
           <p:nvPr>
-            <p:ph type="sldNum" idx="5" sz="quarter"/>
+            <p:ph type="sldNum" sz="quarter" idx="5"/>
           </p:nvPr>
         </p:nvSpPr>
         <p:spPr/>
@@ -750,7 +538,7 @@
 </file>
 
 <file path=ppt/notesSlides/notesSlide13.xml><?xml version="1.0" encoding="utf-8"?>
-<p:notes xmlns:a="http://schemas.openxmlformats.org/drawingml/2006/main" xmlns:p="http://schemas.openxmlformats.org/presentationml/2006/main" xmlns:r="http://schemas.openxmlformats.org/officeDocument/2006/relationships">
+<p:notes xmlns:a="http://schemas.openxmlformats.org/drawingml/2006/main" xmlns:r="http://schemas.openxmlformats.org/officeDocument/2006/relationships" xmlns:p="http://schemas.openxmlformats.org/presentationml/2006/main">
   <p:cSld>
     <p:spTree>
       <p:nvGrpSpPr>
@@ -770,7 +558,7 @@
         <p:nvSpPr>
           <p:cNvPr id="2" name="Slide Image Placeholder 1"/>
           <p:cNvSpPr>
-            <a:spLocks noGrp="1"/>
+            <a:spLocks noGrp="1" noRot="1" noChangeAspect="1"/>
           </p:cNvSpPr>
           <p:nvPr>
             <p:ph type="sldImg" idx="2"/>
@@ -785,7 +573,7 @@
             <a:spLocks noGrp="1"/>
           </p:cNvSpPr>
           <p:nvPr>
-            <p:ph type="body" idx="3" sz="quarter"/>
+            <p:ph type="body" sz="quarter" idx="3"/>
           </p:nvPr>
         </p:nvSpPr>
         <p:spPr/>
@@ -806,7 +594,7 @@
             <a:spLocks noGrp="1"/>
           </p:cNvSpPr>
           <p:nvPr>
-            <p:ph type="sldNum" idx="5" sz="quarter"/>
+            <p:ph type="sldNum" sz="quarter" idx="5"/>
           </p:nvPr>
         </p:nvSpPr>
         <p:spPr/>
@@ -820,7 +608,7 @@
 </file>
 
 <file path=ppt/notesSlides/notesSlide14.xml><?xml version="1.0" encoding="utf-8"?>
-<p:notes xmlns:a="http://schemas.openxmlformats.org/drawingml/2006/main" xmlns:p="http://schemas.openxmlformats.org/presentationml/2006/main" xmlns:r="http://schemas.openxmlformats.org/officeDocument/2006/relationships">
+<p:notes xmlns:a="http://schemas.openxmlformats.org/drawingml/2006/main" xmlns:r="http://schemas.openxmlformats.org/officeDocument/2006/relationships" xmlns:p="http://schemas.openxmlformats.org/presentationml/2006/main">
   <p:cSld>
     <p:spTree>
       <p:nvGrpSpPr>
@@ -840,7 +628,7 @@
         <p:nvSpPr>
           <p:cNvPr id="2" name="Slide Image Placeholder 1"/>
           <p:cNvSpPr>
-            <a:spLocks noGrp="1"/>
+            <a:spLocks noGrp="1" noRot="1" noChangeAspect="1"/>
           </p:cNvSpPr>
           <p:nvPr>
             <p:ph type="sldImg" idx="2"/>
@@ -855,7 +643,7 @@
             <a:spLocks noGrp="1"/>
           </p:cNvSpPr>
           <p:nvPr>
-            <p:ph type="body" idx="3" sz="quarter"/>
+            <p:ph type="body" sz="quarter" idx="3"/>
           </p:nvPr>
         </p:nvSpPr>
         <p:spPr/>
@@ -864,7 +652,14 @@
           <a:lstStyle/>
           <a:p>
             <a:r>
-              <a:t>These are the standard references behind this presentation. Thank you for listening — I am happy to take any questions.</a:t>
+              <a:t>These are the standard references behind this presentation. Thank you for listening </a:t>
+            </a:r>
+            <a:r>
+              <a:rPr lang="en-IN"/>
+              <a:t>:</a:t>
+            </a:r>
+            <a:r>
+              <a:t> I am happy to take any questions.</a:t>
             </a:r>
           </a:p>
         </p:txBody>
@@ -876,7 +671,7 @@
             <a:spLocks noGrp="1"/>
           </p:cNvSpPr>
           <p:nvPr>
-            <p:ph type="sldNum" idx="5" sz="quarter"/>
+            <p:ph type="sldNum" sz="quarter" idx="5"/>
           </p:nvPr>
         </p:nvSpPr>
         <p:spPr/>
@@ -890,7 +685,7 @@
 </file>
 
 <file path=ppt/notesSlides/notesSlide2.xml><?xml version="1.0" encoding="utf-8"?>
-<p:notes xmlns:a="http://schemas.openxmlformats.org/drawingml/2006/main" xmlns:p="http://schemas.openxmlformats.org/presentationml/2006/main" xmlns:r="http://schemas.openxmlformats.org/officeDocument/2006/relationships">
+<p:notes xmlns:a="http://schemas.openxmlformats.org/drawingml/2006/main" xmlns:r="http://schemas.openxmlformats.org/officeDocument/2006/relationships" xmlns:p="http://schemas.openxmlformats.org/presentationml/2006/main">
   <p:cSld>
     <p:spTree>
       <p:nvGrpSpPr>
@@ -910,7 +705,7 @@
         <p:nvSpPr>
           <p:cNvPr id="2" name="Slide Image Placeholder 1"/>
           <p:cNvSpPr>
-            <a:spLocks noGrp="1"/>
+            <a:spLocks noGrp="1" noRot="1" noChangeAspect="1"/>
           </p:cNvSpPr>
           <p:nvPr>
             <p:ph type="sldImg" idx="2"/>
@@ -925,7 +720,7 @@
             <a:spLocks noGrp="1"/>
           </p:cNvSpPr>
           <p:nvPr>
-            <p:ph type="body" idx="3" sz="quarter"/>
+            <p:ph type="body" sz="quarter" idx="3"/>
           </p:nvPr>
         </p:nvSpPr>
         <p:spPr/>
@@ -946,7 +741,7 @@
             <a:spLocks noGrp="1"/>
           </p:cNvSpPr>
           <p:nvPr>
-            <p:ph type="sldNum" idx="5" sz="quarter"/>
+            <p:ph type="sldNum" sz="quarter" idx="5"/>
           </p:nvPr>
         </p:nvSpPr>
         <p:spPr/>
@@ -960,7 +755,7 @@
 </file>
 
 <file path=ppt/notesSlides/notesSlide3.xml><?xml version="1.0" encoding="utf-8"?>
-<p:notes xmlns:a="http://schemas.openxmlformats.org/drawingml/2006/main" xmlns:p="http://schemas.openxmlformats.org/presentationml/2006/main" xmlns:r="http://schemas.openxmlformats.org/officeDocument/2006/relationships">
+<p:notes xmlns:a="http://schemas.openxmlformats.org/drawingml/2006/main" xmlns:r="http://schemas.openxmlformats.org/officeDocument/2006/relationships" xmlns:p="http://schemas.openxmlformats.org/presentationml/2006/main">
   <p:cSld>
     <p:spTree>
       <p:nvGrpSpPr>
@@ -980,7 +775,7 @@
         <p:nvSpPr>
           <p:cNvPr id="2" name="Slide Image Placeholder 1"/>
           <p:cNvSpPr>
-            <a:spLocks noGrp="1"/>
+            <a:spLocks noGrp="1" noRot="1" noChangeAspect="1"/>
           </p:cNvSpPr>
           <p:nvPr>
             <p:ph type="sldImg" idx="2"/>
@@ -995,7 +790,7 @@
             <a:spLocks noGrp="1"/>
           </p:cNvSpPr>
           <p:nvPr>
-            <p:ph type="body" idx="3" sz="quarter"/>
+            <p:ph type="body" sz="quarter" idx="3"/>
           </p:nvPr>
         </p:nvSpPr>
         <p:spPr/>
@@ -1016,7 +811,7 @@
             <a:spLocks noGrp="1"/>
           </p:cNvSpPr>
           <p:nvPr>
-            <p:ph type="sldNum" idx="5" sz="quarter"/>
+            <p:ph type="sldNum" sz="quarter" idx="5"/>
           </p:nvPr>
         </p:nvSpPr>
         <p:spPr/>
@@ -1030,7 +825,7 @@
 </file>
 
 <file path=ppt/notesSlides/notesSlide4.xml><?xml version="1.0" encoding="utf-8"?>
-<p:notes xmlns:a="http://schemas.openxmlformats.org/drawingml/2006/main" xmlns:p="http://schemas.openxmlformats.org/presentationml/2006/main" xmlns:r="http://schemas.openxmlformats.org/officeDocument/2006/relationships">
+<p:notes xmlns:a="http://schemas.openxmlformats.org/drawingml/2006/main" xmlns:r="http://schemas.openxmlformats.org/officeDocument/2006/relationships" xmlns:p="http://schemas.openxmlformats.org/presentationml/2006/main">
   <p:cSld>
     <p:spTree>
       <p:nvGrpSpPr>
@@ -1050,7 +845,7 @@
         <p:nvSpPr>
           <p:cNvPr id="2" name="Slide Image Placeholder 1"/>
           <p:cNvSpPr>
-            <a:spLocks noGrp="1"/>
+            <a:spLocks noGrp="1" noRot="1" noChangeAspect="1"/>
           </p:cNvSpPr>
           <p:nvPr>
             <p:ph type="sldImg" idx="2"/>
@@ -1065,7 +860,7 @@
             <a:spLocks noGrp="1"/>
           </p:cNvSpPr>
           <p:nvPr>
-            <p:ph type="body" idx="3" sz="quarter"/>
+            <p:ph type="body" sz="quarter" idx="3"/>
           </p:nvPr>
         </p:nvSpPr>
         <p:spPr/>
@@ -1086,7 +881,7 @@
             <a:spLocks noGrp="1"/>
           </p:cNvSpPr>
           <p:nvPr>
-            <p:ph type="sldNum" idx="5" sz="quarter"/>
+            <p:ph type="sldNum" sz="quarter" idx="5"/>
           </p:nvPr>
         </p:nvSpPr>
         <p:spPr/>
@@ -1100,7 +895,7 @@
 </file>
 
 <file path=ppt/notesSlides/notesSlide5.xml><?xml version="1.0" encoding="utf-8"?>
-<p:notes xmlns:a="http://schemas.openxmlformats.org/drawingml/2006/main" xmlns:p="http://schemas.openxmlformats.org/presentationml/2006/main" xmlns:r="http://schemas.openxmlformats.org/officeDocument/2006/relationships">
+<p:notes xmlns:a="http://schemas.openxmlformats.org/drawingml/2006/main" xmlns:r="http://schemas.openxmlformats.org/officeDocument/2006/relationships" xmlns:p="http://schemas.openxmlformats.org/presentationml/2006/main">
   <p:cSld>
     <p:spTree>
       <p:nvGrpSpPr>
@@ -1120,7 +915,7 @@
         <p:nvSpPr>
           <p:cNvPr id="2" name="Slide Image Placeholder 1"/>
           <p:cNvSpPr>
-            <a:spLocks noGrp="1"/>
+            <a:spLocks noGrp="1" noRot="1" noChangeAspect="1"/>
           </p:cNvSpPr>
           <p:nvPr>
             <p:ph type="sldImg" idx="2"/>
@@ -1135,7 +930,7 @@
             <a:spLocks noGrp="1"/>
           </p:cNvSpPr>
           <p:nvPr>
-            <p:ph type="body" idx="3" sz="quarter"/>
+            <p:ph type="body" sz="quarter" idx="3"/>
           </p:nvPr>
         </p:nvSpPr>
         <p:spPr/>
@@ -1156,7 +951,7 @@
             <a:spLocks noGrp="1"/>
           </p:cNvSpPr>
           <p:nvPr>
-            <p:ph type="sldNum" idx="5" sz="quarter"/>
+            <p:ph type="sldNum" sz="quarter" idx="5"/>
           </p:nvPr>
         </p:nvSpPr>
         <p:spPr/>
@@ -1170,7 +965,7 @@
 </file>
 
 <file path=ppt/notesSlides/notesSlide6.xml><?xml version="1.0" encoding="utf-8"?>
-<p:notes xmlns:a="http://schemas.openxmlformats.org/drawingml/2006/main" xmlns:p="http://schemas.openxmlformats.org/presentationml/2006/main" xmlns:r="http://schemas.openxmlformats.org/officeDocument/2006/relationships">
+<p:notes xmlns:a="http://schemas.openxmlformats.org/drawingml/2006/main" xmlns:r="http://schemas.openxmlformats.org/officeDocument/2006/relationships" xmlns:p="http://schemas.openxmlformats.org/presentationml/2006/main">
   <p:cSld>
     <p:spTree>
       <p:nvGrpSpPr>
@@ -1190,7 +985,7 @@
         <p:nvSpPr>
           <p:cNvPr id="2" name="Slide Image Placeholder 1"/>
           <p:cNvSpPr>
-            <a:spLocks noGrp="1"/>
+            <a:spLocks noGrp="1" noRot="1" noChangeAspect="1"/>
           </p:cNvSpPr>
           <p:nvPr>
             <p:ph type="sldImg" idx="2"/>
@@ -1205,7 +1000,7 @@
             <a:spLocks noGrp="1"/>
           </p:cNvSpPr>
           <p:nvPr>
-            <p:ph type="body" idx="3" sz="quarter"/>
+            <p:ph type="body" sz="quarter" idx="3"/>
           </p:nvPr>
         </p:nvSpPr>
         <p:spPr/>
@@ -1226,7 +1021,7 @@
             <a:spLocks noGrp="1"/>
           </p:cNvSpPr>
           <p:nvPr>
-            <p:ph type="sldNum" idx="5" sz="quarter"/>
+            <p:ph type="sldNum" sz="quarter" idx="5"/>
           </p:nvPr>
         </p:nvSpPr>
         <p:spPr/>
@@ -1240,7 +1035,7 @@
 </file>
 
 <file path=ppt/notesSlides/notesSlide7.xml><?xml version="1.0" encoding="utf-8"?>
-<p:notes xmlns:a="http://schemas.openxmlformats.org/drawingml/2006/main" xmlns:p="http://schemas.openxmlformats.org/presentationml/2006/main" xmlns:r="http://schemas.openxmlformats.org/officeDocument/2006/relationships">
+<p:notes xmlns:a="http://schemas.openxmlformats.org/drawingml/2006/main" xmlns:r="http://schemas.openxmlformats.org/officeDocument/2006/relationships" xmlns:p="http://schemas.openxmlformats.org/presentationml/2006/main">
   <p:cSld>
     <p:spTree>
       <p:nvGrpSpPr>
@@ -1260,7 +1055,7 @@
         <p:nvSpPr>
           <p:cNvPr id="2" name="Slide Image Placeholder 1"/>
           <p:cNvSpPr>
-            <a:spLocks noGrp="1"/>
+            <a:spLocks noGrp="1" noRot="1" noChangeAspect="1"/>
           </p:cNvSpPr>
           <p:nvPr>
             <p:ph type="sldImg" idx="2"/>
@@ -1275,7 +1070,7 @@
             <a:spLocks noGrp="1"/>
           </p:cNvSpPr>
           <p:nvPr>
-            <p:ph type="body" idx="3" sz="quarter"/>
+            <p:ph type="body" sz="quarter" idx="3"/>
           </p:nvPr>
         </p:nvSpPr>
         <p:spPr/>
@@ -1296,7 +1091,7 @@
             <a:spLocks noGrp="1"/>
           </p:cNvSpPr>
           <p:nvPr>
-            <p:ph type="sldNum" idx="5" sz="quarter"/>
+            <p:ph type="sldNum" sz="quarter" idx="5"/>
           </p:nvPr>
         </p:nvSpPr>
         <p:spPr/>
@@ -1310,7 +1105,7 @@
 </file>
 
 <file path=ppt/notesSlides/notesSlide8.xml><?xml version="1.0" encoding="utf-8"?>
-<p:notes xmlns:a="http://schemas.openxmlformats.org/drawingml/2006/main" xmlns:p="http://schemas.openxmlformats.org/presentationml/2006/main" xmlns:r="http://schemas.openxmlformats.org/officeDocument/2006/relationships">
+<p:notes xmlns:a="http://schemas.openxmlformats.org/drawingml/2006/main" xmlns:r="http://schemas.openxmlformats.org/officeDocument/2006/relationships" xmlns:p="http://schemas.openxmlformats.org/presentationml/2006/main">
   <p:cSld>
     <p:spTree>
       <p:nvGrpSpPr>
@@ -1330,7 +1125,7 @@
         <p:nvSpPr>
           <p:cNvPr id="2" name="Slide Image Placeholder 1"/>
           <p:cNvSpPr>
-            <a:spLocks noGrp="1"/>
+            <a:spLocks noGrp="1" noRot="1" noChangeAspect="1"/>
           </p:cNvSpPr>
           <p:nvPr>
             <p:ph type="sldImg" idx="2"/>
@@ -1345,7 +1140,7 @@
             <a:spLocks noGrp="1"/>
           </p:cNvSpPr>
           <p:nvPr>
-            <p:ph type="body" idx="3" sz="quarter"/>
+            <p:ph type="body" sz="quarter" idx="3"/>
           </p:nvPr>
         </p:nvSpPr>
         <p:spPr/>
@@ -1366,7 +1161,7 @@
             <a:spLocks noGrp="1"/>
           </p:cNvSpPr>
           <p:nvPr>
-            <p:ph type="sldNum" idx="5" sz="quarter"/>
+            <p:ph type="sldNum" sz="quarter" idx="5"/>
           </p:nvPr>
         </p:nvSpPr>
         <p:spPr/>
@@ -1380,7 +1175,7 @@
 </file>
 
 <file path=ppt/notesSlides/notesSlide9.xml><?xml version="1.0" encoding="utf-8"?>
-<p:notes xmlns:a="http://schemas.openxmlformats.org/drawingml/2006/main" xmlns:p="http://schemas.openxmlformats.org/presentationml/2006/main" xmlns:r="http://schemas.openxmlformats.org/officeDocument/2006/relationships">
+<p:notes xmlns:a="http://schemas.openxmlformats.org/drawingml/2006/main" xmlns:r="http://schemas.openxmlformats.org/officeDocument/2006/relationships" xmlns:p="http://schemas.openxmlformats.org/presentationml/2006/main">
   <p:cSld>
     <p:spTree>
       <p:nvGrpSpPr>
@@ -1400,7 +1195,7 @@
         <p:nvSpPr>
           <p:cNvPr id="2" name="Slide Image Placeholder 1"/>
           <p:cNvSpPr>
-            <a:spLocks noGrp="1"/>
+            <a:spLocks noGrp="1" noRot="1" noChangeAspect="1"/>
           </p:cNvSpPr>
           <p:nvPr>
             <p:ph type="sldImg" idx="2"/>
@@ -1415,7 +1210,7 @@
             <a:spLocks noGrp="1"/>
           </p:cNvSpPr>
           <p:nvPr>
-            <p:ph type="body" idx="3" sz="quarter"/>
+            <p:ph type="body" sz="quarter" idx="3"/>
           </p:nvPr>
         </p:nvSpPr>
         <p:spPr/>
@@ -1424,7 +1219,14 @@
           <a:lstStyle/>
           <a:p>
             <a:r>
-              <a:t>Once time is a period rather than a point, comparisons multiply. Allen's algebra enumerates all thirteen ways two intervals can relate — before, overlaps, contains and so on. Temporal query languages embed these so that "overlapping" queries become one predicate instead of a tangle of greater-than and less-than conditions.</a:t>
+              <a:t>Once time is a period rather than a point, comparisons multiply. Allen's algebra enumerates all thirteen ways two intervals can relate </a:t>
+            </a:r>
+            <a:r>
+              <a:rPr lang="en-IN"/>
+              <a:t>:</a:t>
+            </a:r>
+            <a:r>
+              <a:t> before, overlaps, contains and so on. Temporal query languages embed these so that "overlapping" queries become one predicate instead of a tangle of greater-than and less-than conditions.</a:t>
             </a:r>
           </a:p>
         </p:txBody>
@@ -1436,7 +1238,7 @@
             <a:spLocks noGrp="1"/>
           </p:cNvSpPr>
           <p:nvPr>
-            <p:ph type="sldNum" idx="5" sz="quarter"/>
+            <p:ph type="sldNum" sz="quarter" idx="5"/>
           </p:nvPr>
         </p:nvSpPr>
         <p:spPr/>
@@ -1487,11 +1289,12 @@
         <a:solidFill>
           <a:srgbClr val="FFFFFF"/>
         </a:solidFill>
+        <a:effectLst/>
       </p:bgPr>
     </p:bg>
     <p:spTree>
       <p:nvGrpSpPr>
-        <p:cNvPr id="2" name=""/>
+        <p:cNvPr id="1" name=""/>
         <p:cNvGrpSpPr/>
         <p:nvPr/>
       </p:nvGrpSpPr>
@@ -1525,6 +1328,13 @@
             <a:prstDash val="solid"/>
           </a:ln>
         </p:spPr>
+        <p:txBody>
+          <a:bodyPr/>
+          <a:lstStyle/>
+          <a:p>
+            <a:endParaRPr lang="en-IN"/>
+          </a:p>
+        </p:txBody>
       </p:sp>
       <p:sp>
         <p:nvSpPr>
@@ -1548,6 +1358,13 @@
             <a:prstDash val="solid"/>
           </a:ln>
         </p:spPr>
+        <p:txBody>
+          <a:bodyPr/>
+          <a:lstStyle/>
+          <a:p>
+            <a:endParaRPr lang="en-IN"/>
+          </a:p>
+        </p:txBody>
       </p:sp>
       <p:sp>
         <p:nvSpPr>
@@ -1591,6 +1408,13 @@
           </a:solidFill>
           <a:ln/>
         </p:spPr>
+        <p:txBody>
+          <a:bodyPr/>
+          <a:lstStyle/>
+          <a:p>
+            <a:endParaRPr lang="en-IN"/>
+          </a:p>
+        </p:txBody>
       </p:sp>
       <p:sp>
         <p:nvSpPr>
@@ -1634,6 +1458,13 @@
           </a:solidFill>
           <a:ln/>
         </p:spPr>
+        <p:txBody>
+          <a:bodyPr/>
+          <a:lstStyle/>
+          <a:p>
+            <a:endParaRPr lang="en-IN"/>
+          </a:p>
+        </p:txBody>
       </p:sp>
       <p:sp>
         <p:nvSpPr>
@@ -1674,6 +1505,13 @@
           </a:solidFill>
           <a:ln/>
         </p:spPr>
+        <p:txBody>
+          <a:bodyPr/>
+          <a:lstStyle/>
+          <a:p>
+            <a:endParaRPr lang="en-IN"/>
+          </a:p>
+        </p:txBody>
       </p:sp>
       <p:sp>
         <p:nvSpPr>
@@ -1717,6 +1555,13 @@
           </a:solidFill>
           <a:ln/>
         </p:spPr>
+        <p:txBody>
+          <a:bodyPr/>
+          <a:lstStyle/>
+          <a:p>
+            <a:endParaRPr lang="en-IN"/>
+          </a:p>
+        </p:txBody>
       </p:sp>
       <p:sp>
         <p:nvSpPr>
@@ -1760,6 +1605,13 @@
           </a:solidFill>
           <a:ln/>
         </p:spPr>
+        <p:txBody>
+          <a:bodyPr/>
+          <a:lstStyle/>
+          <a:p>
+            <a:endParaRPr lang="en-IN"/>
+          </a:p>
+        </p:txBody>
       </p:sp>
       <p:sp>
         <p:nvSpPr>
@@ -1803,6 +1655,13 @@
           </a:solidFill>
           <a:ln/>
         </p:spPr>
+        <p:txBody>
+          <a:bodyPr/>
+          <a:lstStyle/>
+          <a:p>
+            <a:endParaRPr lang="en-IN"/>
+          </a:p>
+        </p:txBody>
       </p:sp>
       <p:sp>
         <p:nvSpPr>
@@ -1843,6 +1702,13 @@
           </a:solidFill>
           <a:ln/>
         </p:spPr>
+        <p:txBody>
+          <a:bodyPr/>
+          <a:lstStyle/>
+          <a:p>
+            <a:endParaRPr lang="en-IN"/>
+          </a:p>
+        </p:txBody>
       </p:sp>
       <p:sp>
         <p:nvSpPr>
@@ -1883,6 +1749,13 @@
           </a:solidFill>
           <a:ln/>
         </p:spPr>
+        <p:txBody>
+          <a:bodyPr/>
+          <a:lstStyle/>
+          <a:p>
+            <a:endParaRPr lang="en-IN"/>
+          </a:p>
+        </p:txBody>
       </p:sp>
     </p:spTree>
   </p:cSld>
@@ -1900,11 +1773,12 @@
         <a:solidFill>
           <a:srgbClr val="FFFFFF"/>
         </a:solidFill>
+        <a:effectLst/>
       </p:bgPr>
     </p:bg>
     <p:spTree>
       <p:nvGrpSpPr>
-        <p:cNvPr id="2" name=""/>
+        <p:cNvPr id="1" name=""/>
         <p:cNvGrpSpPr/>
         <p:nvPr/>
       </p:nvGrpSpPr>
@@ -1938,6 +1812,13 @@
             <a:prstDash val="solid"/>
           </a:ln>
         </p:spPr>
+        <p:txBody>
+          <a:bodyPr/>
+          <a:lstStyle/>
+          <a:p>
+            <a:endParaRPr lang="en-IN"/>
+          </a:p>
+        </p:txBody>
       </p:sp>
       <p:sp>
         <p:nvSpPr>
@@ -1961,6 +1842,13 @@
             <a:prstDash val="solid"/>
           </a:ln>
         </p:spPr>
+        <p:txBody>
+          <a:bodyPr/>
+          <a:lstStyle/>
+          <a:p>
+            <a:endParaRPr lang="en-IN"/>
+          </a:p>
+        </p:txBody>
       </p:sp>
       <p:sp>
         <p:nvSpPr>
@@ -2004,6 +1892,13 @@
           </a:solidFill>
           <a:ln/>
         </p:spPr>
+        <p:txBody>
+          <a:bodyPr/>
+          <a:lstStyle/>
+          <a:p>
+            <a:endParaRPr lang="en-IN"/>
+          </a:p>
+        </p:txBody>
       </p:sp>
       <p:sp>
         <p:nvSpPr>
@@ -2047,6 +1942,13 @@
           </a:solidFill>
           <a:ln/>
         </p:spPr>
+        <p:txBody>
+          <a:bodyPr/>
+          <a:lstStyle/>
+          <a:p>
+            <a:endParaRPr lang="en-IN"/>
+          </a:p>
+        </p:txBody>
       </p:sp>
       <p:sp>
         <p:nvSpPr>
@@ -2087,6 +1989,13 @@
           </a:solidFill>
           <a:ln/>
         </p:spPr>
+        <p:txBody>
+          <a:bodyPr/>
+          <a:lstStyle/>
+          <a:p>
+            <a:endParaRPr lang="en-IN"/>
+          </a:p>
+        </p:txBody>
       </p:sp>
       <p:sp>
         <p:nvSpPr>
@@ -2130,6 +2039,13 @@
           </a:solidFill>
           <a:ln/>
         </p:spPr>
+        <p:txBody>
+          <a:bodyPr/>
+          <a:lstStyle/>
+          <a:p>
+            <a:endParaRPr lang="en-IN"/>
+          </a:p>
+        </p:txBody>
       </p:sp>
       <p:sp>
         <p:nvSpPr>
@@ -2173,6 +2089,13 @@
           </a:solidFill>
           <a:ln/>
         </p:spPr>
+        <p:txBody>
+          <a:bodyPr/>
+          <a:lstStyle/>
+          <a:p>
+            <a:endParaRPr lang="en-IN"/>
+          </a:p>
+        </p:txBody>
       </p:sp>
       <p:sp>
         <p:nvSpPr>
@@ -2216,6 +2139,13 @@
           </a:solidFill>
           <a:ln/>
         </p:spPr>
+        <p:txBody>
+          <a:bodyPr/>
+          <a:lstStyle/>
+          <a:p>
+            <a:endParaRPr lang="en-IN"/>
+          </a:p>
+        </p:txBody>
       </p:sp>
       <p:sp>
         <p:nvSpPr>
@@ -2256,6 +2186,13 @@
           </a:solidFill>
           <a:ln/>
         </p:spPr>
+        <p:txBody>
+          <a:bodyPr/>
+          <a:lstStyle/>
+          <a:p>
+            <a:endParaRPr lang="en-IN"/>
+          </a:p>
+        </p:txBody>
       </p:sp>
       <p:sp>
         <p:nvSpPr>
@@ -2296,6 +2233,13 @@
           </a:solidFill>
           <a:ln/>
         </p:spPr>
+        <p:txBody>
+          <a:bodyPr/>
+          <a:lstStyle/>
+          <a:p>
+            <a:endParaRPr lang="en-IN"/>
+          </a:p>
+        </p:txBody>
       </p:sp>
     </p:spTree>
   </p:cSld>
@@ -2308,6 +2252,11 @@
 <file path=ppt/slideMasters/slideMaster1.xml><?xml version="1.0" encoding="utf-8"?>
 <p:sldMaster xmlns:a="http://schemas.openxmlformats.org/drawingml/2006/main" xmlns:r="http://schemas.openxmlformats.org/officeDocument/2006/relationships" xmlns:p="http://schemas.openxmlformats.org/presentationml/2006/main">
   <p:cSld>
+    <p:bg>
+      <p:bgRef idx="1001">
+        <a:schemeClr val="bg1"/>
+      </p:bgRef>
+    </p:bg>
     <p:spTree>
       <p:nvGrpSpPr>
         <p:cNvPr id="1" name=""/>
@@ -2585,7 +2534,7 @@
 </file>
 
 <file path=ppt/slides/slide1.xml><?xml version="1.0" encoding="utf-8"?>
-<p:sld xmlns:a="http://schemas.openxmlformats.org/drawingml/2006/main" xmlns:p="http://schemas.openxmlformats.org/presentationml/2006/main" xmlns:r="http://schemas.openxmlformats.org/officeDocument/2006/relationships">
+<p:sld xmlns:a="http://schemas.openxmlformats.org/drawingml/2006/main" xmlns:r="http://schemas.openxmlformats.org/officeDocument/2006/relationships" xmlns:p="http://schemas.openxmlformats.org/presentationml/2006/main">
   <p:cSld>
     <p:spTree>
       <p:nvGrpSpPr>
@@ -2593,7 +2542,14 @@
         <p:cNvGrpSpPr/>
         <p:nvPr/>
       </p:nvGrpSpPr>
-      <p:grpSpPr/>
+      <p:grpSpPr>
+        <a:xfrm>
+          <a:off x="0" y="0"/>
+          <a:ext cx="0" cy="0"/>
+          <a:chOff x="0" y="0"/>
+          <a:chExt cx="0" cy="0"/>
+        </a:xfrm>
+      </p:grpSpPr>
       <p:sp>
         <p:nvSpPr>
           <p:cNvPr id="2" name="TextBox 1"/>
@@ -2611,13 +2567,13 @@
           <a:noFill/>
         </p:spPr>
         <p:txBody>
-          <a:bodyPr wrap="square" anchor="t" lIns="45720" rIns="45720" tIns="27432" bIns="27432">
+          <a:bodyPr wrap="square" lIns="45720" tIns="27432" rIns="45720" bIns="27432" anchor="t">
             <a:spAutoFit/>
           </a:bodyPr>
           <a:lstStyle/>
           <a:p>
             <a:r>
-              <a:rPr sz="3600" b="1" i="0">
+              <a:rPr sz="3600" b="1" i="0" dirty="0">
                 <a:solidFill>
                   <a:srgbClr val="2C3C43"/>
                 </a:solidFill>
@@ -2644,7 +2600,7 @@
           <a:noFill/>
         </p:spPr>
         <p:txBody>
-          <a:bodyPr wrap="square" anchor="t" lIns="45720" rIns="45720" tIns="27432" bIns="27432">
+          <a:bodyPr wrap="square" lIns="45720" tIns="27432" rIns="45720" bIns="27432" anchor="t">
             <a:spAutoFit/>
           </a:bodyPr>
           <a:lstStyle/>
@@ -2850,10 +2806,11 @@
           </a:fontRef>
         </p:style>
         <p:txBody>
-          <a:bodyPr rtlCol="0" anchor="ctr" wrap="square" lIns="45720" rIns="45720" tIns="18288" bIns="18288"/>
+          <a:bodyPr wrap="square" lIns="45720" tIns="18288" rIns="45720" bIns="18288" rtlCol="0" anchor="ctr"/>
           <a:lstStyle/>
           <a:p>
             <a:pPr algn="ctr"/>
+            <a:endParaRPr/>
           </a:p>
         </p:txBody>
       </p:sp>
@@ -2896,10 +2853,11 @@
           </a:fontRef>
         </p:style>
         <p:txBody>
-          <a:bodyPr rtlCol="0" anchor="ctr" wrap="square" lIns="45720" rIns="45720" tIns="18288" bIns="18288"/>
+          <a:bodyPr wrap="square" lIns="45720" tIns="18288" rIns="45720" bIns="18288" rtlCol="0" anchor="ctr"/>
           <a:lstStyle/>
           <a:p>
             <a:pPr algn="ctr"/>
+            <a:endParaRPr/>
           </a:p>
         </p:txBody>
       </p:sp>
@@ -2982,7 +2940,7 @@
 </file>
 
 <file path=ppt/slides/slide10.xml><?xml version="1.0" encoding="utf-8"?>
-<p:sld xmlns:a="http://schemas.openxmlformats.org/drawingml/2006/main" xmlns:p="http://schemas.openxmlformats.org/presentationml/2006/main" xmlns:r="http://schemas.openxmlformats.org/officeDocument/2006/relationships">
+<p:sld xmlns:a="http://schemas.openxmlformats.org/drawingml/2006/main" xmlns:r="http://schemas.openxmlformats.org/officeDocument/2006/relationships" xmlns:p="http://schemas.openxmlformats.org/presentationml/2006/main">
   <p:cSld>
     <p:spTree>
       <p:nvGrpSpPr>
@@ -2990,7 +2948,14 @@
         <p:cNvGrpSpPr/>
         <p:nvPr/>
       </p:nvGrpSpPr>
-      <p:grpSpPr/>
+      <p:grpSpPr>
+        <a:xfrm>
+          <a:off x="0" y="0"/>
+          <a:ext cx="0" cy="0"/>
+          <a:chOff x="0" y="0"/>
+          <a:chExt cx="0" cy="0"/>
+        </a:xfrm>
+      </p:grpSpPr>
       <p:sp>
         <p:nvSpPr>
           <p:cNvPr id="2" name="TextBox 1"/>
@@ -3008,7 +2973,7 @@
           <a:noFill/>
         </p:spPr>
         <p:txBody>
-          <a:bodyPr wrap="square" anchor="t" lIns="45720" rIns="45720" tIns="27432" bIns="27432">
+          <a:bodyPr wrap="square" lIns="45720" tIns="27432" rIns="45720" bIns="27432" anchor="t">
             <a:spAutoFit/>
           </a:bodyPr>
           <a:lstStyle/>
@@ -3041,7 +3006,7 @@
           <a:noFill/>
         </p:spPr>
         <p:txBody>
-          <a:bodyPr wrap="square" anchor="t" lIns="45720" rIns="45720" tIns="27432" bIns="27432">
+          <a:bodyPr wrap="square" lIns="45720" tIns="27432" rIns="45720" bIns="27432" anchor="t">
             <a:spAutoFit/>
           </a:bodyPr>
           <a:lstStyle/>
@@ -3074,7 +3039,7 @@
           <a:noFill/>
         </p:spPr>
         <p:txBody>
-          <a:bodyPr wrap="square" anchor="t" lIns="45720" rIns="45720" tIns="27432" bIns="27432">
+          <a:bodyPr wrap="square" lIns="45720" tIns="27432" rIns="45720" bIns="27432" anchor="t">
             <a:spAutoFit/>
           </a:bodyPr>
           <a:lstStyle/>
@@ -3100,7 +3065,7 @@
         <p:spPr>
           <a:xfrm>
             <a:off x="731520" y="1508760"/>
-            <a:ext cx="4206240" cy="4754880"/>
+            <a:ext cx="4206240" cy="3126497"/>
           </a:xfrm>
           <a:prstGeom prst="rect">
             <a:avLst/>
@@ -3123,7 +3088,7 @@
               <a:buChar char="•"/>
             </a:pPr>
             <a:r>
-              <a:rPr sz="1400" b="1" i="0">
+              <a:rPr sz="1400" b="1" i="0" dirty="0">
                 <a:solidFill>
                   <a:srgbClr val="2C3C43"/>
                 </a:solidFill>
@@ -3131,7 +3096,7 @@
               <a:t>Tuple versioning:</a:t>
             </a:r>
             <a:r>
-              <a:rPr sz="1400" b="0" i="0">
+              <a:rPr sz="1400" b="0" i="0" dirty="0">
                 <a:solidFill>
                   <a:srgbClr val="2C3C43"/>
                 </a:solidFill>
@@ -3150,7 +3115,7 @@
               <a:buChar char="•"/>
             </a:pPr>
             <a:r>
-              <a:rPr sz="1400" b="1" i="0">
+              <a:rPr sz="1400" b="1" i="0" dirty="0">
                 <a:solidFill>
                   <a:srgbClr val="2C3C43"/>
                 </a:solidFill>
@@ -3158,7 +3123,7 @@
               <a:t>Attribute-level timestamping:</a:t>
             </a:r>
             <a:r>
-              <a:rPr sz="1400" b="0" i="0">
+              <a:rPr sz="1400" b="0" i="0" dirty="0">
                 <a:solidFill>
                   <a:srgbClr val="2C3C43"/>
                 </a:solidFill>
@@ -3177,7 +3142,7 @@
               <a:buChar char="•"/>
             </a:pPr>
             <a:r>
-              <a:rPr sz="1400" b="1" i="0">
+              <a:rPr sz="1400" b="1" i="0" dirty="0">
                 <a:solidFill>
                   <a:srgbClr val="2C3C43"/>
                 </a:solidFill>
@@ -3185,12 +3150,28 @@
               <a:t>Transaction-time</a:t>
             </a:r>
             <a:r>
-              <a:rPr sz="1400" b="0" i="0">
-                <a:solidFill>
-                  <a:srgbClr val="2C3C43"/>
-                </a:solidFill>
-              </a:rPr>
-              <a:t> gives an append-only, immutable store — high write throughput.</a:t>
+              <a:rPr sz="1400" b="0" i="0" dirty="0">
+                <a:solidFill>
+                  <a:srgbClr val="2C3C43"/>
+                </a:solidFill>
+              </a:rPr>
+              <a:t> gives an append-only, immutable store </a:t>
+            </a:r>
+            <a:r>
+              <a:rPr lang="en-IN" sz="1400" b="0" i="0" dirty="0">
+                <a:solidFill>
+                  <a:srgbClr val="2C3C43"/>
+                </a:solidFill>
+              </a:rPr>
+              <a:t>:</a:t>
+            </a:r>
+            <a:r>
+              <a:rPr sz="1400" b="0" i="0" dirty="0">
+                <a:solidFill>
+                  <a:srgbClr val="2C3C43"/>
+                </a:solidFill>
+              </a:rPr>
+              <a:t> high write throughput.</a:t>
             </a:r>
           </a:p>
           <a:p>
@@ -3204,7 +3185,7 @@
               <a:buChar char="•"/>
             </a:pPr>
             <a:r>
-              <a:rPr sz="1400" b="0" i="0">
+              <a:rPr sz="1400" b="0" i="0" dirty="0">
                 <a:solidFill>
                   <a:srgbClr val="2C3C43"/>
                 </a:solidFill>
@@ -3212,7 +3193,7 @@
               <a:t>Indexing must handle </a:t>
             </a:r>
             <a:r>
-              <a:rPr sz="1400" b="1" i="0">
+              <a:rPr sz="1400" b="1" i="0" dirty="0">
                 <a:solidFill>
                   <a:srgbClr val="2C3C43"/>
                 </a:solidFill>
@@ -3220,12 +3201,28 @@
               <a:t>ranges</a:t>
             </a:r>
             <a:r>
-              <a:rPr sz="1400" b="0" i="0">
-                <a:solidFill>
-                  <a:srgbClr val="2C3C43"/>
-                </a:solidFill>
-              </a:rPr>
-              <a:t>, not just points — e.g., interval / temporal B+ trees.</a:t>
+              <a:rPr sz="1400" b="0" i="0" dirty="0">
+                <a:solidFill>
+                  <a:srgbClr val="2C3C43"/>
+                </a:solidFill>
+              </a:rPr>
+              <a:t>, not just points </a:t>
+            </a:r>
+            <a:r>
+              <a:rPr lang="en-IN" sz="1400" b="0" i="0" dirty="0">
+                <a:solidFill>
+                  <a:srgbClr val="2C3C43"/>
+                </a:solidFill>
+              </a:rPr>
+              <a:t>:</a:t>
+            </a:r>
+            <a:r>
+              <a:rPr sz="1400" b="0" i="0" dirty="0">
+                <a:solidFill>
+                  <a:srgbClr val="2C3C43"/>
+                </a:solidFill>
+              </a:rPr>
+              <a:t> e.g., interval / temporal B+ trees.</a:t>
             </a:r>
           </a:p>
           <a:p>
@@ -3239,7 +3236,7 @@
               <a:buChar char="•"/>
             </a:pPr>
             <a:r>
-              <a:rPr sz="1400" b="0" i="0">
+              <a:rPr sz="1400" b="0" i="0" dirty="0">
                 <a:solidFill>
                   <a:srgbClr val="2C3C43"/>
                 </a:solidFill>
@@ -3258,7 +3255,7 @@
               <a:buChar char="•"/>
             </a:pPr>
             <a:r>
-              <a:rPr sz="1400" b="0" i="0">
+              <a:rPr sz="1400" b="0" i="0" dirty="0">
                 <a:solidFill>
                   <a:srgbClr val="2C3C43"/>
                 </a:solidFill>
@@ -3285,7 +3282,7 @@
           <a:noFill/>
         </p:spPr>
         <p:txBody>
-          <a:bodyPr wrap="square" anchor="t" lIns="45720" rIns="45720" tIns="27432" bIns="27432">
+          <a:bodyPr wrap="square" lIns="45720" tIns="27432" rIns="45720" bIns="27432" anchor="t">
             <a:spAutoFit/>
           </a:bodyPr>
           <a:lstStyle/>
@@ -3338,7 +3335,7 @@
           </a:fontRef>
         </p:style>
         <p:txBody>
-          <a:bodyPr rtlCol="0" anchor="ctr" wrap="square" lIns="45720" rIns="45720" tIns="18288" bIns="18288"/>
+          <a:bodyPr wrap="square" lIns="45720" tIns="18288" rIns="45720" bIns="18288" rtlCol="0" anchor="ctr"/>
           <a:lstStyle/>
           <a:p>
             <a:pPr algn="ctr"/>
@@ -3390,7 +3387,7 @@
           </a:fontRef>
         </p:style>
         <p:txBody>
-          <a:bodyPr rtlCol="0" anchor="ctr" wrap="square" lIns="45720" rIns="45720" tIns="18288" bIns="18288"/>
+          <a:bodyPr wrap="square" lIns="45720" tIns="18288" rIns="45720" bIns="18288" rtlCol="0" anchor="ctr"/>
           <a:lstStyle/>
           <a:p>
             <a:pPr algn="ctr"/>
@@ -3478,7 +3475,7 @@
           </a:fontRef>
         </p:style>
         <p:txBody>
-          <a:bodyPr rtlCol="0" anchor="ctr" wrap="square" lIns="45720" rIns="45720" tIns="18288" bIns="18288"/>
+          <a:bodyPr wrap="square" lIns="45720" tIns="18288" rIns="45720" bIns="18288" rtlCol="0" anchor="ctr"/>
           <a:lstStyle/>
           <a:p>
             <a:pPr algn="ctr"/>
@@ -3566,7 +3563,7 @@
           </a:fontRef>
         </p:style>
         <p:txBody>
-          <a:bodyPr rtlCol="0" anchor="ctr" wrap="square" lIns="45720" rIns="45720" tIns="18288" bIns="18288"/>
+          <a:bodyPr wrap="square" lIns="45720" tIns="18288" rIns="45720" bIns="18288" rtlCol="0" anchor="ctr"/>
           <a:lstStyle/>
           <a:p>
             <a:pPr algn="ctr"/>
@@ -3654,7 +3651,7 @@
           </a:fontRef>
         </p:style>
         <p:txBody>
-          <a:bodyPr rtlCol="0" anchor="ctr" wrap="square" lIns="45720" rIns="45720" tIns="18288" bIns="18288"/>
+          <a:bodyPr wrap="square" lIns="45720" tIns="18288" rIns="45720" bIns="18288" rtlCol="0" anchor="ctr"/>
           <a:lstStyle/>
           <a:p>
             <a:pPr algn="ctr"/>
@@ -3742,7 +3739,7 @@
           </a:fontRef>
         </p:style>
         <p:txBody>
-          <a:bodyPr rtlCol="0" anchor="ctr" wrap="square" lIns="45720" rIns="45720" tIns="18288" bIns="18288"/>
+          <a:bodyPr wrap="square" lIns="45720" tIns="18288" rIns="45720" bIns="18288" rtlCol="0" anchor="ctr"/>
           <a:lstStyle/>
           <a:p>
             <a:pPr algn="ctr"/>
@@ -3830,7 +3827,7 @@
           </a:fontRef>
         </p:style>
         <p:txBody>
-          <a:bodyPr rtlCol="0" anchor="ctr" wrap="square" lIns="45720" rIns="45720" tIns="18288" bIns="18288"/>
+          <a:bodyPr wrap="square" lIns="45720" tIns="18288" rIns="45720" bIns="18288" rtlCol="0" anchor="ctr"/>
           <a:lstStyle/>
           <a:p>
             <a:pPr algn="ctr"/>
@@ -3898,7 +3895,7 @@
           <a:noFill/>
         </p:spPr>
         <p:txBody>
-          <a:bodyPr wrap="square" anchor="t" lIns="45720" rIns="45720" tIns="27432" bIns="27432">
+          <a:bodyPr wrap="square" lIns="45720" tIns="27432" rIns="45720" bIns="27432" anchor="t">
             <a:spAutoFit/>
           </a:bodyPr>
           <a:lstStyle/>
@@ -3951,7 +3948,7 @@
           </a:fontRef>
         </p:style>
         <p:txBody>
-          <a:bodyPr rtlCol="0" anchor="ctr" wrap="square" lIns="45720" rIns="45720" tIns="18288" bIns="18288"/>
+          <a:bodyPr wrap="square" lIns="45720" tIns="18288" rIns="45720" bIns="18288" rtlCol="0" anchor="ctr"/>
           <a:lstStyle/>
           <a:p>
             <a:pPr algn="ctr"/>
@@ -3975,7 +3972,7 @@
 </file>
 
 <file path=ppt/slides/slide11.xml><?xml version="1.0" encoding="utf-8"?>
-<p:sld xmlns:a="http://schemas.openxmlformats.org/drawingml/2006/main" xmlns:p="http://schemas.openxmlformats.org/presentationml/2006/main" xmlns:r="http://schemas.openxmlformats.org/officeDocument/2006/relationships">
+<p:sld xmlns:a="http://schemas.openxmlformats.org/drawingml/2006/main" xmlns:r="http://schemas.openxmlformats.org/officeDocument/2006/relationships" xmlns:p="http://schemas.openxmlformats.org/presentationml/2006/main">
   <p:cSld>
     <p:spTree>
       <p:nvGrpSpPr>
@@ -3983,7 +3980,14 @@
         <p:cNvGrpSpPr/>
         <p:nvPr/>
       </p:nvGrpSpPr>
-      <p:grpSpPr/>
+      <p:grpSpPr>
+        <a:xfrm>
+          <a:off x="0" y="0"/>
+          <a:ext cx="0" cy="0"/>
+          <a:chOff x="0" y="0"/>
+          <a:chExt cx="0" cy="0"/>
+        </a:xfrm>
+      </p:grpSpPr>
       <p:sp>
         <p:nvSpPr>
           <p:cNvPr id="2" name="TextBox 1"/>
@@ -3993,7 +3997,7 @@
         <p:spPr>
           <a:xfrm>
             <a:off x="731520" y="365760"/>
-            <a:ext cx="8229600" cy="1005840"/>
+            <a:ext cx="8229600" cy="486287"/>
           </a:xfrm>
           <a:prstGeom prst="rect">
             <a:avLst/>
@@ -4001,18 +4005,34 @@
           <a:noFill/>
         </p:spPr>
         <p:txBody>
-          <a:bodyPr wrap="square" anchor="t" lIns="45720" rIns="45720" tIns="27432" bIns="27432">
+          <a:bodyPr wrap="square" lIns="45720" tIns="27432" rIns="45720" bIns="27432" anchor="t">
             <a:spAutoFit/>
           </a:bodyPr>
           <a:lstStyle/>
           <a:p>
             <a:r>
-              <a:rPr sz="2800" b="1" i="0">
-                <a:solidFill>
-                  <a:srgbClr val="2C3C43"/>
-                </a:solidFill>
-              </a:rPr>
-              <a:t>Worked Example — Tracking Salaries</a:t>
+              <a:rPr sz="2800" b="1" i="0" dirty="0">
+                <a:solidFill>
+                  <a:srgbClr val="2C3C43"/>
+                </a:solidFill>
+              </a:rPr>
+              <a:t>Worked Example </a:t>
+            </a:r>
+            <a:r>
+              <a:rPr lang="en-IN" sz="2800" b="1" i="0" dirty="0">
+                <a:solidFill>
+                  <a:srgbClr val="2C3C43"/>
+                </a:solidFill>
+              </a:rPr>
+              <a:t>:</a:t>
+            </a:r>
+            <a:r>
+              <a:rPr sz="2800" b="1" i="0" dirty="0">
+                <a:solidFill>
+                  <a:srgbClr val="2C3C43"/>
+                </a:solidFill>
+              </a:rPr>
+              <a:t> Tracking Salaries</a:t>
             </a:r>
           </a:p>
         </p:txBody>
@@ -4034,7 +4054,7 @@
           <a:noFill/>
         </p:spPr>
         <p:txBody>
-          <a:bodyPr wrap="square" anchor="t" lIns="45720" rIns="45720" tIns="27432" bIns="27432">
+          <a:bodyPr wrap="square" lIns="45720" tIns="27432" rIns="45720" bIns="27432" anchor="t">
             <a:spAutoFit/>
           </a:bodyPr>
           <a:lstStyle/>
@@ -4067,7 +4087,7 @@
           <a:noFill/>
         </p:spPr>
         <p:txBody>
-          <a:bodyPr wrap="square" anchor="t" lIns="45720" rIns="45720" tIns="27432" bIns="27432">
+          <a:bodyPr wrap="square" lIns="45720" tIns="27432" rIns="45720" bIns="27432" anchor="t">
             <a:spAutoFit/>
           </a:bodyPr>
           <a:lstStyle/>
@@ -4325,7 +4345,7 @@
           </a:fontRef>
         </p:style>
         <p:txBody>
-          <a:bodyPr rtlCol="0" anchor="ctr" wrap="square" lIns="45720" rIns="45720" tIns="18288" bIns="18288"/>
+          <a:bodyPr wrap="square" lIns="45720" tIns="18288" rIns="45720" bIns="18288" rtlCol="0" anchor="ctr"/>
           <a:lstStyle/>
           <a:p>
             <a:pPr algn="ctr"/>
@@ -4377,7 +4397,7 @@
           </a:fontRef>
         </p:style>
         <p:txBody>
-          <a:bodyPr rtlCol="0" anchor="ctr" wrap="square" lIns="45720" rIns="45720" tIns="18288" bIns="18288"/>
+          <a:bodyPr wrap="square" lIns="45720" tIns="18288" rIns="45720" bIns="18288" rtlCol="0" anchor="ctr"/>
           <a:lstStyle/>
           <a:p>
             <a:pPr algn="ctr"/>
@@ -4409,7 +4429,7 @@
           <a:noFill/>
         </p:spPr>
         <p:txBody>
-          <a:bodyPr wrap="square" anchor="t" lIns="45720" rIns="45720" tIns="27432" bIns="27432">
+          <a:bodyPr wrap="square" lIns="45720" tIns="27432" rIns="45720" bIns="27432" anchor="t">
             <a:spAutoFit/>
           </a:bodyPr>
           <a:lstStyle/>
@@ -4442,7 +4462,7 @@
           <a:noFill/>
         </p:spPr>
         <p:txBody>
-          <a:bodyPr wrap="square" anchor="t" lIns="45720" rIns="45720" tIns="27432" bIns="27432">
+          <a:bodyPr wrap="square" lIns="45720" tIns="27432" rIns="45720" bIns="27432" anchor="t">
             <a:spAutoFit/>
           </a:bodyPr>
           <a:lstStyle/>
@@ -4475,7 +4495,7 @@
           <a:noFill/>
         </p:spPr>
         <p:txBody>
-          <a:bodyPr wrap="square" anchor="t" lIns="45720" rIns="45720" tIns="27432" bIns="27432">
+          <a:bodyPr wrap="square" lIns="45720" tIns="27432" rIns="45720" bIns="27432" anchor="t">
             <a:spAutoFit/>
           </a:bodyPr>
           <a:lstStyle/>
@@ -4509,7 +4529,7 @@
           <a:noFill/>
         </p:spPr>
         <p:txBody>
-          <a:bodyPr wrap="square" anchor="t" lIns="45720" rIns="45720" tIns="27432" bIns="27432">
+          <a:bodyPr wrap="square" lIns="45720" tIns="27432" rIns="45720" bIns="27432" anchor="t">
             <a:spAutoFit/>
           </a:bodyPr>
           <a:lstStyle/>
@@ -4562,10 +4582,11 @@
           </a:fontRef>
         </p:style>
         <p:txBody>
-          <a:bodyPr rtlCol="0" anchor="ctr" wrap="square" lIns="45720" rIns="45720" tIns="18288" bIns="18288"/>
+          <a:bodyPr wrap="square" lIns="45720" tIns="18288" rIns="45720" bIns="18288" rtlCol="0" anchor="ctr"/>
           <a:lstStyle/>
           <a:p>
             <a:pPr algn="ctr"/>
+            <a:endParaRPr/>
           </a:p>
         </p:txBody>
       </p:sp>
@@ -4606,7 +4627,7 @@
           </a:fontRef>
         </p:style>
         <p:txBody>
-          <a:bodyPr rtlCol="0" anchor="ctr" wrap="square" lIns="45720" rIns="45720" tIns="18288" bIns="18288"/>
+          <a:bodyPr wrap="square" lIns="45720" tIns="18288" rIns="45720" bIns="18288" rtlCol="0" anchor="ctr"/>
           <a:lstStyle/>
           <a:p>
             <a:pPr algn="ctr"/>
@@ -4986,7 +5007,7 @@
 </file>
 
 <file path=ppt/slides/slide12.xml><?xml version="1.0" encoding="utf-8"?>
-<p:sld xmlns:a="http://schemas.openxmlformats.org/drawingml/2006/main" xmlns:p="http://schemas.openxmlformats.org/presentationml/2006/main" xmlns:r="http://schemas.openxmlformats.org/officeDocument/2006/relationships">
+<p:sld xmlns:a="http://schemas.openxmlformats.org/drawingml/2006/main" xmlns:r="http://schemas.openxmlformats.org/officeDocument/2006/relationships" xmlns:p="http://schemas.openxmlformats.org/presentationml/2006/main">
   <p:cSld>
     <p:spTree>
       <p:nvGrpSpPr>
@@ -4994,7 +5015,14 @@
         <p:cNvGrpSpPr/>
         <p:nvPr/>
       </p:nvGrpSpPr>
-      <p:grpSpPr/>
+      <p:grpSpPr>
+        <a:xfrm>
+          <a:off x="0" y="0"/>
+          <a:ext cx="0" cy="0"/>
+          <a:chOff x="0" y="0"/>
+          <a:chExt cx="0" cy="0"/>
+        </a:xfrm>
+      </p:grpSpPr>
       <p:sp>
         <p:nvSpPr>
           <p:cNvPr id="2" name="TextBox 1"/>
@@ -5012,7 +5040,7 @@
           <a:noFill/>
         </p:spPr>
         <p:txBody>
-          <a:bodyPr wrap="square" anchor="t" lIns="45720" rIns="45720" tIns="27432" bIns="27432">
+          <a:bodyPr wrap="square" lIns="45720" tIns="27432" rIns="45720" bIns="27432" anchor="t">
             <a:spAutoFit/>
           </a:bodyPr>
           <a:lstStyle/>
@@ -5045,7 +5073,7 @@
           <a:noFill/>
         </p:spPr>
         <p:txBody>
-          <a:bodyPr wrap="square" anchor="t" lIns="45720" rIns="45720" tIns="27432" bIns="27432">
+          <a:bodyPr wrap="square" lIns="45720" tIns="27432" rIns="45720" bIns="27432" anchor="t">
             <a:spAutoFit/>
           </a:bodyPr>
           <a:lstStyle/>
@@ -5078,7 +5106,7 @@
           <a:noFill/>
         </p:spPr>
         <p:txBody>
-          <a:bodyPr wrap="square" anchor="t" lIns="45720" rIns="45720" tIns="27432" bIns="27432">
+          <a:bodyPr wrap="square" lIns="45720" tIns="27432" rIns="45720" bIns="27432" anchor="t">
             <a:spAutoFit/>
           </a:bodyPr>
           <a:lstStyle/>
@@ -5104,7 +5132,7 @@
         <p:spPr>
           <a:xfrm>
             <a:off x="731520" y="1508760"/>
-            <a:ext cx="4206240" cy="4754880"/>
+            <a:ext cx="4206240" cy="3126497"/>
           </a:xfrm>
           <a:prstGeom prst="rect">
             <a:avLst/>
@@ -5127,7 +5155,7 @@
               <a:buChar char="•"/>
             </a:pPr>
             <a:r>
-              <a:rPr sz="1400" b="0" i="0">
+              <a:rPr sz="1400" b="0" i="0" dirty="0">
                 <a:solidFill>
                   <a:srgbClr val="2C3C43"/>
                 </a:solidFill>
@@ -5135,7 +5163,7 @@
               <a:t>Transaction time is exactly what a </a:t>
             </a:r>
             <a:r>
-              <a:rPr sz="1400" b="1" i="0">
+              <a:rPr sz="1400" b="1" i="0" dirty="0">
                 <a:solidFill>
                   <a:srgbClr val="2C3C43"/>
                 </a:solidFill>
@@ -5143,7 +5171,7 @@
               <a:t>transaction log / recovery</a:t>
             </a:r>
             <a:r>
-              <a:rPr sz="1400" b="0" i="0">
+              <a:rPr sz="1400" b="0" i="0" dirty="0">
                 <a:solidFill>
                   <a:srgbClr val="2C3C43"/>
                 </a:solidFill>
@@ -5162,7 +5190,7 @@
               <a:buChar char="•"/>
             </a:pPr>
             <a:r>
-              <a:rPr sz="1400" b="1" i="0">
+              <a:rPr sz="1400" b="1" i="0" dirty="0">
                 <a:solidFill>
                   <a:srgbClr val="2C3C43"/>
                 </a:solidFill>
@@ -5170,12 +5198,28 @@
               <a:t>MVCC</a:t>
             </a:r>
             <a:r>
-              <a:rPr sz="1400" b="0" i="0">
-                <a:solidFill>
-                  <a:srgbClr val="2C3C43"/>
-                </a:solidFill>
-              </a:rPr>
-              <a:t> keeps multiple versions of a row — the same versioning idea.</a:t>
+              <a:rPr sz="1400" b="0" i="0" dirty="0">
+                <a:solidFill>
+                  <a:srgbClr val="2C3C43"/>
+                </a:solidFill>
+              </a:rPr>
+              <a:t> keeps multiple versions of a row </a:t>
+            </a:r>
+            <a:r>
+              <a:rPr lang="en-IN" sz="1400" b="0" i="0" dirty="0">
+                <a:solidFill>
+                  <a:srgbClr val="2C3C43"/>
+                </a:solidFill>
+              </a:rPr>
+              <a:t>:</a:t>
+            </a:r>
+            <a:r>
+              <a:rPr sz="1400" b="0" i="0" dirty="0">
+                <a:solidFill>
+                  <a:srgbClr val="2C3C43"/>
+                </a:solidFill>
+              </a:rPr>
+              <a:t> the same versioning idea.</a:t>
             </a:r>
           </a:p>
           <a:p>
@@ -5189,7 +5233,7 @@
               <a:buChar char="•"/>
             </a:pPr>
             <a:r>
-              <a:rPr sz="1400" b="0" i="0">
+              <a:rPr sz="1400" b="0" i="0" dirty="0">
                 <a:solidFill>
                   <a:srgbClr val="2C3C43"/>
                 </a:solidFill>
@@ -5208,7 +5252,7 @@
               <a:buChar char="•"/>
             </a:pPr>
             <a:r>
-              <a:rPr sz="1400" b="0" i="0">
+              <a:rPr sz="1400" b="0" i="0" dirty="0">
                 <a:solidFill>
                   <a:srgbClr val="2C3C43"/>
                 </a:solidFill>
@@ -5216,7 +5260,7 @@
               <a:t>Temporal storage is naturally </a:t>
             </a:r>
             <a:r>
-              <a:rPr sz="1400" b="1" i="0">
+              <a:rPr sz="1400" b="1" i="0" dirty="0">
                 <a:solidFill>
                   <a:srgbClr val="2C3C43"/>
                 </a:solidFill>
@@ -5224,7 +5268,7 @@
               <a:t>append-only</a:t>
             </a:r>
             <a:r>
-              <a:rPr sz="1400" b="0" i="0">
+              <a:rPr sz="1400" b="0" i="0" dirty="0">
                 <a:solidFill>
                   <a:srgbClr val="2C3C43"/>
                 </a:solidFill>
@@ -5243,7 +5287,7 @@
               <a:buChar char="•"/>
             </a:pPr>
             <a:r>
-              <a:rPr sz="1400" b="0" i="0">
+              <a:rPr sz="1400" b="0" i="0" dirty="0">
                 <a:solidFill>
                   <a:srgbClr val="2C3C43"/>
                 </a:solidFill>
@@ -5262,7 +5306,7 @@
               <a:buChar char="•"/>
             </a:pPr>
             <a:r>
-              <a:rPr sz="1400" b="0" i="0">
+              <a:rPr sz="1400" b="0" i="0" dirty="0">
                 <a:solidFill>
                   <a:srgbClr val="2C3C43"/>
                 </a:solidFill>
@@ -5309,7 +5353,7 @@
           </a:fontRef>
         </p:style>
         <p:txBody>
-          <a:bodyPr rtlCol="0" anchor="ctr" wrap="square" lIns="45720" rIns="45720" tIns="18288" bIns="18288"/>
+          <a:bodyPr wrap="square" lIns="45720" tIns="18288" rIns="45720" bIns="18288" rtlCol="0" anchor="ctr"/>
           <a:lstStyle/>
           <a:p>
             <a:pPr algn="ctr"/>
@@ -5397,7 +5441,7 @@
           </a:fontRef>
         </p:style>
         <p:txBody>
-          <a:bodyPr rtlCol="0" anchor="ctr" wrap="square" lIns="45720" rIns="45720" tIns="18288" bIns="18288"/>
+          <a:bodyPr wrap="square" lIns="45720" tIns="18288" rIns="45720" bIns="18288" rtlCol="0" anchor="ctr"/>
           <a:lstStyle/>
           <a:p>
             <a:pPr algn="ctr"/>
@@ -5485,7 +5529,7 @@
           </a:fontRef>
         </p:style>
         <p:txBody>
-          <a:bodyPr rtlCol="0" anchor="ctr" wrap="square" lIns="45720" rIns="45720" tIns="18288" bIns="18288"/>
+          <a:bodyPr wrap="square" lIns="45720" tIns="18288" rIns="45720" bIns="18288" rtlCol="0" anchor="ctr"/>
           <a:lstStyle/>
           <a:p>
             <a:pPr algn="ctr"/>
@@ -5537,7 +5581,7 @@
           </a:fontRef>
         </p:style>
         <p:txBody>
-          <a:bodyPr rtlCol="0" anchor="ctr" wrap="square" lIns="45720" rIns="45720" tIns="18288" bIns="18288"/>
+          <a:bodyPr wrap="square" lIns="45720" tIns="18288" rIns="45720" bIns="18288" rtlCol="0" anchor="ctr"/>
           <a:lstStyle/>
           <a:p>
             <a:pPr algn="ctr"/>
@@ -5589,7 +5633,7 @@
           </a:fontRef>
         </p:style>
         <p:txBody>
-          <a:bodyPr rtlCol="0" anchor="ctr" wrap="square" lIns="45720" rIns="45720" tIns="18288" bIns="18288"/>
+          <a:bodyPr wrap="square" lIns="45720" tIns="18288" rIns="45720" bIns="18288" rtlCol="0" anchor="ctr"/>
           <a:lstStyle/>
           <a:p>
             <a:pPr algn="ctr"/>
@@ -5641,7 +5685,7 @@
           </a:fontRef>
         </p:style>
         <p:txBody>
-          <a:bodyPr rtlCol="0" anchor="ctr" wrap="square" lIns="45720" rIns="45720" tIns="18288" bIns="18288"/>
+          <a:bodyPr wrap="square" lIns="45720" tIns="18288" rIns="45720" bIns="18288" rtlCol="0" anchor="ctr"/>
           <a:lstStyle/>
           <a:p>
             <a:pPr algn="ctr"/>
@@ -5693,7 +5737,7 @@
           </a:fontRef>
         </p:style>
         <p:txBody>
-          <a:bodyPr rtlCol="0" anchor="ctr" wrap="square" lIns="45720" rIns="45720" tIns="18288" bIns="18288"/>
+          <a:bodyPr wrap="square" lIns="45720" tIns="18288" rIns="45720" bIns="18288" rtlCol="0" anchor="ctr"/>
           <a:lstStyle/>
           <a:p>
             <a:pPr algn="ctr"/>
@@ -5717,7 +5761,7 @@
 </file>
 
 <file path=ppt/slides/slide13.xml><?xml version="1.0" encoding="utf-8"?>
-<p:sld xmlns:a="http://schemas.openxmlformats.org/drawingml/2006/main" xmlns:p="http://schemas.openxmlformats.org/presentationml/2006/main" xmlns:r="http://schemas.openxmlformats.org/officeDocument/2006/relationships">
+<p:sld xmlns:a="http://schemas.openxmlformats.org/drawingml/2006/main" xmlns:r="http://schemas.openxmlformats.org/officeDocument/2006/relationships" xmlns:p="http://schemas.openxmlformats.org/presentationml/2006/main">
   <p:cSld>
     <p:spTree>
       <p:nvGrpSpPr>
@@ -5725,7 +5769,14 @@
         <p:cNvGrpSpPr/>
         <p:nvPr/>
       </p:nvGrpSpPr>
-      <p:grpSpPr/>
+      <p:grpSpPr>
+        <a:xfrm>
+          <a:off x="0" y="0"/>
+          <a:ext cx="0" cy="0"/>
+          <a:chOff x="0" y="0"/>
+          <a:chExt cx="0" cy="0"/>
+        </a:xfrm>
+      </p:grpSpPr>
       <p:sp>
         <p:nvSpPr>
           <p:cNvPr id="2" name="TextBox 1"/>
@@ -5743,7 +5794,7 @@
           <a:noFill/>
         </p:spPr>
         <p:txBody>
-          <a:bodyPr wrap="square" anchor="t" lIns="45720" rIns="45720" tIns="27432" bIns="27432">
+          <a:bodyPr wrap="square" lIns="45720" tIns="27432" rIns="45720" bIns="27432" anchor="t">
             <a:spAutoFit/>
           </a:bodyPr>
           <a:lstStyle/>
@@ -5776,7 +5827,7 @@
           <a:noFill/>
         </p:spPr>
         <p:txBody>
-          <a:bodyPr wrap="square" anchor="t" lIns="45720" rIns="45720" tIns="27432" bIns="27432">
+          <a:bodyPr wrap="square" lIns="45720" tIns="27432" rIns="45720" bIns="27432" anchor="t">
             <a:spAutoFit/>
           </a:bodyPr>
           <a:lstStyle/>
@@ -5809,7 +5860,7 @@
           <a:noFill/>
         </p:spPr>
         <p:txBody>
-          <a:bodyPr wrap="square" anchor="t" lIns="45720" rIns="45720" tIns="27432" bIns="27432">
+          <a:bodyPr wrap="square" lIns="45720" tIns="27432" rIns="45720" bIns="27432" anchor="t">
             <a:spAutoFit/>
           </a:bodyPr>
           <a:lstStyle/>
@@ -5835,7 +5886,7 @@
         <p:spPr>
           <a:xfrm>
             <a:off x="731520" y="1508760"/>
-            <a:ext cx="4206240" cy="4754880"/>
+            <a:ext cx="4206240" cy="3341941"/>
           </a:xfrm>
           <a:prstGeom prst="rect">
             <a:avLst/>
@@ -5858,7 +5909,7 @@
               <a:buChar char="•"/>
             </a:pPr>
             <a:r>
-              <a:rPr sz="1400" b="1" i="0">
+              <a:rPr sz="1400" b="1" i="0" dirty="0">
                 <a:solidFill>
                   <a:srgbClr val="2C3C43"/>
                 </a:solidFill>
@@ -5866,12 +5917,28 @@
               <a:t>Storage growth</a:t>
             </a:r>
             <a:r>
-              <a:rPr sz="1400" b="0" i="0">
-                <a:solidFill>
-                  <a:srgbClr val="2C3C43"/>
-                </a:solidFill>
-              </a:rPr>
-              <a:t> — every change becomes a permanent version.</a:t>
+              <a:rPr sz="1400" b="0" i="0" dirty="0">
+                <a:solidFill>
+                  <a:srgbClr val="2C3C43"/>
+                </a:solidFill>
+              </a:rPr>
+              <a:t> </a:t>
+            </a:r>
+            <a:r>
+              <a:rPr lang="en-IN" sz="1400" b="0" i="0" dirty="0">
+                <a:solidFill>
+                  <a:srgbClr val="2C3C43"/>
+                </a:solidFill>
+              </a:rPr>
+              <a:t>:</a:t>
+            </a:r>
+            <a:r>
+              <a:rPr sz="1400" b="0" i="0" dirty="0">
+                <a:solidFill>
+                  <a:srgbClr val="2C3C43"/>
+                </a:solidFill>
+              </a:rPr>
+              <a:t> every change becomes a permanent version.</a:t>
             </a:r>
           </a:p>
           <a:p>
@@ -5885,7 +5952,7 @@
               <a:buChar char="•"/>
             </a:pPr>
             <a:r>
-              <a:rPr sz="1400" b="1" i="0">
+              <a:rPr sz="1400" b="1" i="0" dirty="0">
                 <a:solidFill>
                   <a:srgbClr val="2C3C43"/>
                 </a:solidFill>
@@ -5893,12 +5960,28 @@
               <a:t>Performance</a:t>
             </a:r>
             <a:r>
-              <a:rPr sz="1400" b="0" i="0">
-                <a:solidFill>
-                  <a:srgbClr val="2C3C43"/>
-                </a:solidFill>
-              </a:rPr>
-              <a:t> — range/interval indexes are costlier than point indexes.</a:t>
+              <a:rPr sz="1400" b="0" i="0" dirty="0">
+                <a:solidFill>
+                  <a:srgbClr val="2C3C43"/>
+                </a:solidFill>
+              </a:rPr>
+              <a:t> </a:t>
+            </a:r>
+            <a:r>
+              <a:rPr lang="en-IN" sz="1400" b="0" i="0" dirty="0">
+                <a:solidFill>
+                  <a:srgbClr val="2C3C43"/>
+                </a:solidFill>
+              </a:rPr>
+              <a:t>:</a:t>
+            </a:r>
+            <a:r>
+              <a:rPr sz="1400" b="0" i="0" dirty="0">
+                <a:solidFill>
+                  <a:srgbClr val="2C3C43"/>
+                </a:solidFill>
+              </a:rPr>
+              <a:t> range/interval indexes are costlier than point indexes.</a:t>
             </a:r>
           </a:p>
           <a:p>
@@ -5912,7 +5995,7 @@
               <a:buChar char="•"/>
             </a:pPr>
             <a:r>
-              <a:rPr sz="1400" b="1" i="0">
+              <a:rPr sz="1400" b="1" i="0" dirty="0">
                 <a:solidFill>
                   <a:srgbClr val="2C3C43"/>
                 </a:solidFill>
@@ -5920,12 +6003,28 @@
               <a:t>Complexity</a:t>
             </a:r>
             <a:r>
-              <a:rPr sz="1400" b="0" i="0">
-                <a:solidFill>
-                  <a:srgbClr val="2C3C43"/>
-                </a:solidFill>
-              </a:rPr>
-              <a:t> — developers must reason about two timelines.</a:t>
+              <a:rPr sz="1400" b="0" i="0" dirty="0">
+                <a:solidFill>
+                  <a:srgbClr val="2C3C43"/>
+                </a:solidFill>
+              </a:rPr>
+              <a:t> </a:t>
+            </a:r>
+            <a:r>
+              <a:rPr lang="en-IN" sz="1400" b="0" i="0" dirty="0">
+                <a:solidFill>
+                  <a:srgbClr val="2C3C43"/>
+                </a:solidFill>
+              </a:rPr>
+              <a:t>:</a:t>
+            </a:r>
+            <a:r>
+              <a:rPr sz="1400" b="0" i="0" dirty="0">
+                <a:solidFill>
+                  <a:srgbClr val="2C3C43"/>
+                </a:solidFill>
+              </a:rPr>
+              <a:t> developers must reason about two timelines.</a:t>
             </a:r>
           </a:p>
           <a:p>
@@ -5939,7 +6038,7 @@
               <a:buChar char="•"/>
             </a:pPr>
             <a:r>
-              <a:rPr sz="1400" b="1" i="0">
+              <a:rPr sz="1400" b="1" i="0" dirty="0">
                 <a:solidFill>
                   <a:srgbClr val="2C3C43"/>
                 </a:solidFill>
@@ -5947,12 +6046,28 @@
               <a:t>Privacy</a:t>
             </a:r>
             <a:r>
-              <a:rPr sz="1400" b="0" i="0">
-                <a:solidFill>
-                  <a:srgbClr val="2C3C43"/>
-                </a:solidFill>
-              </a:rPr>
-              <a:t> — "right to be forgotten" conflicts with immutable history; needs crypto-shredding.</a:t>
+              <a:rPr sz="1400" b="0" i="0" dirty="0">
+                <a:solidFill>
+                  <a:srgbClr val="2C3C43"/>
+                </a:solidFill>
+              </a:rPr>
+              <a:t> </a:t>
+            </a:r>
+            <a:r>
+              <a:rPr lang="en-IN" sz="1400" b="0" i="0" dirty="0">
+                <a:solidFill>
+                  <a:srgbClr val="2C3C43"/>
+                </a:solidFill>
+              </a:rPr>
+              <a:t>:</a:t>
+            </a:r>
+            <a:r>
+              <a:rPr sz="1400" b="0" i="0" dirty="0">
+                <a:solidFill>
+                  <a:srgbClr val="2C3C43"/>
+                </a:solidFill>
+              </a:rPr>
+              <a:t> "right to be forgotten" conflicts with immutable history; needs crypto-shredding.</a:t>
             </a:r>
           </a:p>
           <a:p>
@@ -5966,7 +6081,7 @@
               <a:buChar char="•"/>
             </a:pPr>
             <a:r>
-              <a:rPr sz="1400" b="1" i="0">
+              <a:rPr sz="1400" b="1" i="0" dirty="0">
                 <a:solidFill>
                   <a:srgbClr val="2C3C43"/>
                 </a:solidFill>
@@ -5974,7 +6089,7 @@
               <a:t>Best practices:</a:t>
             </a:r>
             <a:r>
-              <a:rPr sz="1400" b="0" i="0">
+              <a:rPr sz="1400" b="0" i="0" dirty="0">
                 <a:solidFill>
                   <a:srgbClr val="2C3C43"/>
                 </a:solidFill>
@@ -5993,7 +6108,7 @@
               <a:buChar char="•"/>
             </a:pPr>
             <a:r>
-              <a:rPr sz="1400" b="1" i="0">
+              <a:rPr sz="1400" b="1" i="0" dirty="0">
                 <a:solidFill>
                   <a:srgbClr val="2C3C43"/>
                 </a:solidFill>
@@ -6001,7 +6116,7 @@
               <a:t>Future:</a:t>
             </a:r>
             <a:r>
-              <a:rPr sz="1400" b="0" i="0">
+              <a:rPr sz="1400" b="0" i="0" dirty="0">
                 <a:solidFill>
                   <a:srgbClr val="2C3C43"/>
                 </a:solidFill>
@@ -6048,7 +6163,7 @@
           </a:fontRef>
         </p:style>
         <p:txBody>
-          <a:bodyPr rtlCol="0" anchor="ctr" wrap="square" lIns="45720" rIns="45720" tIns="18288" bIns="18288"/>
+          <a:bodyPr wrap="square" lIns="45720" tIns="18288" rIns="45720" bIns="18288" rtlCol="0" anchor="ctr"/>
           <a:lstStyle/>
           <a:p>
             <a:pPr algn="ctr"/>
@@ -6100,7 +6215,7 @@
           </a:fontRef>
         </p:style>
         <p:txBody>
-          <a:bodyPr rtlCol="0" anchor="ctr" wrap="square" lIns="45720" rIns="45720" tIns="18288" bIns="18288"/>
+          <a:bodyPr wrap="square" lIns="45720" tIns="18288" rIns="45720" bIns="18288" rtlCol="0" anchor="ctr"/>
           <a:lstStyle/>
           <a:p>
             <a:pPr algn="ctr"/>
@@ -6152,10 +6267,11 @@
           </a:fontRef>
         </p:style>
         <p:txBody>
-          <a:bodyPr rtlCol="0" anchor="ctr" wrap="square" lIns="45720" rIns="45720" tIns="18288" bIns="18288"/>
+          <a:bodyPr wrap="square" lIns="45720" tIns="18288" rIns="45720" bIns="18288" rtlCol="0" anchor="ctr"/>
           <a:lstStyle/>
           <a:p>
             <a:pPr algn="ctr"/>
+            <a:endParaRPr/>
           </a:p>
         </p:txBody>
       </p:sp>
@@ -6276,10 +6392,11 @@
           </a:fontRef>
         </p:style>
         <p:txBody>
-          <a:bodyPr rtlCol="0" anchor="ctr" wrap="square" lIns="45720" rIns="45720" tIns="18288" bIns="18288"/>
+          <a:bodyPr wrap="square" lIns="45720" tIns="18288" rIns="45720" bIns="18288" rtlCol="0" anchor="ctr"/>
           <a:lstStyle/>
           <a:p>
             <a:pPr algn="ctr"/>
+            <a:endParaRPr/>
           </a:p>
         </p:txBody>
       </p:sp>
@@ -6419,7 +6536,7 @@
           </a:fontRef>
         </p:style>
         <p:txBody>
-          <a:bodyPr rtlCol="0" anchor="ctr" wrap="square" lIns="45720" rIns="45720" tIns="18288" bIns="18288"/>
+          <a:bodyPr wrap="square" lIns="45720" tIns="18288" rIns="45720" bIns="18288" rtlCol="0" anchor="ctr"/>
           <a:lstStyle/>
           <a:p>
             <a:pPr algn="ctr"/>
@@ -6443,7 +6560,7 @@
 </file>
 
 <file path=ppt/slides/slide14.xml><?xml version="1.0" encoding="utf-8"?>
-<p:sld xmlns:a="http://schemas.openxmlformats.org/drawingml/2006/main" xmlns:p="http://schemas.openxmlformats.org/presentationml/2006/main" xmlns:r="http://schemas.openxmlformats.org/officeDocument/2006/relationships">
+<p:sld xmlns:a="http://schemas.openxmlformats.org/drawingml/2006/main" xmlns:r="http://schemas.openxmlformats.org/officeDocument/2006/relationships" xmlns:p="http://schemas.openxmlformats.org/presentationml/2006/main">
   <p:cSld>
     <p:spTree>
       <p:nvGrpSpPr>
@@ -6451,7 +6568,14 @@
         <p:cNvGrpSpPr/>
         <p:nvPr/>
       </p:nvGrpSpPr>
-      <p:grpSpPr/>
+      <p:grpSpPr>
+        <a:xfrm>
+          <a:off x="0" y="0"/>
+          <a:ext cx="0" cy="0"/>
+          <a:chOff x="0" y="0"/>
+          <a:chExt cx="0" cy="0"/>
+        </a:xfrm>
+      </p:grpSpPr>
       <p:sp>
         <p:nvSpPr>
           <p:cNvPr id="2" name="TextBox 1"/>
@@ -6469,7 +6593,7 @@
           <a:noFill/>
         </p:spPr>
         <p:txBody>
-          <a:bodyPr wrap="square" anchor="t" lIns="45720" rIns="45720" tIns="27432" bIns="27432">
+          <a:bodyPr wrap="square" lIns="45720" tIns="27432" rIns="45720" bIns="27432" anchor="t">
             <a:spAutoFit/>
           </a:bodyPr>
           <a:lstStyle/>
@@ -6502,7 +6626,7 @@
           <a:noFill/>
         </p:spPr>
         <p:txBody>
-          <a:bodyPr wrap="square" anchor="t" lIns="45720" rIns="45720" tIns="27432" bIns="27432">
+          <a:bodyPr wrap="square" lIns="45720" tIns="27432" rIns="45720" bIns="27432" anchor="t">
             <a:spAutoFit/>
           </a:bodyPr>
           <a:lstStyle/>
@@ -6535,7 +6659,7 @@
           <a:noFill/>
         </p:spPr>
         <p:txBody>
-          <a:bodyPr wrap="square" anchor="t" lIns="45720" rIns="45720" tIns="27432" bIns="27432">
+          <a:bodyPr wrap="square" lIns="45720" tIns="27432" rIns="45720" bIns="27432" anchor="t">
             <a:spAutoFit/>
           </a:bodyPr>
           <a:lstStyle/>
@@ -6561,7 +6685,7 @@
         <p:spPr>
           <a:xfrm>
             <a:off x="731520" y="1508760"/>
-            <a:ext cx="5120640" cy="3657600"/>
+            <a:ext cx="5120640" cy="2605842"/>
           </a:xfrm>
           <a:prstGeom prst="rect">
             <a:avLst/>
@@ -6584,15 +6708,31 @@
               <a:buChar char="•"/>
             </a:pPr>
             <a:r>
-              <a:rPr sz="1400" b="0" i="0">
-                <a:solidFill>
-                  <a:srgbClr val="2C3C43"/>
-                </a:solidFill>
-              </a:rPr>
-              <a:t>A. Silberschatz, H. Korth, S. Sudarshan — </a:t>
-            </a:r>
-            <a:r>
-              <a:rPr sz="1400" b="0" i="1">
+              <a:rPr sz="1400" b="0" i="0" dirty="0">
+                <a:solidFill>
+                  <a:srgbClr val="2C3C43"/>
+                </a:solidFill>
+              </a:rPr>
+              <a:t>A. Silberschatz, H. Korth, S. Sudarshan </a:t>
+            </a:r>
+            <a:r>
+              <a:rPr lang="en-IN" sz="1400" b="0" i="0" dirty="0">
+                <a:solidFill>
+                  <a:srgbClr val="2C3C43"/>
+                </a:solidFill>
+              </a:rPr>
+              <a:t>:</a:t>
+            </a:r>
+            <a:r>
+              <a:rPr sz="1400" b="0" i="0" dirty="0">
+                <a:solidFill>
+                  <a:srgbClr val="2C3C43"/>
+                </a:solidFill>
+              </a:rPr>
+              <a:t> </a:t>
+            </a:r>
+            <a:r>
+              <a:rPr sz="1400" b="0" i="1" dirty="0">
                 <a:solidFill>
                   <a:srgbClr val="2C3C43"/>
                 </a:solidFill>
@@ -6600,7 +6740,7 @@
               <a:t>Database System Concepts</a:t>
             </a:r>
             <a:r>
-              <a:rPr sz="1400" b="0" i="0">
+              <a:rPr sz="1400" b="0" i="0" dirty="0">
                 <a:solidFill>
                   <a:srgbClr val="2C3C43"/>
                 </a:solidFill>
@@ -6619,15 +6759,31 @@
               <a:buChar char="•"/>
             </a:pPr>
             <a:r>
-              <a:rPr sz="1400" b="0" i="0">
-                <a:solidFill>
-                  <a:srgbClr val="2C3C43"/>
-                </a:solidFill>
-              </a:rPr>
-              <a:t>R. Elmasri &amp; S. Navathe — </a:t>
-            </a:r>
-            <a:r>
-              <a:rPr sz="1400" b="0" i="1">
+              <a:rPr sz="1400" b="0" i="0" dirty="0">
+                <a:solidFill>
+                  <a:srgbClr val="2C3C43"/>
+                </a:solidFill>
+              </a:rPr>
+              <a:t>R. Elmasri &amp; S. Navathe </a:t>
+            </a:r>
+            <a:r>
+              <a:rPr lang="en-IN" sz="1400" b="0" i="0" dirty="0">
+                <a:solidFill>
+                  <a:srgbClr val="2C3C43"/>
+                </a:solidFill>
+              </a:rPr>
+              <a:t>:</a:t>
+            </a:r>
+            <a:r>
+              <a:rPr sz="1400" b="0" i="0" dirty="0">
+                <a:solidFill>
+                  <a:srgbClr val="2C3C43"/>
+                </a:solidFill>
+              </a:rPr>
+              <a:t> </a:t>
+            </a:r>
+            <a:r>
+              <a:rPr sz="1400" b="0" i="1" dirty="0">
                 <a:solidFill>
                   <a:srgbClr val="2C3C43"/>
                 </a:solidFill>
@@ -6635,7 +6791,7 @@
               <a:t>Fundamentals of Database Systems</a:t>
             </a:r>
             <a:r>
-              <a:rPr sz="1400" b="0" i="0">
+              <a:rPr sz="1400" b="0" i="0" dirty="0">
                 <a:solidFill>
                   <a:srgbClr val="2C3C43"/>
                 </a:solidFill>
@@ -6654,15 +6810,31 @@
               <a:buChar char="•"/>
             </a:pPr>
             <a:r>
-              <a:rPr sz="1400" b="0" i="0">
-                <a:solidFill>
-                  <a:srgbClr val="2C3C43"/>
-                </a:solidFill>
-              </a:rPr>
-              <a:t>ISO/IEC 9075 — </a:t>
-            </a:r>
-            <a:r>
-              <a:rPr sz="1400" b="1" i="0">
+              <a:rPr sz="1400" b="0" i="0" dirty="0">
+                <a:solidFill>
+                  <a:srgbClr val="2C3C43"/>
+                </a:solidFill>
+              </a:rPr>
+              <a:t>ISO/IEC 9075 </a:t>
+            </a:r>
+            <a:r>
+              <a:rPr lang="en-IN" sz="1400" b="0" i="0" dirty="0">
+                <a:solidFill>
+                  <a:srgbClr val="2C3C43"/>
+                </a:solidFill>
+              </a:rPr>
+              <a:t>:</a:t>
+            </a:r>
+            <a:r>
+              <a:rPr sz="1400" b="0" i="0" dirty="0">
+                <a:solidFill>
+                  <a:srgbClr val="2C3C43"/>
+                </a:solidFill>
+              </a:rPr>
+              <a:t> </a:t>
+            </a:r>
+            <a:r>
+              <a:rPr sz="1400" b="1" i="0" dirty="0">
                 <a:solidFill>
                   <a:srgbClr val="2C3C43"/>
                 </a:solidFill>
@@ -6670,7 +6842,7 @@
               <a:t>SQL:2011</a:t>
             </a:r>
             <a:r>
-              <a:rPr sz="1400" b="0" i="0">
+              <a:rPr sz="1400" b="0" i="0" dirty="0">
                 <a:solidFill>
                   <a:srgbClr val="2C3C43"/>
                 </a:solidFill>
@@ -6689,15 +6861,31 @@
               <a:buChar char="•"/>
             </a:pPr>
             <a:r>
-              <a:rPr sz="1400" b="0" i="0">
-                <a:solidFill>
-                  <a:srgbClr val="2C3C43"/>
-                </a:solidFill>
-              </a:rPr>
-              <a:t>R. T. Snodgrass — </a:t>
-            </a:r>
-            <a:r>
-              <a:rPr sz="1400" b="0" i="1">
+              <a:rPr sz="1400" b="0" i="0" dirty="0">
+                <a:solidFill>
+                  <a:srgbClr val="2C3C43"/>
+                </a:solidFill>
+              </a:rPr>
+              <a:t>R. T. Snodgrass </a:t>
+            </a:r>
+            <a:r>
+              <a:rPr lang="en-IN" sz="1400" b="0" i="0" dirty="0">
+                <a:solidFill>
+                  <a:srgbClr val="2C3C43"/>
+                </a:solidFill>
+              </a:rPr>
+              <a:t>:</a:t>
+            </a:r>
+            <a:r>
+              <a:rPr sz="1400" b="0" i="0" dirty="0">
+                <a:solidFill>
+                  <a:srgbClr val="2C3C43"/>
+                </a:solidFill>
+              </a:rPr>
+              <a:t> </a:t>
+            </a:r>
+            <a:r>
+              <a:rPr sz="1400" b="0" i="1" dirty="0">
                 <a:solidFill>
                   <a:srgbClr val="2C3C43"/>
                 </a:solidFill>
@@ -6705,7 +6893,7 @@
               <a:t>Developing Time-Oriented Database Applications in SQL</a:t>
             </a:r>
             <a:r>
-              <a:rPr sz="1400" b="0" i="0">
+              <a:rPr sz="1400" b="0" i="0" dirty="0">
                 <a:solidFill>
                   <a:srgbClr val="2C3C43"/>
                 </a:solidFill>
@@ -6724,12 +6912,28 @@
               <a:buChar char="•"/>
             </a:pPr>
             <a:r>
-              <a:rPr sz="1400" b="0" i="0">
-                <a:solidFill>
-                  <a:srgbClr val="2C3C43"/>
-                </a:solidFill>
-              </a:rPr>
-              <a:t>Course lecture notes — DBMS Modules 1–3 (data models, transactions, storage).</a:t>
+              <a:rPr sz="1400" b="0" i="0" dirty="0">
+                <a:solidFill>
+                  <a:srgbClr val="2C3C43"/>
+                </a:solidFill>
+              </a:rPr>
+              <a:t>Course lecture notes </a:t>
+            </a:r>
+            <a:r>
+              <a:rPr lang="en-IN" sz="1400" b="0" i="0" dirty="0">
+                <a:solidFill>
+                  <a:srgbClr val="2C3C43"/>
+                </a:solidFill>
+              </a:rPr>
+              <a:t>:</a:t>
+            </a:r>
+            <a:r>
+              <a:rPr sz="1400" b="0" i="0" dirty="0">
+                <a:solidFill>
+                  <a:srgbClr val="2C3C43"/>
+                </a:solidFill>
+              </a:rPr>
+              <a:t> DBMS Modules 1–3 (data models, transactions, storage).</a:t>
             </a:r>
           </a:p>
         </p:txBody>
@@ -6771,7 +6975,7 @@
           </a:fontRef>
         </p:style>
         <p:txBody>
-          <a:bodyPr rtlCol="0" anchor="ctr" wrap="square" lIns="45720" rIns="45720" tIns="18288" bIns="18288"/>
+          <a:bodyPr wrap="square" lIns="45720" tIns="18288" rIns="45720" bIns="18288" rtlCol="0" anchor="ctr"/>
           <a:lstStyle/>
           <a:p>
             <a:pPr algn="ctr"/>
@@ -6823,12 +7027,12 @@
           </a:fontRef>
         </p:style>
         <p:txBody>
-          <a:bodyPr rtlCol="0" anchor="ctr" wrap="square" lIns="45720" rIns="45720" tIns="18288" bIns="18288"/>
+          <a:bodyPr wrap="square" lIns="45720" tIns="18288" rIns="45720" bIns="18288" rtlCol="0" anchor="ctr"/>
           <a:lstStyle/>
           <a:p>
             <a:pPr algn="ctr"/>
             <a:r>
-              <a:rPr sz="1000" b="1" i="0">
+              <a:rPr sz="1000" b="1" i="0" dirty="0">
                 <a:solidFill>
                   <a:srgbClr val="FFFFFF"/>
                 </a:solidFill>
@@ -6875,7 +7079,7 @@
           </a:fontRef>
         </p:style>
         <p:txBody>
-          <a:bodyPr rtlCol="0" anchor="ctr" wrap="square" lIns="45720" rIns="45720" tIns="18288" bIns="18288"/>
+          <a:bodyPr wrap="square" lIns="45720" tIns="18288" rIns="45720" bIns="18288" rtlCol="0" anchor="ctr"/>
           <a:lstStyle/>
           <a:p>
             <a:pPr algn="ctr"/>
@@ -6927,23 +7131,39 @@
           </a:fontRef>
         </p:style>
         <p:txBody>
-          <a:bodyPr rtlCol="0" anchor="ctr" wrap="square" lIns="45720" rIns="45720" tIns="18288" bIns="18288"/>
+          <a:bodyPr wrap="square" lIns="45720" tIns="18288" rIns="45720" bIns="18288" rtlCol="0" anchor="ctr"/>
           <a:lstStyle/>
           <a:p>
             <a:pPr algn="ctr"/>
             <a:r>
-              <a:rPr sz="1800" b="1" i="0">
+              <a:rPr sz="1800" b="1" i="0" dirty="0">
                 <a:solidFill>
                   <a:srgbClr val="FFFFFF"/>
                 </a:solidFill>
               </a:rPr>
-              <a:t>Thank you for your attention — Questions are welcome.</a:t>
+              <a:t>Thank you for your attention </a:t>
+            </a:r>
+            <a:r>
+              <a:rPr lang="en-IN" sz="1800" b="1" i="0" dirty="0">
+                <a:solidFill>
+                  <a:srgbClr val="FFFFFF"/>
+                </a:solidFill>
+              </a:rPr>
+              <a:t>:</a:t>
+            </a:r>
+            <a:r>
+              <a:rPr sz="1800" b="1" i="0" dirty="0">
+                <a:solidFill>
+                  <a:srgbClr val="FFFFFF"/>
+                </a:solidFill>
+              </a:rPr>
+              <a:t> Questions are welcome.</a:t>
             </a:r>
           </a:p>
           <a:p>
             <a:pPr algn="ctr"/>
             <a:r>
-              <a:rPr sz="1300" b="0" i="0">
+              <a:rPr sz="1300" b="0" i="0" dirty="0">
                 <a:solidFill>
                   <a:srgbClr val="FFFFFF"/>
                 </a:solidFill>
@@ -6962,7 +7182,7 @@
 </file>
 
 <file path=ppt/slides/slide2.xml><?xml version="1.0" encoding="utf-8"?>
-<p:sld xmlns:a="http://schemas.openxmlformats.org/drawingml/2006/main" xmlns:p="http://schemas.openxmlformats.org/presentationml/2006/main" xmlns:r="http://schemas.openxmlformats.org/officeDocument/2006/relationships">
+<p:sld xmlns:a="http://schemas.openxmlformats.org/drawingml/2006/main" xmlns:r="http://schemas.openxmlformats.org/officeDocument/2006/relationships" xmlns:p="http://schemas.openxmlformats.org/presentationml/2006/main">
   <p:cSld>
     <p:spTree>
       <p:nvGrpSpPr>
@@ -6970,7 +7190,14 @@
         <p:cNvGrpSpPr/>
         <p:nvPr/>
       </p:nvGrpSpPr>
-      <p:grpSpPr/>
+      <p:grpSpPr>
+        <a:xfrm>
+          <a:off x="0" y="0"/>
+          <a:ext cx="0" cy="0"/>
+          <a:chOff x="0" y="0"/>
+          <a:chExt cx="0" cy="0"/>
+        </a:xfrm>
+      </p:grpSpPr>
       <p:sp>
         <p:nvSpPr>
           <p:cNvPr id="2" name="TextBox 1"/>
@@ -6980,7 +7207,7 @@
         <p:spPr>
           <a:xfrm>
             <a:off x="731520" y="365760"/>
-            <a:ext cx="8229600" cy="1005840"/>
+            <a:ext cx="8229600" cy="917174"/>
           </a:xfrm>
           <a:prstGeom prst="rect">
             <a:avLst/>
@@ -6988,18 +7215,34 @@
           <a:noFill/>
         </p:spPr>
         <p:txBody>
-          <a:bodyPr wrap="square" anchor="t" lIns="45720" rIns="45720" tIns="27432" bIns="27432">
+          <a:bodyPr wrap="square" lIns="45720" tIns="27432" rIns="45720" bIns="27432" anchor="t">
             <a:spAutoFit/>
           </a:bodyPr>
           <a:lstStyle/>
           <a:p>
             <a:r>
-              <a:rPr sz="2800" b="1" i="0">
-                <a:solidFill>
-                  <a:srgbClr val="2C3C43"/>
-                </a:solidFill>
-              </a:rPr>
-              <a:t>Introduction — Why Do We Need Time in Databases?</a:t>
+              <a:rPr sz="2800" b="1" i="0" dirty="0">
+                <a:solidFill>
+                  <a:srgbClr val="2C3C43"/>
+                </a:solidFill>
+              </a:rPr>
+              <a:t>Introduction </a:t>
+            </a:r>
+            <a:r>
+              <a:rPr lang="en-IN" sz="2800" b="1" i="0" dirty="0">
+                <a:solidFill>
+                  <a:srgbClr val="2C3C43"/>
+                </a:solidFill>
+              </a:rPr>
+              <a:t>:</a:t>
+            </a:r>
+            <a:r>
+              <a:rPr sz="2800" b="1" i="0" dirty="0">
+                <a:solidFill>
+                  <a:srgbClr val="2C3C43"/>
+                </a:solidFill>
+              </a:rPr>
+              <a:t> Why Do We Need Time in Databases?</a:t>
             </a:r>
           </a:p>
         </p:txBody>
@@ -7021,7 +7264,7 @@
           <a:noFill/>
         </p:spPr>
         <p:txBody>
-          <a:bodyPr wrap="square" anchor="t" lIns="45720" rIns="45720" tIns="27432" bIns="27432">
+          <a:bodyPr wrap="square" lIns="45720" tIns="27432" rIns="45720" bIns="27432" anchor="t">
             <a:spAutoFit/>
           </a:bodyPr>
           <a:lstStyle/>
@@ -7054,7 +7297,7 @@
           <a:noFill/>
         </p:spPr>
         <p:txBody>
-          <a:bodyPr wrap="square" anchor="t" lIns="45720" rIns="45720" tIns="27432" bIns="27432">
+          <a:bodyPr wrap="square" lIns="45720" tIns="27432" rIns="45720" bIns="27432" anchor="t">
             <a:spAutoFit/>
           </a:bodyPr>
           <a:lstStyle/>
@@ -7080,7 +7323,7 @@
         <p:spPr>
           <a:xfrm>
             <a:off x="731520" y="1508760"/>
-            <a:ext cx="4297680" cy="4754880"/>
+            <a:ext cx="4297680" cy="3126497"/>
           </a:xfrm>
           <a:prstGeom prst="rect">
             <a:avLst/>
@@ -7103,7 +7346,7 @@
               <a:buChar char="•"/>
             </a:pPr>
             <a:r>
-              <a:rPr sz="1400" b="0" i="0">
+              <a:rPr sz="1400" b="0" i="0" dirty="0">
                 <a:solidFill>
                   <a:srgbClr val="2C3C43"/>
                 </a:solidFill>
@@ -7111,7 +7354,7 @@
               <a:t>A conventional DBMS keeps only the </a:t>
             </a:r>
             <a:r>
-              <a:rPr sz="1400" b="1" i="0">
+              <a:rPr sz="1400" b="1" i="0" dirty="0">
                 <a:solidFill>
                   <a:srgbClr val="2C3C43"/>
                 </a:solidFill>
@@ -7119,12 +7362,28 @@
               <a:t>current state</a:t>
             </a:r>
             <a:r>
-              <a:rPr sz="1400" b="0" i="0">
-                <a:solidFill>
-                  <a:srgbClr val="2C3C43"/>
-                </a:solidFill>
-              </a:rPr>
-              <a:t> — the old value is overwritten.</a:t>
+              <a:rPr sz="1400" b="0" i="0" dirty="0">
+                <a:solidFill>
+                  <a:srgbClr val="2C3C43"/>
+                </a:solidFill>
+              </a:rPr>
+              <a:t> </a:t>
+            </a:r>
+            <a:r>
+              <a:rPr lang="en-IN" sz="1400" b="0" i="0" dirty="0">
+                <a:solidFill>
+                  <a:srgbClr val="2C3C43"/>
+                </a:solidFill>
+              </a:rPr>
+              <a:t>:</a:t>
+            </a:r>
+            <a:r>
+              <a:rPr sz="1400" b="0" i="0" dirty="0">
+                <a:solidFill>
+                  <a:srgbClr val="2C3C43"/>
+                </a:solidFill>
+              </a:rPr>
+              <a:t> the old value is overwritten.</a:t>
             </a:r>
           </a:p>
           <a:p>
@@ -7138,7 +7397,7 @@
               <a:buChar char="•"/>
             </a:pPr>
             <a:r>
-              <a:rPr sz="1400" b="0" i="0">
+              <a:rPr sz="1400" b="0" i="0" dirty="0">
                 <a:solidFill>
                   <a:srgbClr val="2C3C43"/>
                 </a:solidFill>
@@ -7146,7 +7405,7 @@
               <a:t>But many questions are about the </a:t>
             </a:r>
             <a:r>
-              <a:rPr sz="1400" b="1" i="0">
+              <a:rPr sz="1400" b="1" i="0" dirty="0">
                 <a:solidFill>
                   <a:srgbClr val="2C3C43"/>
                 </a:solidFill>
@@ -7154,7 +7413,7 @@
               <a:t>past</a:t>
             </a:r>
             <a:r>
-              <a:rPr sz="1400" b="0" i="0">
+              <a:rPr sz="1400" b="0" i="0" dirty="0">
                 <a:solidFill>
                   <a:srgbClr val="2C3C43"/>
                 </a:solidFill>
@@ -7173,7 +7432,7 @@
               <a:buChar char="•"/>
             </a:pPr>
             <a:r>
-              <a:rPr sz="1400" b="0" i="0">
+              <a:rPr sz="1400" b="0" i="0" dirty="0">
                 <a:solidFill>
                   <a:srgbClr val="2C3C43"/>
                 </a:solidFill>
@@ -7181,7 +7440,7 @@
               <a:t>Overwriting data destroys the </a:t>
             </a:r>
             <a:r>
-              <a:rPr sz="1400" b="1" i="0">
+              <a:rPr sz="1400" b="1" i="0" dirty="0">
                 <a:solidFill>
                   <a:srgbClr val="2C3C43"/>
                 </a:solidFill>
@@ -7189,7 +7448,7 @@
               <a:t>audit trail</a:t>
             </a:r>
             <a:r>
-              <a:rPr sz="1400" b="0" i="0">
+              <a:rPr sz="1400" b="0" i="0" dirty="0">
                 <a:solidFill>
                   <a:srgbClr val="2C3C43"/>
                 </a:solidFill>
@@ -7208,7 +7467,7 @@
               <a:buChar char="•"/>
             </a:pPr>
             <a:r>
-              <a:rPr sz="1400" b="1" i="0">
+              <a:rPr sz="1400" b="1" i="0" dirty="0">
                 <a:solidFill>
                   <a:srgbClr val="2C3C43"/>
                 </a:solidFill>
@@ -7216,7 +7475,7 @@
               <a:t>Temporal databases</a:t>
             </a:r>
             <a:r>
-              <a:rPr sz="1400" b="0" i="0">
+              <a:rPr sz="1400" b="0" i="0" dirty="0">
                 <a:solidFill>
                   <a:srgbClr val="2C3C43"/>
                 </a:solidFill>
@@ -7235,7 +7494,7 @@
               <a:buChar char="•"/>
             </a:pPr>
             <a:r>
-              <a:rPr sz="1400" b="0" i="0">
+              <a:rPr sz="1400" b="0" i="0" dirty="0">
                 <a:solidFill>
                   <a:srgbClr val="2C3C43"/>
                 </a:solidFill>
@@ -7243,7 +7502,7 @@
               <a:t>They answer </a:t>
             </a:r>
             <a:r>
-              <a:rPr sz="1400" b="0" i="1">
+              <a:rPr sz="1400" b="0" i="1" dirty="0">
                 <a:solidFill>
                   <a:srgbClr val="2C3C43"/>
                 </a:solidFill>
@@ -7251,7 +7510,7 @@
               <a:t>when</a:t>
             </a:r>
             <a:r>
-              <a:rPr sz="1400" b="0" i="0">
+              <a:rPr sz="1400" b="0" i="0" dirty="0">
                 <a:solidFill>
                   <a:srgbClr val="2C3C43"/>
                 </a:solidFill>
@@ -7259,7 +7518,7 @@
               <a:t> a fact was true and </a:t>
             </a:r>
             <a:r>
-              <a:rPr sz="1400" b="0" i="1">
+              <a:rPr sz="1400" b="0" i="1" dirty="0">
                 <a:solidFill>
                   <a:srgbClr val="2C3C43"/>
                 </a:solidFill>
@@ -7267,7 +7526,7 @@
               <a:t>when</a:t>
             </a:r>
             <a:r>
-              <a:rPr sz="1400" b="0" i="0">
+              <a:rPr sz="1400" b="0" i="0" dirty="0">
                 <a:solidFill>
                   <a:srgbClr val="2C3C43"/>
                 </a:solidFill>
@@ -7286,12 +7545,44 @@
               <a:buChar char="•"/>
             </a:pPr>
             <a:r>
-              <a:rPr sz="1400" b="0" i="0">
-                <a:solidFill>
-                  <a:srgbClr val="2C3C43"/>
-                </a:solidFill>
-              </a:rPr>
-              <a:t>Built on standard DBMS ideas — schema, keys, transactions, indexing — extended with time.</a:t>
+              <a:rPr sz="1400" b="0" i="0" dirty="0">
+                <a:solidFill>
+                  <a:srgbClr val="2C3C43"/>
+                </a:solidFill>
+              </a:rPr>
+              <a:t>Built on standard DBMS ideas </a:t>
+            </a:r>
+            <a:r>
+              <a:rPr lang="en-IN" sz="1400" b="0" i="0" dirty="0">
+                <a:solidFill>
+                  <a:srgbClr val="2C3C43"/>
+                </a:solidFill>
+              </a:rPr>
+              <a:t>:</a:t>
+            </a:r>
+            <a:r>
+              <a:rPr sz="1400" b="0" i="0" dirty="0">
+                <a:solidFill>
+                  <a:srgbClr val="2C3C43"/>
+                </a:solidFill>
+              </a:rPr>
+              <a:t> schema, keys, transactions, indexing </a:t>
+            </a:r>
+            <a:r>
+              <a:rPr lang="en-IN" sz="1400" b="0" i="0" dirty="0">
+                <a:solidFill>
+                  <a:srgbClr val="2C3C43"/>
+                </a:solidFill>
+              </a:rPr>
+              <a:t>:</a:t>
+            </a:r>
+            <a:r>
+              <a:rPr sz="1400" b="0" i="0" dirty="0">
+                <a:solidFill>
+                  <a:srgbClr val="2C3C43"/>
+                </a:solidFill>
+              </a:rPr>
+              <a:t> extended with time.</a:t>
             </a:r>
           </a:p>
         </p:txBody>
@@ -7313,7 +7604,7 @@
           <a:noFill/>
         </p:spPr>
         <p:txBody>
-          <a:bodyPr wrap="square" anchor="t" lIns="45720" rIns="45720" tIns="27432" bIns="27432">
+          <a:bodyPr wrap="square" lIns="45720" tIns="27432" rIns="45720" bIns="27432" anchor="t">
             <a:spAutoFit/>
           </a:bodyPr>
           <a:lstStyle/>
@@ -7366,7 +7657,7 @@
           </a:fontRef>
         </p:style>
         <p:txBody>
-          <a:bodyPr rtlCol="0" anchor="ctr" wrap="square" lIns="45720" rIns="45720" tIns="18288" bIns="18288"/>
+          <a:bodyPr wrap="square" lIns="45720" tIns="18288" rIns="45720" bIns="18288" rtlCol="0" anchor="ctr"/>
           <a:lstStyle/>
           <a:p>
             <a:pPr algn="ctr"/>
@@ -7398,7 +7689,7 @@
           <a:noFill/>
         </p:spPr>
         <p:txBody>
-          <a:bodyPr wrap="square" anchor="t" lIns="45720" rIns="45720" tIns="27432" bIns="27432">
+          <a:bodyPr wrap="square" lIns="45720" tIns="27432" rIns="45720" bIns="27432" anchor="t">
             <a:spAutoFit/>
           </a:bodyPr>
           <a:lstStyle/>
@@ -7431,7 +7722,7 @@
           <a:noFill/>
         </p:spPr>
         <p:txBody>
-          <a:bodyPr wrap="square" anchor="t" lIns="45720" rIns="45720" tIns="27432" bIns="27432">
+          <a:bodyPr wrap="square" lIns="45720" tIns="27432" rIns="45720" bIns="27432" anchor="t">
             <a:spAutoFit/>
           </a:bodyPr>
           <a:lstStyle/>
@@ -7484,7 +7775,7 @@
           </a:fontRef>
         </p:style>
         <p:txBody>
-          <a:bodyPr rtlCol="0" anchor="ctr" wrap="square" lIns="45720" rIns="45720" tIns="18288" bIns="18288"/>
+          <a:bodyPr wrap="square" lIns="45720" tIns="18288" rIns="45720" bIns="18288" rtlCol="0" anchor="ctr"/>
           <a:lstStyle/>
           <a:p>
             <a:pPr algn="ctr"/>
@@ -7536,7 +7827,7 @@
           </a:fontRef>
         </p:style>
         <p:txBody>
-          <a:bodyPr rtlCol="0" anchor="ctr" wrap="square" lIns="45720" rIns="45720" tIns="18288" bIns="18288"/>
+          <a:bodyPr wrap="square" lIns="45720" tIns="18288" rIns="45720" bIns="18288" rtlCol="0" anchor="ctr"/>
           <a:lstStyle/>
           <a:p>
             <a:pPr algn="ctr"/>
@@ -7568,7 +7859,7 @@
           <a:noFill/>
         </p:spPr>
         <p:txBody>
-          <a:bodyPr wrap="square" anchor="t" lIns="45720" rIns="45720" tIns="27432" bIns="27432">
+          <a:bodyPr wrap="square" lIns="45720" tIns="27432" rIns="45720" bIns="27432" anchor="t">
             <a:spAutoFit/>
           </a:bodyPr>
           <a:lstStyle/>
@@ -7593,7 +7884,7 @@
 </file>
 
 <file path=ppt/slides/slide3.xml><?xml version="1.0" encoding="utf-8"?>
-<p:sld xmlns:a="http://schemas.openxmlformats.org/drawingml/2006/main" xmlns:p="http://schemas.openxmlformats.org/presentationml/2006/main" xmlns:r="http://schemas.openxmlformats.org/officeDocument/2006/relationships">
+<p:sld xmlns:a="http://schemas.openxmlformats.org/drawingml/2006/main" xmlns:r="http://schemas.openxmlformats.org/officeDocument/2006/relationships" xmlns:p="http://schemas.openxmlformats.org/presentationml/2006/main">
   <p:cSld>
     <p:spTree>
       <p:nvGrpSpPr>
@@ -7601,7 +7892,14 @@
         <p:cNvGrpSpPr/>
         <p:nvPr/>
       </p:nvGrpSpPr>
-      <p:grpSpPr/>
+      <p:grpSpPr>
+        <a:xfrm>
+          <a:off x="0" y="0"/>
+          <a:ext cx="0" cy="0"/>
+          <a:chOff x="0" y="0"/>
+          <a:chExt cx="0" cy="0"/>
+        </a:xfrm>
+      </p:grpSpPr>
       <p:sp>
         <p:nvSpPr>
           <p:cNvPr id="2" name="TextBox 1"/>
@@ -7619,7 +7917,7 @@
           <a:noFill/>
         </p:spPr>
         <p:txBody>
-          <a:bodyPr wrap="square" anchor="t" lIns="45720" rIns="45720" tIns="27432" bIns="27432">
+          <a:bodyPr wrap="square" lIns="45720" tIns="27432" rIns="45720" bIns="27432" anchor="t">
             <a:spAutoFit/>
           </a:bodyPr>
           <a:lstStyle/>
@@ -7652,7 +7950,7 @@
           <a:noFill/>
         </p:spPr>
         <p:txBody>
-          <a:bodyPr wrap="square" anchor="t" lIns="45720" rIns="45720" tIns="27432" bIns="27432">
+          <a:bodyPr wrap="square" lIns="45720" tIns="27432" rIns="45720" bIns="27432" anchor="t">
             <a:spAutoFit/>
           </a:bodyPr>
           <a:lstStyle/>
@@ -7685,7 +7983,7 @@
           <a:noFill/>
         </p:spPr>
         <p:txBody>
-          <a:bodyPr wrap="square" anchor="t" lIns="45720" rIns="45720" tIns="27432" bIns="27432">
+          <a:bodyPr wrap="square" lIns="45720" tIns="27432" rIns="45720" bIns="27432" anchor="t">
             <a:spAutoFit/>
           </a:bodyPr>
           <a:lstStyle/>
@@ -7739,7 +8037,7 @@
           </a:fontRef>
         </p:style>
         <p:txBody>
-          <a:bodyPr rtlCol="0" anchor="ctr" wrap="square" lIns="45720" rIns="45720" tIns="18288" bIns="18288"/>
+          <a:bodyPr wrap="square" lIns="45720" tIns="18288" rIns="45720" bIns="18288" rtlCol="0" anchor="ctr"/>
           <a:lstStyle/>
           <a:p>
             <a:pPr algn="ctr"/>
@@ -7771,7 +8069,7 @@
           <a:noFill/>
         </p:spPr>
         <p:txBody>
-          <a:bodyPr wrap="square" anchor="ctr" lIns="45720" rIns="45720" tIns="27432" bIns="27432">
+          <a:bodyPr wrap="square" lIns="45720" tIns="27432" rIns="45720" bIns="27432" anchor="ctr">
             <a:spAutoFit/>
           </a:bodyPr>
           <a:lstStyle/>
@@ -7824,7 +8122,7 @@
           </a:fontRef>
         </p:style>
         <p:txBody>
-          <a:bodyPr rtlCol="0" anchor="ctr" wrap="square" lIns="45720" rIns="45720" tIns="18288" bIns="18288"/>
+          <a:bodyPr wrap="square" lIns="45720" tIns="18288" rIns="45720" bIns="18288" rtlCol="0" anchor="ctr"/>
           <a:lstStyle/>
           <a:p>
             <a:pPr algn="ctr"/>
@@ -7856,7 +8154,7 @@
           <a:noFill/>
         </p:spPr>
         <p:txBody>
-          <a:bodyPr wrap="square" anchor="ctr" lIns="45720" rIns="45720" tIns="27432" bIns="27432">
+          <a:bodyPr wrap="square" lIns="45720" tIns="27432" rIns="45720" bIns="27432" anchor="ctr">
             <a:spAutoFit/>
           </a:bodyPr>
           <a:lstStyle/>
@@ -7909,7 +8207,7 @@
           </a:fontRef>
         </p:style>
         <p:txBody>
-          <a:bodyPr rtlCol="0" anchor="ctr" wrap="square" lIns="45720" rIns="45720" tIns="18288" bIns="18288"/>
+          <a:bodyPr wrap="square" lIns="45720" tIns="18288" rIns="45720" bIns="18288" rtlCol="0" anchor="ctr"/>
           <a:lstStyle/>
           <a:p>
             <a:pPr algn="ctr"/>
@@ -7941,7 +8239,7 @@
           <a:noFill/>
         </p:spPr>
         <p:txBody>
-          <a:bodyPr wrap="square" anchor="ctr" lIns="45720" rIns="45720" tIns="27432" bIns="27432">
+          <a:bodyPr wrap="square" lIns="45720" tIns="27432" rIns="45720" bIns="27432" anchor="ctr">
             <a:spAutoFit/>
           </a:bodyPr>
           <a:lstStyle/>
@@ -7994,7 +8292,7 @@
           </a:fontRef>
         </p:style>
         <p:txBody>
-          <a:bodyPr rtlCol="0" anchor="ctr" wrap="square" lIns="45720" rIns="45720" tIns="18288" bIns="18288"/>
+          <a:bodyPr wrap="square" lIns="45720" tIns="18288" rIns="45720" bIns="18288" rtlCol="0" anchor="ctr"/>
           <a:lstStyle/>
           <a:p>
             <a:pPr algn="ctr"/>
@@ -8026,7 +8324,7 @@
           <a:noFill/>
         </p:spPr>
         <p:txBody>
-          <a:bodyPr wrap="square" anchor="ctr" lIns="45720" rIns="45720" tIns="27432" bIns="27432">
+          <a:bodyPr wrap="square" lIns="45720" tIns="27432" rIns="45720" bIns="27432" anchor="ctr">
             <a:spAutoFit/>
           </a:bodyPr>
           <a:lstStyle/>
@@ -8079,7 +8377,7 @@
           </a:fontRef>
         </p:style>
         <p:txBody>
-          <a:bodyPr rtlCol="0" anchor="ctr" wrap="square" lIns="45720" rIns="45720" tIns="18288" bIns="18288"/>
+          <a:bodyPr wrap="square" lIns="45720" tIns="18288" rIns="45720" bIns="18288" rtlCol="0" anchor="ctr"/>
           <a:lstStyle/>
           <a:p>
             <a:pPr algn="ctr"/>
@@ -8111,7 +8409,7 @@
           <a:noFill/>
         </p:spPr>
         <p:txBody>
-          <a:bodyPr wrap="square" anchor="ctr" lIns="45720" rIns="45720" tIns="27432" bIns="27432">
+          <a:bodyPr wrap="square" lIns="45720" tIns="27432" rIns="45720" bIns="27432" anchor="ctr">
             <a:spAutoFit/>
           </a:bodyPr>
           <a:lstStyle/>
@@ -8164,7 +8462,7 @@
           </a:fontRef>
         </p:style>
         <p:txBody>
-          <a:bodyPr rtlCol="0" anchor="ctr" wrap="square" lIns="45720" rIns="45720" tIns="18288" bIns="18288"/>
+          <a:bodyPr wrap="square" lIns="45720" tIns="18288" rIns="45720" bIns="18288" rtlCol="0" anchor="ctr"/>
           <a:lstStyle/>
           <a:p>
             <a:pPr algn="ctr"/>
@@ -8196,7 +8494,7 @@
           <a:noFill/>
         </p:spPr>
         <p:txBody>
-          <a:bodyPr wrap="square" anchor="ctr" lIns="45720" rIns="45720" tIns="27432" bIns="27432">
+          <a:bodyPr wrap="square" lIns="45720" tIns="27432" rIns="45720" bIns="27432" anchor="ctr">
             <a:spAutoFit/>
           </a:bodyPr>
           <a:lstStyle/>
@@ -8249,7 +8547,7 @@
           </a:fontRef>
         </p:style>
         <p:txBody>
-          <a:bodyPr rtlCol="0" anchor="ctr" wrap="square" lIns="45720" rIns="45720" tIns="18288" bIns="18288"/>
+          <a:bodyPr wrap="square" lIns="45720" tIns="18288" rIns="45720" bIns="18288" rtlCol="0" anchor="ctr"/>
           <a:lstStyle/>
           <a:p>
             <a:pPr algn="ctr"/>
@@ -8281,7 +8579,7 @@
           <a:noFill/>
         </p:spPr>
         <p:txBody>
-          <a:bodyPr wrap="square" anchor="ctr" lIns="45720" rIns="45720" tIns="27432" bIns="27432">
+          <a:bodyPr wrap="square" lIns="45720" tIns="27432" rIns="45720" bIns="27432" anchor="ctr">
             <a:spAutoFit/>
           </a:bodyPr>
           <a:lstStyle/>
@@ -8334,7 +8632,7 @@
           </a:fontRef>
         </p:style>
         <p:txBody>
-          <a:bodyPr rtlCol="0" anchor="ctr" wrap="square" lIns="45720" rIns="45720" tIns="18288" bIns="18288"/>
+          <a:bodyPr wrap="square" lIns="45720" tIns="18288" rIns="45720" bIns="18288" rtlCol="0" anchor="ctr"/>
           <a:lstStyle/>
           <a:p>
             <a:pPr algn="ctr"/>
@@ -8357,8 +8655,8 @@
         </p:nvSpPr>
         <p:spPr>
           <a:xfrm>
-            <a:off x="5623559" y="3392424"/>
-            <a:ext cx="3429000" cy="548640"/>
+            <a:off x="5623559" y="3531322"/>
+            <a:ext cx="3429000" cy="270843"/>
           </a:xfrm>
           <a:prstGeom prst="rect">
             <a:avLst/>
@@ -8366,18 +8664,34 @@
           <a:noFill/>
         </p:spPr>
         <p:txBody>
-          <a:bodyPr wrap="square" anchor="ctr" lIns="45720" rIns="45720" tIns="27432" bIns="27432">
+          <a:bodyPr wrap="square" lIns="45720" tIns="27432" rIns="45720" bIns="27432" anchor="ctr">
             <a:spAutoFit/>
           </a:bodyPr>
           <a:lstStyle/>
           <a:p>
             <a:r>
-              <a:rPr sz="1400" b="0" i="0">
-                <a:solidFill>
-                  <a:srgbClr val="2C3C43"/>
-                </a:solidFill>
-              </a:rPr>
-              <a:t>Worked Example — Salary History</a:t>
+              <a:rPr sz="1400" b="0" i="0" dirty="0">
+                <a:solidFill>
+                  <a:srgbClr val="2C3C43"/>
+                </a:solidFill>
+              </a:rPr>
+              <a:t>Worked Example </a:t>
+            </a:r>
+            <a:r>
+              <a:rPr lang="en-IN" sz="1400" b="0" i="0" dirty="0">
+                <a:solidFill>
+                  <a:srgbClr val="2C3C43"/>
+                </a:solidFill>
+              </a:rPr>
+              <a:t>:</a:t>
+            </a:r>
+            <a:r>
+              <a:rPr sz="1400" b="0" i="0" dirty="0">
+                <a:solidFill>
+                  <a:srgbClr val="2C3C43"/>
+                </a:solidFill>
+              </a:rPr>
+              <a:t> Salary History</a:t>
             </a:r>
           </a:p>
         </p:txBody>
@@ -8419,7 +8733,7 @@
           </a:fontRef>
         </p:style>
         <p:txBody>
-          <a:bodyPr rtlCol="0" anchor="ctr" wrap="square" lIns="45720" rIns="45720" tIns="18288" bIns="18288"/>
+          <a:bodyPr wrap="square" lIns="45720" tIns="18288" rIns="45720" bIns="18288" rtlCol="0" anchor="ctr"/>
           <a:lstStyle/>
           <a:p>
             <a:pPr algn="ctr"/>
@@ -8451,7 +8765,7 @@
           <a:noFill/>
         </p:spPr>
         <p:txBody>
-          <a:bodyPr wrap="square" anchor="ctr" lIns="45720" rIns="45720" tIns="27432" bIns="27432">
+          <a:bodyPr wrap="square" lIns="45720" tIns="27432" rIns="45720" bIns="27432" anchor="ctr">
             <a:spAutoFit/>
           </a:bodyPr>
           <a:lstStyle/>
@@ -8504,7 +8818,7 @@
           </a:fontRef>
         </p:style>
         <p:txBody>
-          <a:bodyPr rtlCol="0" anchor="ctr" wrap="square" lIns="45720" rIns="45720" tIns="18288" bIns="18288"/>
+          <a:bodyPr wrap="square" lIns="45720" tIns="18288" rIns="45720" bIns="18288" rtlCol="0" anchor="ctr"/>
           <a:lstStyle/>
           <a:p>
             <a:pPr algn="ctr"/>
@@ -8536,7 +8850,7 @@
           <a:noFill/>
         </p:spPr>
         <p:txBody>
-          <a:bodyPr wrap="square" anchor="ctr" lIns="45720" rIns="45720" tIns="27432" bIns="27432">
+          <a:bodyPr wrap="square" lIns="45720" tIns="27432" rIns="45720" bIns="27432" anchor="ctr">
             <a:spAutoFit/>
           </a:bodyPr>
           <a:lstStyle/>
@@ -8561,7 +8875,7 @@
 </file>
 
 <file path=ppt/slides/slide4.xml><?xml version="1.0" encoding="utf-8"?>
-<p:sld xmlns:a="http://schemas.openxmlformats.org/drawingml/2006/main" xmlns:p="http://schemas.openxmlformats.org/presentationml/2006/main" xmlns:r="http://schemas.openxmlformats.org/officeDocument/2006/relationships">
+<p:sld xmlns:a="http://schemas.openxmlformats.org/drawingml/2006/main" xmlns:r="http://schemas.openxmlformats.org/officeDocument/2006/relationships" xmlns:p="http://schemas.openxmlformats.org/presentationml/2006/main">
   <p:cSld>
     <p:spTree>
       <p:nvGrpSpPr>
@@ -8569,7 +8883,14 @@
         <p:cNvGrpSpPr/>
         <p:nvPr/>
       </p:nvGrpSpPr>
-      <p:grpSpPr/>
+      <p:grpSpPr>
+        <a:xfrm>
+          <a:off x="0" y="0"/>
+          <a:ext cx="0" cy="0"/>
+          <a:chOff x="0" y="0"/>
+          <a:chExt cx="0" cy="0"/>
+        </a:xfrm>
+      </p:grpSpPr>
       <p:sp>
         <p:nvSpPr>
           <p:cNvPr id="2" name="TextBox 1"/>
@@ -8587,7 +8908,7 @@
           <a:noFill/>
         </p:spPr>
         <p:txBody>
-          <a:bodyPr wrap="square" anchor="t" lIns="45720" rIns="45720" tIns="27432" bIns="27432">
+          <a:bodyPr wrap="square" lIns="45720" tIns="27432" rIns="45720" bIns="27432" anchor="t">
             <a:spAutoFit/>
           </a:bodyPr>
           <a:lstStyle/>
@@ -8620,7 +8941,7 @@
           <a:noFill/>
         </p:spPr>
         <p:txBody>
-          <a:bodyPr wrap="square" anchor="t" lIns="45720" rIns="45720" tIns="27432" bIns="27432">
+          <a:bodyPr wrap="square" lIns="45720" tIns="27432" rIns="45720" bIns="27432" anchor="t">
             <a:spAutoFit/>
           </a:bodyPr>
           <a:lstStyle/>
@@ -8653,7 +8974,7 @@
           <a:noFill/>
         </p:spPr>
         <p:txBody>
-          <a:bodyPr wrap="square" anchor="t" lIns="45720" rIns="45720" tIns="27432" bIns="27432">
+          <a:bodyPr wrap="square" lIns="45720" tIns="27432" rIns="45720" bIns="27432" anchor="t">
             <a:spAutoFit/>
           </a:bodyPr>
           <a:lstStyle/>
@@ -8702,7 +9023,7 @@
               <a:buChar char="•"/>
             </a:pPr>
             <a:r>
-              <a:rPr sz="1400" b="0" i="0">
+              <a:rPr sz="1400" b="0" i="0" dirty="0">
                 <a:solidFill>
                   <a:srgbClr val="2C3C43"/>
                 </a:solidFill>
@@ -8710,7 +9031,7 @@
               <a:t>Conventional DBMS = </a:t>
             </a:r>
             <a:r>
-              <a:rPr sz="1400" b="1" i="0">
+              <a:rPr sz="1400" b="1" i="0" dirty="0">
                 <a:solidFill>
                   <a:srgbClr val="2C3C43"/>
                 </a:solidFill>
@@ -8718,7 +9039,7 @@
               <a:t>snapshot database</a:t>
             </a:r>
             <a:r>
-              <a:rPr sz="1400" b="0" i="0">
+              <a:rPr sz="1400" b="0" i="0" dirty="0">
                 <a:solidFill>
                   <a:srgbClr val="2C3C43"/>
                 </a:solidFill>
@@ -8737,7 +9058,7 @@
               <a:buChar char="•"/>
             </a:pPr>
             <a:r>
-              <a:rPr sz="1400" b="0" i="0">
+              <a:rPr sz="1400" b="0" i="0" dirty="0">
                 <a:solidFill>
                   <a:srgbClr val="2C3C43"/>
                 </a:solidFill>
@@ -8745,7 +9066,7 @@
               <a:t>An </a:t>
             </a:r>
             <a:r>
-              <a:rPr sz="1400" b="0" i="0">
+              <a:rPr sz="1400" b="0" i="0" dirty="0">
                 <a:solidFill>
                   <a:srgbClr val="A8470A"/>
                 </a:solidFill>
@@ -8754,7 +9075,7 @@
               <a:t>UPDATE</a:t>
             </a:r>
             <a:r>
-              <a:rPr sz="1400" b="0" i="0">
+              <a:rPr sz="1400" b="0" i="0" dirty="0">
                 <a:solidFill>
                   <a:srgbClr val="2C3C43"/>
                 </a:solidFill>
@@ -8762,7 +9083,7 @@
               <a:t> or </a:t>
             </a:r>
             <a:r>
-              <a:rPr sz="1400" b="0" i="0">
+              <a:rPr sz="1400" b="0" i="0" dirty="0">
                 <a:solidFill>
                   <a:srgbClr val="A8470A"/>
                 </a:solidFill>
@@ -8771,7 +9092,7 @@
               <a:t>DELETE</a:t>
             </a:r>
             <a:r>
-              <a:rPr sz="1400" b="0" i="0">
+              <a:rPr sz="1400" b="0" i="0" dirty="0">
                 <a:solidFill>
                   <a:srgbClr val="2C3C43"/>
                 </a:solidFill>
@@ -8779,7 +9100,7 @@
               <a:t> </a:t>
             </a:r>
             <a:r>
-              <a:rPr sz="1400" b="1" i="0">
+              <a:rPr sz="1400" b="1" i="0" dirty="0">
                 <a:solidFill>
                   <a:srgbClr val="2C3C43"/>
                 </a:solidFill>
@@ -8787,7 +9108,7 @@
               <a:t>physically destroys</a:t>
             </a:r>
             <a:r>
-              <a:rPr sz="1400" b="0" i="0">
+              <a:rPr sz="1400" b="0" i="0" dirty="0">
                 <a:solidFill>
                   <a:srgbClr val="2C3C43"/>
                 </a:solidFill>
@@ -8806,7 +9127,7 @@
               <a:buChar char="•"/>
             </a:pPr>
             <a:r>
-              <a:rPr sz="1400" b="0" i="0">
+              <a:rPr sz="1400" b="0" i="0" dirty="0">
                 <a:solidFill>
                   <a:srgbClr val="2C3C43"/>
                 </a:solidFill>
@@ -8825,7 +9146,7 @@
               <a:buChar char="•"/>
             </a:pPr>
             <a:r>
-              <a:rPr sz="1400" b="0" i="0">
+              <a:rPr sz="1400" b="0" i="0" dirty="0">
                 <a:solidFill>
                   <a:srgbClr val="2C3C43"/>
                 </a:solidFill>
@@ -8844,7 +9165,7 @@
               <a:buChar char="•"/>
             </a:pPr>
             <a:r>
-              <a:rPr sz="1400" b="0" i="0">
+              <a:rPr sz="1400" b="0" i="0" dirty="0">
                 <a:solidFill>
                   <a:srgbClr val="2C3C43"/>
                 </a:solidFill>
@@ -8863,7 +9184,7 @@
               <a:buChar char="•"/>
             </a:pPr>
             <a:r>
-              <a:rPr sz="1400" b="0" i="0">
+              <a:rPr sz="1400" b="0" i="0" dirty="0">
                 <a:solidFill>
                   <a:srgbClr val="2C3C43"/>
                 </a:solidFill>
@@ -8871,15 +9192,31 @@
               <a:t>A temporal DBMS makes history a </a:t>
             </a:r>
             <a:r>
-              <a:rPr sz="1400" b="1" i="0">
-                <a:solidFill>
-                  <a:srgbClr val="2C3C43"/>
-                </a:solidFill>
-              </a:rPr>
-              <a:t>built-in, queryable dimension</a:t>
-            </a:r>
-            <a:r>
-              <a:rPr sz="1400" b="0" i="0">
+              <a:rPr sz="1400" b="1" i="0" dirty="0">
+                <a:solidFill>
+                  <a:srgbClr val="2C3C43"/>
+                </a:solidFill>
+              </a:rPr>
+              <a:t>built-in, </a:t>
+            </a:r>
+            <a:r>
+              <a:rPr sz="1400" b="1" i="0" dirty="0" err="1">
+                <a:solidFill>
+                  <a:srgbClr val="2C3C43"/>
+                </a:solidFill>
+              </a:rPr>
+              <a:t>queryable</a:t>
+            </a:r>
+            <a:r>
+              <a:rPr sz="1400" b="1" i="0" dirty="0">
+                <a:solidFill>
+                  <a:srgbClr val="2C3C43"/>
+                </a:solidFill>
+              </a:rPr>
+              <a:t> dimension</a:t>
+            </a:r>
+            <a:r>
+              <a:rPr sz="1400" b="0" i="0" dirty="0">
                 <a:solidFill>
                   <a:srgbClr val="2C3C43"/>
                 </a:solidFill>
@@ -8906,7 +9243,7 @@
           <a:noFill/>
         </p:spPr>
         <p:txBody>
-          <a:bodyPr wrap="square" anchor="t" lIns="45720" rIns="45720" tIns="27432" bIns="27432">
+          <a:bodyPr wrap="square" lIns="45720" tIns="27432" rIns="45720" bIns="27432" anchor="t">
             <a:spAutoFit/>
           </a:bodyPr>
           <a:lstStyle/>
@@ -8959,7 +9296,7 @@
           </a:fontRef>
         </p:style>
         <p:txBody>
-          <a:bodyPr rtlCol="0" anchor="ctr" wrap="square" lIns="45720" rIns="45720" tIns="18288" bIns="18288"/>
+          <a:bodyPr wrap="square" lIns="45720" tIns="18288" rIns="45720" bIns="18288" rtlCol="0" anchor="ctr"/>
           <a:lstStyle/>
           <a:p>
             <a:pPr algn="ctr"/>
@@ -9011,10 +9348,11 @@
           </a:fontRef>
         </p:style>
         <p:txBody>
-          <a:bodyPr rtlCol="0" anchor="ctr" wrap="square" lIns="45720" rIns="45720" tIns="18288" bIns="18288"/>
+          <a:bodyPr wrap="square" lIns="45720" tIns="18288" rIns="45720" bIns="18288" rtlCol="0" anchor="ctr"/>
           <a:lstStyle/>
           <a:p>
             <a:pPr algn="ctr"/>
+            <a:endParaRPr/>
           </a:p>
         </p:txBody>
       </p:sp>
@@ -9091,7 +9429,7 @@
           </a:fontRef>
         </p:style>
         <p:txBody>
-          <a:bodyPr rtlCol="0" anchor="ctr" wrap="square" lIns="45720" rIns="45720" tIns="18288" bIns="18288"/>
+          <a:bodyPr wrap="square" lIns="45720" tIns="18288" rIns="45720" bIns="18288" rtlCol="0" anchor="ctr"/>
           <a:lstStyle/>
           <a:p>
             <a:pPr algn="ctr"/>
@@ -9123,7 +9461,7 @@
           <a:noFill/>
         </p:spPr>
         <p:txBody>
-          <a:bodyPr wrap="square" anchor="t" lIns="45720" rIns="45720" tIns="27432" bIns="27432">
+          <a:bodyPr wrap="square" lIns="45720" tIns="27432" rIns="45720" bIns="27432" anchor="t">
             <a:spAutoFit/>
           </a:bodyPr>
           <a:lstStyle/>
@@ -9156,7 +9494,7 @@
           <a:noFill/>
         </p:spPr>
         <p:txBody>
-          <a:bodyPr wrap="square" anchor="t" lIns="45720" rIns="45720" tIns="27432" bIns="27432">
+          <a:bodyPr wrap="square" lIns="45720" tIns="27432" rIns="45720" bIns="27432" anchor="t">
             <a:spAutoFit/>
           </a:bodyPr>
           <a:lstStyle/>
@@ -9209,7 +9547,7 @@
           </a:fontRef>
         </p:style>
         <p:txBody>
-          <a:bodyPr rtlCol="0" anchor="ctr" wrap="square" lIns="45720" rIns="45720" tIns="18288" bIns="18288"/>
+          <a:bodyPr wrap="square" lIns="45720" tIns="18288" rIns="45720" bIns="18288" rtlCol="0" anchor="ctr"/>
           <a:lstStyle/>
           <a:p>
             <a:pPr algn="ctr"/>
@@ -9261,7 +9599,7 @@
           </a:fontRef>
         </p:style>
         <p:txBody>
-          <a:bodyPr rtlCol="0" anchor="ctr" wrap="square" lIns="45720" rIns="45720" tIns="18288" bIns="18288"/>
+          <a:bodyPr wrap="square" lIns="45720" tIns="18288" rIns="45720" bIns="18288" rtlCol="0" anchor="ctr"/>
           <a:lstStyle/>
           <a:p>
             <a:pPr algn="ctr"/>
@@ -9329,7 +9667,7 @@
           <a:noFill/>
         </p:spPr>
         <p:txBody>
-          <a:bodyPr wrap="square" anchor="t" lIns="45720" rIns="45720" tIns="27432" bIns="27432">
+          <a:bodyPr wrap="square" lIns="45720" tIns="27432" rIns="45720" bIns="27432" anchor="t">
             <a:spAutoFit/>
           </a:bodyPr>
           <a:lstStyle/>
@@ -9362,7 +9700,7 @@
           <a:noFill/>
         </p:spPr>
         <p:txBody>
-          <a:bodyPr wrap="square" anchor="t" lIns="45720" rIns="45720" tIns="27432" bIns="27432">
+          <a:bodyPr wrap="square" lIns="45720" tIns="27432" rIns="45720" bIns="27432" anchor="t">
             <a:spAutoFit/>
           </a:bodyPr>
           <a:lstStyle/>
@@ -9395,7 +9733,7 @@
           <a:noFill/>
         </p:spPr>
         <p:txBody>
-          <a:bodyPr wrap="square" anchor="t" lIns="45720" rIns="45720" tIns="27432" bIns="27432">
+          <a:bodyPr wrap="square" lIns="45720" tIns="27432" rIns="45720" bIns="27432" anchor="t">
             <a:spAutoFit/>
           </a:bodyPr>
           <a:lstStyle/>
@@ -9421,7 +9759,7 @@
 </file>
 
 <file path=ppt/slides/slide5.xml><?xml version="1.0" encoding="utf-8"?>
-<p:sld xmlns:a="http://schemas.openxmlformats.org/drawingml/2006/main" xmlns:p="http://schemas.openxmlformats.org/presentationml/2006/main" xmlns:r="http://schemas.openxmlformats.org/officeDocument/2006/relationships">
+<p:sld xmlns:a="http://schemas.openxmlformats.org/drawingml/2006/main" xmlns:r="http://schemas.openxmlformats.org/officeDocument/2006/relationships" xmlns:p="http://schemas.openxmlformats.org/presentationml/2006/main">
   <p:cSld>
     <p:spTree>
       <p:nvGrpSpPr>
@@ -9429,7 +9767,14 @@
         <p:cNvGrpSpPr/>
         <p:nvPr/>
       </p:nvGrpSpPr>
-      <p:grpSpPr/>
+      <p:grpSpPr>
+        <a:xfrm>
+          <a:off x="0" y="0"/>
+          <a:ext cx="0" cy="0"/>
+          <a:chOff x="0" y="0"/>
+          <a:chExt cx="0" cy="0"/>
+        </a:xfrm>
+      </p:grpSpPr>
       <p:sp>
         <p:nvSpPr>
           <p:cNvPr id="2" name="TextBox 1"/>
@@ -9447,7 +9792,7 @@
           <a:noFill/>
         </p:spPr>
         <p:txBody>
-          <a:bodyPr wrap="square" anchor="t" lIns="45720" rIns="45720" tIns="27432" bIns="27432">
+          <a:bodyPr wrap="square" lIns="45720" tIns="27432" rIns="45720" bIns="27432" anchor="t">
             <a:spAutoFit/>
           </a:bodyPr>
           <a:lstStyle/>
@@ -9480,7 +9825,7 @@
           <a:noFill/>
         </p:spPr>
         <p:txBody>
-          <a:bodyPr wrap="square" anchor="t" lIns="45720" rIns="45720" tIns="27432" bIns="27432">
+          <a:bodyPr wrap="square" lIns="45720" tIns="27432" rIns="45720" bIns="27432" anchor="t">
             <a:spAutoFit/>
           </a:bodyPr>
           <a:lstStyle/>
@@ -9513,7 +9858,7 @@
           <a:noFill/>
         </p:spPr>
         <p:txBody>
-          <a:bodyPr wrap="square" anchor="t" lIns="45720" rIns="45720" tIns="27432" bIns="27432">
+          <a:bodyPr wrap="square" lIns="45720" tIns="27432" rIns="45720" bIns="27432" anchor="t">
             <a:spAutoFit/>
           </a:bodyPr>
           <a:lstStyle/>
@@ -9562,7 +9907,7 @@
               <a:buChar char="•"/>
             </a:pPr>
             <a:r>
-              <a:rPr sz="1400" b="1" i="0">
+              <a:rPr sz="1400" b="1" i="0" dirty="0">
                 <a:solidFill>
                   <a:srgbClr val="2C3C43"/>
                 </a:solidFill>
@@ -9570,7 +9915,7 @@
               <a:t>Valid time</a:t>
             </a:r>
             <a:r>
-              <a:rPr sz="1400" b="0" i="0">
+              <a:rPr sz="1400" b="0" i="0" dirty="0">
                 <a:solidFill>
                   <a:srgbClr val="2C3C43"/>
                 </a:solidFill>
@@ -9589,7 +9934,7 @@
               <a:buChar char="•"/>
             </a:pPr>
             <a:r>
-              <a:rPr sz="1400" b="1" i="0">
+              <a:rPr sz="1400" b="1" i="0" dirty="0">
                 <a:solidFill>
                   <a:srgbClr val="2C3C43"/>
                 </a:solidFill>
@@ -9597,7 +9942,7 @@
               <a:t>Transaction time</a:t>
             </a:r>
             <a:r>
-              <a:rPr sz="1400" b="0" i="0">
+              <a:rPr sz="1400" b="0" i="0" dirty="0">
                 <a:solidFill>
                   <a:srgbClr val="2C3C43"/>
                 </a:solidFill>
@@ -9616,7 +9961,7 @@
               <a:buChar char="•"/>
             </a:pPr>
             <a:r>
-              <a:rPr sz="1400" b="1" i="0">
+              <a:rPr sz="1400" b="1" i="0" dirty="0">
                 <a:solidFill>
                   <a:srgbClr val="2C3C43"/>
                 </a:solidFill>
@@ -9624,7 +9969,7 @@
               <a:t>Bitemporal</a:t>
             </a:r>
             <a:r>
-              <a:rPr sz="1400" b="0" i="0">
+              <a:rPr sz="1400" b="0" i="0" dirty="0">
                 <a:solidFill>
                   <a:srgbClr val="2C3C43"/>
                 </a:solidFill>
@@ -9632,7 +9977,7 @@
               <a:t> databases track </a:t>
             </a:r>
             <a:r>
-              <a:rPr sz="1400" b="0" i="1">
+              <a:rPr sz="1400" b="0" i="1" dirty="0">
                 <a:solidFill>
                   <a:srgbClr val="2C3C43"/>
                 </a:solidFill>
@@ -9640,7 +9985,7 @@
               <a:t>both</a:t>
             </a:r>
             <a:r>
-              <a:rPr sz="1400" b="0" i="0">
+              <a:rPr sz="1400" b="0" i="0" dirty="0">
                 <a:solidFill>
                   <a:srgbClr val="2C3C43"/>
                 </a:solidFill>
@@ -9659,7 +10004,7 @@
               <a:buChar char="•"/>
             </a:pPr>
             <a:r>
-              <a:rPr sz="1400" b="0" i="0">
+              <a:rPr sz="1400" b="0" i="0" dirty="0">
                 <a:solidFill>
                   <a:srgbClr val="2C3C43"/>
                 </a:solidFill>
@@ -9667,7 +10012,7 @@
               <a:t>Examples: "the price </a:t>
             </a:r>
             <a:r>
-              <a:rPr sz="1400" b="0" i="1">
+              <a:rPr sz="1400" b="0" i="1" dirty="0">
                 <a:solidFill>
                   <a:srgbClr val="2C3C43"/>
                 </a:solidFill>
@@ -9675,7 +10020,7 @@
               <a:t>was</a:t>
             </a:r>
             <a:r>
-              <a:rPr sz="1400" b="0" i="0">
+              <a:rPr sz="1400" b="0" i="0" dirty="0">
                 <a:solidFill>
                   <a:srgbClr val="2C3C43"/>
                 </a:solidFill>
@@ -9683,7 +10028,7 @@
               <a:t> valid in March" vs "the price </a:t>
             </a:r>
             <a:r>
-              <a:rPr sz="1400" b="0" i="1">
+              <a:rPr sz="1400" b="0" i="1" dirty="0">
                 <a:solidFill>
                   <a:srgbClr val="2C3C43"/>
                 </a:solidFill>
@@ -9691,7 +10036,7 @@
               <a:t>was recorded</a:t>
             </a:r>
             <a:r>
-              <a:rPr sz="1400" b="0" i="0">
+              <a:rPr sz="1400" b="0" i="0" dirty="0">
                 <a:solidFill>
                   <a:srgbClr val="2C3C43"/>
                 </a:solidFill>
@@ -9710,7 +10055,7 @@
               <a:buChar char="•"/>
             </a:pPr>
             <a:r>
-              <a:rPr sz="1400" b="1" i="0">
+              <a:rPr sz="1400" b="1" i="0" dirty="0">
                 <a:solidFill>
                   <a:srgbClr val="2C3C43"/>
                 </a:solidFill>
@@ -9718,7 +10063,7 @@
               <a:t>Timestamp</a:t>
             </a:r>
             <a:r>
-              <a:rPr sz="1400" b="0" i="0">
+              <a:rPr sz="1400" b="0" i="0" dirty="0">
                 <a:solidFill>
                   <a:srgbClr val="2C3C43"/>
                 </a:solidFill>
@@ -9726,7 +10071,7 @@
               <a:t> = a single instant; </a:t>
             </a:r>
             <a:r>
-              <a:rPr sz="1400" b="1" i="0">
+              <a:rPr sz="1400" b="1" i="0" dirty="0">
                 <a:solidFill>
                   <a:srgbClr val="2C3C43"/>
                 </a:solidFill>
@@ -9734,7 +10079,7 @@
               <a:t>interval/period</a:t>
             </a:r>
             <a:r>
-              <a:rPr sz="1400" b="0" i="0">
+              <a:rPr sz="1400" b="0" i="0" dirty="0">
                 <a:solidFill>
                   <a:srgbClr val="2C3C43"/>
                 </a:solidFill>
@@ -9753,7 +10098,7 @@
               <a:buChar char="•"/>
             </a:pPr>
             <a:r>
-              <a:rPr sz="1400" b="0" i="0">
+              <a:rPr sz="1400" b="0" i="0" dirty="0">
                 <a:solidFill>
                   <a:srgbClr val="2C3C43"/>
                 </a:solidFill>
@@ -9761,7 +10106,7 @@
               <a:t>These dimensions give rise to the </a:t>
             </a:r>
             <a:r>
-              <a:rPr sz="1400" b="1" i="0">
+              <a:rPr sz="1400" b="1" i="0" dirty="0">
                 <a:solidFill>
                   <a:srgbClr val="2C3C43"/>
                 </a:solidFill>
@@ -9769,7 +10114,7 @@
               <a:t>bitemporal cube</a:t>
             </a:r>
             <a:r>
-              <a:rPr sz="1400" b="0" i="0">
+              <a:rPr sz="1400" b="0" i="0" dirty="0">
                 <a:solidFill>
                   <a:srgbClr val="2C3C43"/>
                 </a:solidFill>
@@ -9779,334 +10124,87 @@
           </a:p>
         </p:txBody>
       </p:sp>
-      <p:cxnSp>
-        <p:nvCxnSpPr>
-          <p:cNvPr id="6" name="Connector 5"/>
-          <p:cNvCxnSpPr/>
-          <p:nvPr/>
-        </p:nvCxnSpPr>
-        <p:spPr>
-          <a:xfrm flipV="1">
-            <a:off x="5669280" y="1783080"/>
-            <a:ext cx="0" cy="3703320"/>
-          </a:xfrm>
-          <a:prstGeom prst="line">
-            <a:avLst/>
-          </a:prstGeom>
-          <a:ln w="22225">
-            <a:solidFill>
-              <a:srgbClr val="2C3C43"/>
-            </a:solidFill>
-            <a:tailEnd type="triangle"/>
-          </a:ln>
-        </p:spPr>
-        <p:style>
-          <a:lnRef idx="2">
-            <a:schemeClr val="accent1"/>
-          </a:lnRef>
-          <a:fillRef idx="0">
-            <a:schemeClr val="accent1"/>
-          </a:fillRef>
-          <a:effectRef idx="1">
-            <a:schemeClr val="accent1"/>
-          </a:effectRef>
-          <a:fontRef idx="minor">
-            <a:schemeClr val="tx1"/>
-          </a:fontRef>
-        </p:style>
-      </p:cxnSp>
-      <p:cxnSp>
-        <p:nvCxnSpPr>
-          <p:cNvPr id="7" name="Connector 6"/>
-          <p:cNvCxnSpPr/>
-          <p:nvPr/>
-        </p:nvCxnSpPr>
-        <p:spPr>
-          <a:xfrm>
-            <a:off x="5669280" y="5486400"/>
-            <a:ext cx="3200400" cy="0"/>
-          </a:xfrm>
-          <a:prstGeom prst="line">
-            <a:avLst/>
-          </a:prstGeom>
-          <a:ln w="22225">
-            <a:solidFill>
-              <a:srgbClr val="2C3C43"/>
-            </a:solidFill>
-            <a:tailEnd type="triangle"/>
-          </a:ln>
-        </p:spPr>
-        <p:style>
-          <a:lnRef idx="2">
-            <a:schemeClr val="accent1"/>
-          </a:lnRef>
-          <a:fillRef idx="0">
-            <a:schemeClr val="accent1"/>
-          </a:fillRef>
-          <a:effectRef idx="1">
-            <a:schemeClr val="accent1"/>
-          </a:effectRef>
-          <a:fontRef idx="minor">
-            <a:schemeClr val="tx1"/>
-          </a:fontRef>
-        </p:style>
-      </p:cxnSp>
-      <p:sp>
-        <p:nvSpPr>
-          <p:cNvPr id="8" name="TextBox 7"/>
-          <p:cNvSpPr txBox="1"/>
-          <p:nvPr/>
-        </p:nvSpPr>
-        <p:spPr>
-          <a:xfrm>
-            <a:off x="5120640" y="1463040"/>
-            <a:ext cx="3840480" cy="274320"/>
+      <p:pic>
+        <p:nvPicPr>
+          <p:cNvPr id="15" name="Picture 14">
+            <a:extLst>
+              <a:ext uri="{FF2B5EF4-FFF2-40B4-BE49-F238E27FC236}">
+                <a16:creationId xmlns:a16="http://schemas.microsoft.com/office/drawing/2014/main" id="{23414E06-DFDF-24F2-3603-E9A54494EB14}"/>
+              </a:ext>
+            </a:extLst>
+          </p:cNvPr>
+          <p:cNvPicPr>
+            <a:picLocks noChangeAspect="1"/>
+          </p:cNvPicPr>
+          <p:nvPr/>
+        </p:nvPicPr>
+        <p:blipFill>
+          <a:blip r:embed="rId3"/>
+          <a:srcRect t="1" b="37711"/>
+          <a:stretch>
+            <a:fillRect/>
+          </a:stretch>
+        </p:blipFill>
+        <p:spPr>
+          <a:xfrm>
+            <a:off x="5184762" y="3496286"/>
+            <a:ext cx="5330549" cy="2309052"/>
           </a:xfrm>
           <a:prstGeom prst="rect">
             <a:avLst/>
           </a:prstGeom>
-          <a:noFill/>
-        </p:spPr>
-        <p:txBody>
-          <a:bodyPr wrap="square" anchor="t" lIns="45720" rIns="45720" tIns="27432" bIns="27432">
-            <a:spAutoFit/>
-          </a:bodyPr>
-          <a:lstStyle/>
-          <a:p>
-            <a:r>
-              <a:rPr sz="1200" b="1" i="0">
-                <a:solidFill>
-                  <a:srgbClr val="2C3C43"/>
-                </a:solidFill>
-              </a:rPr>
-              <a:t>transaction time (belief)</a:t>
-            </a:r>
-          </a:p>
-        </p:txBody>
-      </p:sp>
-      <p:sp>
-        <p:nvSpPr>
-          <p:cNvPr id="9" name="TextBox 8"/>
-          <p:cNvSpPr txBox="1"/>
-          <p:nvPr/>
-        </p:nvSpPr>
-        <p:spPr>
-          <a:xfrm>
-            <a:off x="5943600" y="5577840"/>
-            <a:ext cx="3017520" cy="274320"/>
-          </a:xfrm>
-          <a:prstGeom prst="rect">
-            <a:avLst/>
-          </a:prstGeom>
-          <a:noFill/>
-        </p:spPr>
-        <p:txBody>
-          <a:bodyPr wrap="square" anchor="t" lIns="45720" rIns="45720" tIns="27432" bIns="27432">
-            <a:spAutoFit/>
-          </a:bodyPr>
-          <a:lstStyle/>
-          <a:p>
-            <a:pPr algn="r"/>
-            <a:r>
-              <a:rPr sz="1200" b="1" i="0">
-                <a:solidFill>
-                  <a:srgbClr val="2C3C43"/>
-                </a:solidFill>
-              </a:rPr>
-              <a:t>valid time (truth)</a:t>
-            </a:r>
-          </a:p>
-        </p:txBody>
-      </p:sp>
-      <p:sp>
-        <p:nvSpPr>
-          <p:cNvPr id="10" name="Rounded Rectangle 9"/>
-          <p:cNvSpPr/>
-          <p:nvPr/>
-        </p:nvSpPr>
-        <p:spPr>
-          <a:xfrm>
-            <a:off x="5852160" y="3931920"/>
-            <a:ext cx="1463040" cy="1371600"/>
-          </a:xfrm>
-          <a:prstGeom prst="roundRect">
-            <a:avLst/>
-          </a:prstGeom>
-          <a:solidFill>
-            <a:srgbClr val="90C226"/>
-          </a:solidFill>
           <a:ln>
             <a:noFill/>
           </a:ln>
-          <a:effectLst/>
-        </p:spPr>
-        <p:style>
-          <a:lnRef idx="1">
-            <a:schemeClr val="accent1"/>
-          </a:lnRef>
-          <a:fillRef idx="3">
-            <a:schemeClr val="accent1"/>
-          </a:fillRef>
-          <a:effectRef idx="2">
-            <a:schemeClr val="accent1"/>
-          </a:effectRef>
-          <a:fontRef idx="minor">
-            <a:schemeClr val="lt1"/>
-          </a:fontRef>
-        </p:style>
-        <p:txBody>
-          <a:bodyPr rtlCol="0" anchor="ctr" wrap="square" lIns="45720" rIns="45720" tIns="18288" bIns="18288"/>
-          <a:lstStyle/>
-          <a:p>
-            <a:pPr algn="ctr"/>
-            <a:r>
-              <a:rPr sz="1300" b="0" i="0">
-                <a:solidFill>
-                  <a:srgbClr val="2C3C43"/>
-                </a:solidFill>
-              </a:rPr>
-              <a:t>50000</a:t>
-            </a:r>
-          </a:p>
-        </p:txBody>
-      </p:sp>
-      <p:sp>
-        <p:nvSpPr>
-          <p:cNvPr id="11" name="Rounded Rectangle 10"/>
-          <p:cNvSpPr/>
-          <p:nvPr/>
-        </p:nvSpPr>
-        <p:spPr>
-          <a:xfrm>
-            <a:off x="7315200" y="2743200"/>
-            <a:ext cx="1463040" cy="2560320"/>
-          </a:xfrm>
-          <a:prstGeom prst="roundRect">
-            <a:avLst/>
-          </a:prstGeom>
-          <a:solidFill>
-            <a:srgbClr val="54A021"/>
-          </a:solidFill>
+          <a:effectLst>
+            <a:outerShdw blurRad="292100" dist="139700" dir="2700000" algn="tl" rotWithShape="0">
+              <a:srgbClr val="333333">
+                <a:alpha val="65000"/>
+              </a:srgbClr>
+            </a:outerShdw>
+          </a:effectLst>
+        </p:spPr>
+      </p:pic>
+      <p:pic>
+        <p:nvPicPr>
+          <p:cNvPr id="17" name="Picture 16">
+            <a:extLst>
+              <a:ext uri="{FF2B5EF4-FFF2-40B4-BE49-F238E27FC236}">
+                <a16:creationId xmlns:a16="http://schemas.microsoft.com/office/drawing/2014/main" id="{68C91D1C-2ED0-E291-6FBB-F939102B59A9}"/>
+              </a:ext>
+            </a:extLst>
+          </p:cNvPr>
+          <p:cNvPicPr>
+            <a:picLocks noChangeAspect="1"/>
+          </p:cNvPicPr>
+          <p:nvPr/>
+        </p:nvPicPr>
+        <p:blipFill>
+          <a:blip r:embed="rId4"/>
+          <a:stretch>
+            <a:fillRect/>
+          </a:stretch>
+        </p:blipFill>
+        <p:spPr>
+          <a:xfrm>
+            <a:off x="5929796" y="365760"/>
+            <a:ext cx="3840480" cy="2880360"/>
+          </a:xfrm>
+          <a:prstGeom prst="rect">
+            <a:avLst/>
+          </a:prstGeom>
           <a:ln>
             <a:noFill/>
           </a:ln>
-          <a:effectLst/>
-        </p:spPr>
-        <p:style>
-          <a:lnRef idx="1">
-            <a:schemeClr val="accent1"/>
-          </a:lnRef>
-          <a:fillRef idx="3">
-            <a:schemeClr val="accent1"/>
-          </a:fillRef>
-          <a:effectRef idx="2">
-            <a:schemeClr val="accent1"/>
-          </a:effectRef>
-          <a:fontRef idx="minor">
-            <a:schemeClr val="lt1"/>
-          </a:fontRef>
-        </p:style>
-        <p:txBody>
-          <a:bodyPr rtlCol="0" anchor="ctr" wrap="square" lIns="45720" rIns="45720" tIns="18288" bIns="18288"/>
-          <a:lstStyle/>
-          <a:p>
-            <a:pPr algn="ctr"/>
-            <a:r>
-              <a:rPr sz="1300" b="1" i="0">
-                <a:solidFill>
-                  <a:srgbClr val="FFFFFF"/>
-                </a:solidFill>
-              </a:rPr>
-              <a:t>70000</a:t>
-            </a:r>
-          </a:p>
-        </p:txBody>
-      </p:sp>
-      <p:sp>
-        <p:nvSpPr>
-          <p:cNvPr id="12" name="Rounded Rectangle 11"/>
-          <p:cNvSpPr/>
-          <p:nvPr/>
-        </p:nvSpPr>
-        <p:spPr>
-          <a:xfrm>
-            <a:off x="5852160" y="2011680"/>
-            <a:ext cx="1463040" cy="1920240"/>
-          </a:xfrm>
-          <a:prstGeom prst="roundRect">
-            <a:avLst/>
-          </a:prstGeom>
-          <a:solidFill>
-            <a:srgbClr val="E6B91E"/>
-          </a:solidFill>
-          <a:ln>
-            <a:noFill/>
-          </a:ln>
-          <a:effectLst/>
-        </p:spPr>
-        <p:style>
-          <a:lnRef idx="1">
-            <a:schemeClr val="accent1"/>
-          </a:lnRef>
-          <a:fillRef idx="3">
-            <a:schemeClr val="accent1"/>
-          </a:fillRef>
-          <a:effectRef idx="2">
-            <a:schemeClr val="accent1"/>
-          </a:effectRef>
-          <a:fontRef idx="minor">
-            <a:schemeClr val="lt1"/>
-          </a:fontRef>
-        </p:style>
-        <p:txBody>
-          <a:bodyPr rtlCol="0" anchor="ctr" wrap="square" lIns="45720" rIns="45720" tIns="18288" bIns="18288"/>
-          <a:lstStyle/>
-          <a:p>
-            <a:pPr algn="ctr"/>
-            <a:r>
-              <a:rPr sz="1200" b="1" i="0">
-                <a:solidFill>
-                  <a:srgbClr val="2C3C43"/>
-                </a:solidFill>
-              </a:rPr>
-              <a:t>55000 (corrected)</a:t>
-            </a:r>
-          </a:p>
-        </p:txBody>
-      </p:sp>
-      <p:sp>
-        <p:nvSpPr>
-          <p:cNvPr id="13" name="TextBox 12"/>
-          <p:cNvSpPr txBox="1"/>
-          <p:nvPr/>
-        </p:nvSpPr>
-        <p:spPr>
-          <a:xfrm>
-            <a:off x="7315200" y="1828800"/>
-            <a:ext cx="1645920" cy="822960"/>
-          </a:xfrm>
-          <a:prstGeom prst="rect">
-            <a:avLst/>
-          </a:prstGeom>
-          <a:noFill/>
-        </p:spPr>
-        <p:txBody>
-          <a:bodyPr wrap="square" anchor="t" lIns="45720" rIns="45720" tIns="27432" bIns="27432">
-            <a:spAutoFit/>
-          </a:bodyPr>
-          <a:lstStyle/>
-          <a:p>
-            <a:r>
-              <a:rPr sz="1100" b="1" i="0">
-                <a:solidFill>
-                  <a:srgbClr val="C42F1A"/>
-                </a:solidFill>
-              </a:rPr>
-              <a:t>recorded later, but valid earlier</a:t>
-            </a:r>
-          </a:p>
-        </p:txBody>
-      </p:sp>
+          <a:effectLst>
+            <a:outerShdw blurRad="292100" dist="139700" dir="2700000" algn="tl" rotWithShape="0">
+              <a:srgbClr val="333333">
+                <a:alpha val="65000"/>
+              </a:srgbClr>
+            </a:outerShdw>
+          </a:effectLst>
+        </p:spPr>
+      </p:pic>
     </p:spTree>
   </p:cSld>
   <p:clrMapOvr>
@@ -10116,7 +10214,7 @@
 </file>
 
 <file path=ppt/slides/slide6.xml><?xml version="1.0" encoding="utf-8"?>
-<p:sld xmlns:a="http://schemas.openxmlformats.org/drawingml/2006/main" xmlns:p="http://schemas.openxmlformats.org/presentationml/2006/main" xmlns:r="http://schemas.openxmlformats.org/officeDocument/2006/relationships">
+<p:sld xmlns:a="http://schemas.openxmlformats.org/drawingml/2006/main" xmlns:r="http://schemas.openxmlformats.org/officeDocument/2006/relationships" xmlns:p="http://schemas.openxmlformats.org/presentationml/2006/main">
   <p:cSld>
     <p:spTree>
       <p:nvGrpSpPr>
@@ -10124,7 +10222,14 @@
         <p:cNvGrpSpPr/>
         <p:nvPr/>
       </p:nvGrpSpPr>
-      <p:grpSpPr/>
+      <p:grpSpPr>
+        <a:xfrm>
+          <a:off x="0" y="0"/>
+          <a:ext cx="0" cy="0"/>
+          <a:chOff x="0" y="0"/>
+          <a:chExt cx="0" cy="0"/>
+        </a:xfrm>
+      </p:grpSpPr>
       <p:sp>
         <p:nvSpPr>
           <p:cNvPr id="2" name="TextBox 1"/>
@@ -10142,7 +10247,7 @@
           <a:noFill/>
         </p:spPr>
         <p:txBody>
-          <a:bodyPr wrap="square" anchor="t" lIns="45720" rIns="45720" tIns="27432" bIns="27432">
+          <a:bodyPr wrap="square" lIns="45720" tIns="27432" rIns="45720" bIns="27432" anchor="t">
             <a:spAutoFit/>
           </a:bodyPr>
           <a:lstStyle/>
@@ -10175,7 +10280,7 @@
           <a:noFill/>
         </p:spPr>
         <p:txBody>
-          <a:bodyPr wrap="square" anchor="t" lIns="45720" rIns="45720" tIns="27432" bIns="27432">
+          <a:bodyPr wrap="square" lIns="45720" tIns="27432" rIns="45720" bIns="27432" anchor="t">
             <a:spAutoFit/>
           </a:bodyPr>
           <a:lstStyle/>
@@ -10208,7 +10313,7 @@
           <a:noFill/>
         </p:spPr>
         <p:txBody>
-          <a:bodyPr wrap="square" anchor="t" lIns="45720" rIns="45720" tIns="27432" bIns="27432">
+          <a:bodyPr wrap="square" lIns="45720" tIns="27432" rIns="45720" bIns="27432" anchor="t">
             <a:spAutoFit/>
           </a:bodyPr>
           <a:lstStyle/>
@@ -10234,7 +10339,7 @@
         <p:spPr>
           <a:xfrm>
             <a:off x="731520" y="1463040"/>
-            <a:ext cx="8229600" cy="2468880"/>
+            <a:ext cx="8229600" cy="1833835"/>
           </a:xfrm>
           <a:prstGeom prst="rect">
             <a:avLst/>
@@ -10257,7 +10362,7 @@
               <a:buChar char="•"/>
             </a:pPr>
             <a:r>
-              <a:rPr sz="1400" b="1" i="0">
+              <a:rPr sz="1400" b="1" i="0" dirty="0">
                 <a:solidFill>
                   <a:srgbClr val="2C3C43"/>
                 </a:solidFill>
@@ -10265,12 +10370,28 @@
               <a:t>Snapshot model</a:t>
             </a:r>
             <a:r>
-              <a:rPr sz="1400" b="0" i="0">
-                <a:solidFill>
-                  <a:srgbClr val="2C3C43"/>
-                </a:solidFill>
-              </a:rPr>
-              <a:t> — no time; classic DBMS.</a:t>
+              <a:rPr sz="1400" b="0" i="0" dirty="0">
+                <a:solidFill>
+                  <a:srgbClr val="2C3C43"/>
+                </a:solidFill>
+              </a:rPr>
+              <a:t> </a:t>
+            </a:r>
+            <a:r>
+              <a:rPr lang="en-IN" sz="1400" b="0" i="0" dirty="0">
+                <a:solidFill>
+                  <a:srgbClr val="2C3C43"/>
+                </a:solidFill>
+              </a:rPr>
+              <a:t>:</a:t>
+            </a:r>
+            <a:r>
+              <a:rPr sz="1400" b="0" i="0" dirty="0">
+                <a:solidFill>
+                  <a:srgbClr val="2C3C43"/>
+                </a:solidFill>
+              </a:rPr>
+              <a:t> no time; classic DBMS.</a:t>
             </a:r>
           </a:p>
           <a:p>
@@ -10284,7 +10405,7 @@
               <a:buChar char="•"/>
             </a:pPr>
             <a:r>
-              <a:rPr sz="1400" b="1" i="0">
+              <a:rPr sz="1400" b="1" i="0" dirty="0">
                 <a:solidFill>
                   <a:srgbClr val="2C3C43"/>
                 </a:solidFill>
@@ -10292,12 +10413,28 @@
               <a:t>Rollback / transaction-time model</a:t>
             </a:r>
             <a:r>
-              <a:rPr sz="1400" b="0" i="0">
-                <a:solidFill>
-                  <a:srgbClr val="2C3C43"/>
-                </a:solidFill>
-              </a:rPr>
-              <a:t> — versions by when they were stored.</a:t>
+              <a:rPr sz="1400" b="0" i="0" dirty="0">
+                <a:solidFill>
+                  <a:srgbClr val="2C3C43"/>
+                </a:solidFill>
+              </a:rPr>
+              <a:t> </a:t>
+            </a:r>
+            <a:r>
+              <a:rPr lang="en-IN" sz="1400" b="0" i="0" dirty="0">
+                <a:solidFill>
+                  <a:srgbClr val="2C3C43"/>
+                </a:solidFill>
+              </a:rPr>
+              <a:t>:</a:t>
+            </a:r>
+            <a:r>
+              <a:rPr sz="1400" b="0" i="0" dirty="0">
+                <a:solidFill>
+                  <a:srgbClr val="2C3C43"/>
+                </a:solidFill>
+              </a:rPr>
+              <a:t> versions by when they were stored.</a:t>
             </a:r>
           </a:p>
           <a:p>
@@ -10311,7 +10448,7 @@
               <a:buChar char="•"/>
             </a:pPr>
             <a:r>
-              <a:rPr sz="1400" b="1" i="0">
+              <a:rPr sz="1400" b="1" i="0" dirty="0">
                 <a:solidFill>
                   <a:srgbClr val="2C3C43"/>
                 </a:solidFill>
@@ -10319,12 +10456,28 @@
               <a:t>Valid-time (historical) model</a:t>
             </a:r>
             <a:r>
-              <a:rPr sz="1400" b="0" i="0">
-                <a:solidFill>
-                  <a:srgbClr val="2C3C43"/>
-                </a:solidFill>
-              </a:rPr>
-              <a:t> — versions by real-world validity.</a:t>
+              <a:rPr sz="1400" b="0" i="0" dirty="0">
+                <a:solidFill>
+                  <a:srgbClr val="2C3C43"/>
+                </a:solidFill>
+              </a:rPr>
+              <a:t> </a:t>
+            </a:r>
+            <a:r>
+              <a:rPr lang="en-IN" sz="1400" b="0" i="0" dirty="0">
+                <a:solidFill>
+                  <a:srgbClr val="2C3C43"/>
+                </a:solidFill>
+              </a:rPr>
+              <a:t>:</a:t>
+            </a:r>
+            <a:r>
+              <a:rPr sz="1400" b="0" i="0" dirty="0">
+                <a:solidFill>
+                  <a:srgbClr val="2C3C43"/>
+                </a:solidFill>
+              </a:rPr>
+              <a:t> versions by real-world validity.</a:t>
             </a:r>
           </a:p>
           <a:p>
@@ -10338,7 +10491,7 @@
               <a:buChar char="•"/>
             </a:pPr>
             <a:r>
-              <a:rPr sz="1400" b="1" i="0">
+              <a:rPr sz="1400" b="1" i="0" dirty="0">
                 <a:solidFill>
                   <a:srgbClr val="2C3C43"/>
                 </a:solidFill>
@@ -10346,12 +10499,28 @@
               <a:t>Bitemporal model</a:t>
             </a:r>
             <a:r>
-              <a:rPr sz="1400" b="0" i="0">
-                <a:solidFill>
-                  <a:srgbClr val="2C3C43"/>
-                </a:solidFill>
-              </a:rPr>
-              <a:t> — both valid and transaction time.</a:t>
+              <a:rPr sz="1400" b="0" i="0" dirty="0">
+                <a:solidFill>
+                  <a:srgbClr val="2C3C43"/>
+                </a:solidFill>
+              </a:rPr>
+              <a:t> </a:t>
+            </a:r>
+            <a:r>
+              <a:rPr lang="en-IN" sz="1400" b="0" i="0" dirty="0">
+                <a:solidFill>
+                  <a:srgbClr val="2C3C43"/>
+                </a:solidFill>
+              </a:rPr>
+              <a:t>:</a:t>
+            </a:r>
+            <a:r>
+              <a:rPr sz="1400" b="0" i="0" dirty="0">
+                <a:solidFill>
+                  <a:srgbClr val="2C3C43"/>
+                </a:solidFill>
+              </a:rPr>
+              <a:t> both valid and transaction time.</a:t>
             </a:r>
           </a:p>
           <a:p>
@@ -10365,7 +10534,7 @@
               <a:buChar char="•"/>
             </a:pPr>
             <a:r>
-              <a:rPr sz="1400" b="1" i="0">
+              <a:rPr sz="1400" b="1" i="0" dirty="0">
                 <a:solidFill>
                   <a:srgbClr val="2C3C43"/>
                 </a:solidFill>
@@ -10373,15 +10542,15 @@
               <a:t>SQL:2011</a:t>
             </a:r>
             <a:r>
-              <a:rPr sz="1400" b="0" i="0">
-                <a:solidFill>
-                  <a:srgbClr val="2C3C43"/>
-                </a:solidFill>
-              </a:rPr>
-              <a:t> standardised these as </a:t>
-            </a:r>
-            <a:r>
-              <a:rPr sz="1400" b="1" i="0">
+              <a:rPr sz="1400" b="0" i="0" dirty="0">
+                <a:solidFill>
+                  <a:srgbClr val="2C3C43"/>
+                </a:solidFill>
+              </a:rPr>
+              <a:t> standardized these as </a:t>
+            </a:r>
+            <a:r>
+              <a:rPr sz="1400" b="1" i="0" dirty="0">
                 <a:solidFill>
                   <a:srgbClr val="2C3C43"/>
                 </a:solidFill>
@@ -10389,7 +10558,7 @@
               <a:t>system-versioned</a:t>
             </a:r>
             <a:r>
-              <a:rPr sz="1400" b="0" i="0">
+              <a:rPr sz="1400" b="0" i="0" dirty="0">
                 <a:solidFill>
                   <a:srgbClr val="2C3C43"/>
                 </a:solidFill>
@@ -10397,7 +10566,7 @@
               <a:t> and </a:t>
             </a:r>
             <a:r>
-              <a:rPr sz="1400" b="1" i="0">
+              <a:rPr sz="1400" b="1" i="0" dirty="0">
                 <a:solidFill>
                   <a:srgbClr val="2C3C43"/>
                 </a:solidFill>
@@ -10405,7 +10574,7 @@
               <a:t>application-time period</a:t>
             </a:r>
             <a:r>
-              <a:rPr sz="1400" b="0" i="0">
+              <a:rPr sz="1400" b="0" i="0" dirty="0">
                 <a:solidFill>
                   <a:srgbClr val="2C3C43"/>
                 </a:solidFill>
@@ -10424,7 +10593,7 @@
               <a:buChar char="•"/>
             </a:pPr>
             <a:r>
-              <a:rPr sz="1400" b="0" i="0">
+              <a:rPr sz="1400" b="0" i="0" dirty="0">
                 <a:solidFill>
                   <a:srgbClr val="2C3C43"/>
                 </a:solidFill>
@@ -10453,10 +10622,34 @@
                 <a:tableStyleId>{5C22544A-7EE6-4342-B048-85BDC9FD1C3A}</a:tableStyleId>
               </a:tblPr>
               <a:tblGrid>
-                <a:gridCol w="2011680"/>
-                <a:gridCol w="1463040"/>
-                <a:gridCol w="1554480"/>
-                <a:gridCol w="3200400"/>
+                <a:gridCol w="2011680">
+                  <a:extLst>
+                    <a:ext uri="{9D8B030D-6E8A-4147-A177-3AD203B41FA5}">
+                      <a16:colId xmlns:a16="http://schemas.microsoft.com/office/drawing/2014/main" val="20000"/>
+                    </a:ext>
+                  </a:extLst>
+                </a:gridCol>
+                <a:gridCol w="1463040">
+                  <a:extLst>
+                    <a:ext uri="{9D8B030D-6E8A-4147-A177-3AD203B41FA5}">
+                      <a16:colId xmlns:a16="http://schemas.microsoft.com/office/drawing/2014/main" val="20001"/>
+                    </a:ext>
+                  </a:extLst>
+                </a:gridCol>
+                <a:gridCol w="1554480">
+                  <a:extLst>
+                    <a:ext uri="{9D8B030D-6E8A-4147-A177-3AD203B41FA5}">
+                      <a16:colId xmlns:a16="http://schemas.microsoft.com/office/drawing/2014/main" val="20002"/>
+                    </a:ext>
+                  </a:extLst>
+                </a:gridCol>
+                <a:gridCol w="3200400">
+                  <a:extLst>
+                    <a:ext uri="{9D8B030D-6E8A-4147-A177-3AD203B41FA5}">
+                      <a16:colId xmlns:a16="http://schemas.microsoft.com/office/drawing/2014/main" val="20003"/>
+                    </a:ext>
+                  </a:extLst>
+                </a:gridCol>
               </a:tblGrid>
               <a:tr h="411480">
                 <a:tc>
@@ -10543,6 +10736,11 @@
                     </a:solidFill>
                   </a:tcPr>
                 </a:tc>
+                <a:extLst>
+                  <a:ext uri="{0D108BD9-81ED-4DB2-BD59-A6C34878D82A}">
+                    <a16:rowId xmlns:a16="http://schemas.microsoft.com/office/drawing/2014/main" val="10000"/>
+                  </a:ext>
+                </a:extLst>
               </a:tr>
               <a:tr h="411480">
                 <a:tc>
@@ -10568,7 +10766,7 @@
                     <a:lstStyle/>
                     <a:p>
                       <a:r>
-                        <a:rPr sz="1300" b="0" i="0">
+                        <a:rPr sz="1300" b="0" i="0" dirty="0">
                           <a:solidFill>
                             <a:srgbClr val="2C3C43"/>
                           </a:solidFill>
@@ -10585,7 +10783,7 @@
                     <a:lstStyle/>
                     <a:p>
                       <a:r>
-                        <a:rPr sz="1300" b="0" i="0">
+                        <a:rPr sz="1300" b="0" i="0" dirty="0">
                           <a:solidFill>
                             <a:srgbClr val="2C3C43"/>
                           </a:solidFill>
@@ -10613,6 +10811,11 @@
                   </a:txBody>
                   <a:tcPr anchor="ctr"/>
                 </a:tc>
+                <a:extLst>
+                  <a:ext uri="{0D108BD9-81ED-4DB2-BD59-A6C34878D82A}">
+                    <a16:rowId xmlns:a16="http://schemas.microsoft.com/office/drawing/2014/main" val="10001"/>
+                  </a:ext>
+                </a:extLst>
               </a:tr>
               <a:tr h="411480">
                 <a:tc>
@@ -10655,7 +10858,7 @@
                     <a:lstStyle/>
                     <a:p>
                       <a:r>
-                        <a:rPr sz="1300" b="0" i="0">
+                        <a:rPr sz="1300" b="0" i="0" dirty="0">
                           <a:solidFill>
                             <a:srgbClr val="2C3C43"/>
                           </a:solidFill>
@@ -10672,7 +10875,7 @@
                     <a:lstStyle/>
                     <a:p>
                       <a:r>
-                        <a:rPr sz="1300" b="0" i="0">
+                        <a:rPr sz="1300" b="0" i="0" dirty="0">
                           <a:solidFill>
                             <a:srgbClr val="2C3C43"/>
                           </a:solidFill>
@@ -10683,6 +10886,11 @@
                   </a:txBody>
                   <a:tcPr anchor="ctr"/>
                 </a:tc>
+                <a:extLst>
+                  <a:ext uri="{0D108BD9-81ED-4DB2-BD59-A6C34878D82A}">
+                    <a16:rowId xmlns:a16="http://schemas.microsoft.com/office/drawing/2014/main" val="10002"/>
+                  </a:ext>
+                </a:extLst>
               </a:tr>
               <a:tr h="411480">
                 <a:tc>
@@ -10725,7 +10933,7 @@
                     <a:lstStyle/>
                     <a:p>
                       <a:r>
-                        <a:rPr sz="1300" b="0" i="0">
+                        <a:rPr sz="1300" b="0" i="0" dirty="0">
                           <a:solidFill>
                             <a:srgbClr val="2C3C43"/>
                           </a:solidFill>
@@ -10753,6 +10961,11 @@
                   </a:txBody>
                   <a:tcPr anchor="ctr"/>
                 </a:tc>
+                <a:extLst>
+                  <a:ext uri="{0D108BD9-81ED-4DB2-BD59-A6C34878D82A}">
+                    <a16:rowId xmlns:a16="http://schemas.microsoft.com/office/drawing/2014/main" val="10003"/>
+                  </a:ext>
+                </a:extLst>
               </a:tr>
               <a:tr h="411480">
                 <a:tc>
@@ -10812,7 +11025,7 @@
                     <a:lstStyle/>
                     <a:p>
                       <a:r>
-                        <a:rPr sz="1300" b="0" i="0">
+                        <a:rPr sz="1300" b="0" i="0" dirty="0">
                           <a:solidFill>
                             <a:srgbClr val="2C3C43"/>
                           </a:solidFill>
@@ -10823,6 +11036,11 @@
                   </a:txBody>
                   <a:tcPr anchor="ctr"/>
                 </a:tc>
+                <a:extLst>
+                  <a:ext uri="{0D108BD9-81ED-4DB2-BD59-A6C34878D82A}">
+                    <a16:rowId xmlns:a16="http://schemas.microsoft.com/office/drawing/2014/main" val="10004"/>
+                  </a:ext>
+                </a:extLst>
               </a:tr>
             </a:tbl>
           </a:graphicData>
@@ -10837,7 +11055,7 @@
 </file>
 
 <file path=ppt/slides/slide7.xml><?xml version="1.0" encoding="utf-8"?>
-<p:sld xmlns:a="http://schemas.openxmlformats.org/drawingml/2006/main" xmlns:p="http://schemas.openxmlformats.org/presentationml/2006/main" xmlns:r="http://schemas.openxmlformats.org/officeDocument/2006/relationships">
+<p:sld xmlns:a="http://schemas.openxmlformats.org/drawingml/2006/main" xmlns:r="http://schemas.openxmlformats.org/officeDocument/2006/relationships" xmlns:p="http://schemas.openxmlformats.org/presentationml/2006/main">
   <p:cSld>
     <p:spTree>
       <p:nvGrpSpPr>
@@ -10845,7 +11063,14 @@
         <p:cNvGrpSpPr/>
         <p:nvPr/>
       </p:nvGrpSpPr>
-      <p:grpSpPr/>
+      <p:grpSpPr>
+        <a:xfrm>
+          <a:off x="0" y="0"/>
+          <a:ext cx="0" cy="0"/>
+          <a:chOff x="0" y="0"/>
+          <a:chExt cx="0" cy="0"/>
+        </a:xfrm>
+      </p:grpSpPr>
       <p:sp>
         <p:nvSpPr>
           <p:cNvPr id="2" name="TextBox 1"/>
@@ -10863,7 +11088,7 @@
           <a:noFill/>
         </p:spPr>
         <p:txBody>
-          <a:bodyPr wrap="square" anchor="t" lIns="45720" rIns="45720" tIns="27432" bIns="27432">
+          <a:bodyPr wrap="square" lIns="45720" tIns="27432" rIns="45720" bIns="27432" anchor="t">
             <a:spAutoFit/>
           </a:bodyPr>
           <a:lstStyle/>
@@ -10896,7 +11121,7 @@
           <a:noFill/>
         </p:spPr>
         <p:txBody>
-          <a:bodyPr wrap="square" anchor="t" lIns="45720" rIns="45720" tIns="27432" bIns="27432">
+          <a:bodyPr wrap="square" lIns="45720" tIns="27432" rIns="45720" bIns="27432" anchor="t">
             <a:spAutoFit/>
           </a:bodyPr>
           <a:lstStyle/>
@@ -10929,7 +11154,7 @@
           <a:noFill/>
         </p:spPr>
         <p:txBody>
-          <a:bodyPr wrap="square" anchor="t" lIns="45720" rIns="45720" tIns="27432" bIns="27432">
+          <a:bodyPr wrap="square" lIns="45720" tIns="27432" rIns="45720" bIns="27432" anchor="t">
             <a:spAutoFit/>
           </a:bodyPr>
           <a:lstStyle/>
@@ -10983,10 +11208,11 @@
           </a:fontRef>
         </p:style>
         <p:txBody>
-          <a:bodyPr rtlCol="0" anchor="ctr" wrap="square" lIns="45720" rIns="45720" tIns="18288" bIns="18288"/>
+          <a:bodyPr wrap="square" lIns="45720" tIns="18288" rIns="45720" bIns="18288" rtlCol="0" anchor="ctr"/>
           <a:lstStyle/>
           <a:p>
             <a:pPr algn="ctr"/>
+            <a:endParaRPr/>
           </a:p>
         </p:txBody>
       </p:sp>
@@ -11027,7 +11253,7 @@
           </a:fontRef>
         </p:style>
         <p:txBody>
-          <a:bodyPr rtlCol="0" anchor="ctr" wrap="square" lIns="45720" rIns="45720" tIns="18288" bIns="18288"/>
+          <a:bodyPr wrap="square" lIns="45720" tIns="18288" rIns="45720" bIns="18288" rtlCol="0" anchor="ctr"/>
           <a:lstStyle/>
           <a:p>
             <a:pPr algn="ctr"/>
@@ -11059,7 +11285,7 @@
           <a:noFill/>
         </p:spPr>
         <p:txBody>
-          <a:bodyPr wrap="square" anchor="ctr" lIns="45720" rIns="45720" tIns="27432" bIns="27432">
+          <a:bodyPr wrap="square" lIns="45720" tIns="27432" rIns="45720" bIns="27432" anchor="ctr">
             <a:spAutoFit/>
           </a:bodyPr>
           <a:lstStyle/>
@@ -11122,10 +11348,11 @@
           </a:fontRef>
         </p:style>
         <p:txBody>
-          <a:bodyPr rtlCol="0" anchor="ctr" wrap="square" lIns="45720" rIns="45720" tIns="18288" bIns="18288"/>
+          <a:bodyPr wrap="square" lIns="45720" tIns="18288" rIns="45720" bIns="18288" rtlCol="0" anchor="ctr"/>
           <a:lstStyle/>
           <a:p>
             <a:pPr algn="ctr"/>
+            <a:endParaRPr/>
           </a:p>
         </p:txBody>
       </p:sp>
@@ -11166,7 +11393,7 @@
           </a:fontRef>
         </p:style>
         <p:txBody>
-          <a:bodyPr rtlCol="0" anchor="ctr" wrap="square" lIns="45720" rIns="45720" tIns="18288" bIns="18288"/>
+          <a:bodyPr wrap="square" lIns="45720" tIns="18288" rIns="45720" bIns="18288" rtlCol="0" anchor="ctr"/>
           <a:lstStyle/>
           <a:p>
             <a:pPr algn="ctr"/>
@@ -11198,7 +11425,7 @@
           <a:noFill/>
         </p:spPr>
         <p:txBody>
-          <a:bodyPr wrap="square" anchor="ctr" lIns="45720" rIns="45720" tIns="27432" bIns="27432">
+          <a:bodyPr wrap="square" lIns="45720" tIns="27432" rIns="45720" bIns="27432" anchor="ctr">
             <a:spAutoFit/>
           </a:bodyPr>
           <a:lstStyle/>
@@ -11261,10 +11488,11 @@
           </a:fontRef>
         </p:style>
         <p:txBody>
-          <a:bodyPr rtlCol="0" anchor="ctr" wrap="square" lIns="45720" rIns="45720" tIns="18288" bIns="18288"/>
+          <a:bodyPr wrap="square" lIns="45720" tIns="18288" rIns="45720" bIns="18288" rtlCol="0" anchor="ctr"/>
           <a:lstStyle/>
           <a:p>
             <a:pPr algn="ctr"/>
+            <a:endParaRPr/>
           </a:p>
         </p:txBody>
       </p:sp>
@@ -11305,7 +11533,7 @@
           </a:fontRef>
         </p:style>
         <p:txBody>
-          <a:bodyPr rtlCol="0" anchor="ctr" wrap="square" lIns="45720" rIns="45720" tIns="18288" bIns="18288"/>
+          <a:bodyPr wrap="square" lIns="45720" tIns="18288" rIns="45720" bIns="18288" rtlCol="0" anchor="ctr"/>
           <a:lstStyle/>
           <a:p>
             <a:pPr algn="ctr"/>
@@ -11337,7 +11565,7 @@
           <a:noFill/>
         </p:spPr>
         <p:txBody>
-          <a:bodyPr wrap="square" anchor="ctr" lIns="45720" rIns="45720" tIns="27432" bIns="27432">
+          <a:bodyPr wrap="square" lIns="45720" tIns="27432" rIns="45720" bIns="27432" anchor="ctr">
             <a:spAutoFit/>
           </a:bodyPr>
           <a:lstStyle/>
@@ -11400,10 +11628,11 @@
           </a:fontRef>
         </p:style>
         <p:txBody>
-          <a:bodyPr rtlCol="0" anchor="ctr" wrap="square" lIns="45720" rIns="45720" tIns="18288" bIns="18288"/>
+          <a:bodyPr wrap="square" lIns="45720" tIns="18288" rIns="45720" bIns="18288" rtlCol="0" anchor="ctr"/>
           <a:lstStyle/>
           <a:p>
             <a:pPr algn="ctr"/>
+            <a:endParaRPr/>
           </a:p>
         </p:txBody>
       </p:sp>
@@ -11444,7 +11673,7 @@
           </a:fontRef>
         </p:style>
         <p:txBody>
-          <a:bodyPr rtlCol="0" anchor="ctr" wrap="square" lIns="45720" rIns="45720" tIns="18288" bIns="18288"/>
+          <a:bodyPr wrap="square" lIns="45720" tIns="18288" rIns="45720" bIns="18288" rtlCol="0" anchor="ctr"/>
           <a:lstStyle/>
           <a:p>
             <a:pPr algn="ctr"/>
@@ -11476,7 +11705,7 @@
           <a:noFill/>
         </p:spPr>
         <p:txBody>
-          <a:bodyPr wrap="square" anchor="ctr" lIns="45720" rIns="45720" tIns="27432" bIns="27432">
+          <a:bodyPr wrap="square" lIns="45720" tIns="27432" rIns="45720" bIns="27432" anchor="ctr">
             <a:spAutoFit/>
           </a:bodyPr>
           <a:lstStyle/>
@@ -11539,10 +11768,11 @@
           </a:fontRef>
         </p:style>
         <p:txBody>
-          <a:bodyPr rtlCol="0" anchor="ctr" wrap="square" lIns="45720" rIns="45720" tIns="18288" bIns="18288"/>
+          <a:bodyPr wrap="square" lIns="45720" tIns="18288" rIns="45720" bIns="18288" rtlCol="0" anchor="ctr"/>
           <a:lstStyle/>
           <a:p>
             <a:pPr algn="ctr"/>
+            <a:endParaRPr/>
           </a:p>
         </p:txBody>
       </p:sp>
@@ -11583,7 +11813,7 @@
           </a:fontRef>
         </p:style>
         <p:txBody>
-          <a:bodyPr rtlCol="0" anchor="ctr" wrap="square" lIns="45720" rIns="45720" tIns="18288" bIns="18288"/>
+          <a:bodyPr wrap="square" lIns="45720" tIns="18288" rIns="45720" bIns="18288" rtlCol="0" anchor="ctr"/>
           <a:lstStyle/>
           <a:p>
             <a:pPr algn="ctr"/>
@@ -11615,7 +11845,7 @@
           <a:noFill/>
         </p:spPr>
         <p:txBody>
-          <a:bodyPr wrap="square" anchor="ctr" lIns="45720" rIns="45720" tIns="27432" bIns="27432">
+          <a:bodyPr wrap="square" lIns="45720" tIns="27432" rIns="45720" bIns="27432" anchor="ctr">
             <a:spAutoFit/>
           </a:bodyPr>
           <a:lstStyle/>
@@ -11678,10 +11908,11 @@
           </a:fontRef>
         </p:style>
         <p:txBody>
-          <a:bodyPr rtlCol="0" anchor="ctr" wrap="square" lIns="45720" rIns="45720" tIns="18288" bIns="18288"/>
+          <a:bodyPr wrap="square" lIns="45720" tIns="18288" rIns="45720" bIns="18288" rtlCol="0" anchor="ctr"/>
           <a:lstStyle/>
           <a:p>
             <a:pPr algn="ctr"/>
+            <a:endParaRPr/>
           </a:p>
         </p:txBody>
       </p:sp>
@@ -11722,7 +11953,7 @@
           </a:fontRef>
         </p:style>
         <p:txBody>
-          <a:bodyPr rtlCol="0" anchor="ctr" wrap="square" lIns="45720" rIns="45720" tIns="18288" bIns="18288"/>
+          <a:bodyPr wrap="square" lIns="45720" tIns="18288" rIns="45720" bIns="18288" rtlCol="0" anchor="ctr"/>
           <a:lstStyle/>
           <a:p>
             <a:pPr algn="ctr"/>
@@ -11754,7 +11985,7 @@
           <a:noFill/>
         </p:spPr>
         <p:txBody>
-          <a:bodyPr wrap="square" anchor="ctr" lIns="45720" rIns="45720" tIns="27432" bIns="27432">
+          <a:bodyPr wrap="square" lIns="45720" tIns="27432" rIns="45720" bIns="27432" anchor="ctr">
             <a:spAutoFit/>
           </a:bodyPr>
           <a:lstStyle/>
@@ -11789,7 +12020,7 @@
 </file>
 
 <file path=ppt/slides/slide8.xml><?xml version="1.0" encoding="utf-8"?>
-<p:sld xmlns:a="http://schemas.openxmlformats.org/drawingml/2006/main" xmlns:p="http://schemas.openxmlformats.org/presentationml/2006/main" xmlns:r="http://schemas.openxmlformats.org/officeDocument/2006/relationships">
+<p:sld xmlns:a="http://schemas.openxmlformats.org/drawingml/2006/main" xmlns:r="http://schemas.openxmlformats.org/officeDocument/2006/relationships" xmlns:p="http://schemas.openxmlformats.org/presentationml/2006/main">
   <p:cSld>
     <p:spTree>
       <p:nvGrpSpPr>
@@ -11797,7 +12028,14 @@
         <p:cNvGrpSpPr/>
         <p:nvPr/>
       </p:nvGrpSpPr>
-      <p:grpSpPr/>
+      <p:grpSpPr>
+        <a:xfrm>
+          <a:off x="0" y="0"/>
+          <a:ext cx="0" cy="0"/>
+          <a:chOff x="0" y="0"/>
+          <a:chExt cx="0" cy="0"/>
+        </a:xfrm>
+      </p:grpSpPr>
       <p:sp>
         <p:nvSpPr>
           <p:cNvPr id="2" name="TextBox 1"/>
@@ -11815,7 +12053,7 @@
           <a:noFill/>
         </p:spPr>
         <p:txBody>
-          <a:bodyPr wrap="square" anchor="t" lIns="45720" rIns="45720" tIns="27432" bIns="27432">
+          <a:bodyPr wrap="square" lIns="45720" tIns="27432" rIns="45720" bIns="27432" anchor="t">
             <a:spAutoFit/>
           </a:bodyPr>
           <a:lstStyle/>
@@ -11848,7 +12086,7 @@
           <a:noFill/>
         </p:spPr>
         <p:txBody>
-          <a:bodyPr wrap="square" anchor="t" lIns="45720" rIns="45720" tIns="27432" bIns="27432">
+          <a:bodyPr wrap="square" lIns="45720" tIns="27432" rIns="45720" bIns="27432" anchor="t">
             <a:spAutoFit/>
           </a:bodyPr>
           <a:lstStyle/>
@@ -11881,7 +12119,7 @@
           <a:noFill/>
         </p:spPr>
         <p:txBody>
-          <a:bodyPr wrap="square" anchor="t" lIns="45720" rIns="45720" tIns="27432" bIns="27432">
+          <a:bodyPr wrap="square" lIns="45720" tIns="27432" rIns="45720" bIns="27432" anchor="t">
             <a:spAutoFit/>
           </a:bodyPr>
           <a:lstStyle/>
@@ -12127,8 +12365,8 @@
         </p:nvSpPr>
         <p:spPr>
           <a:xfrm>
-            <a:off x="4389120" y="1554480"/>
-            <a:ext cx="4572000" cy="3200400"/>
+            <a:off x="4605642" y="1965097"/>
+            <a:ext cx="5005047" cy="2310154"/>
           </a:xfrm>
           <a:prstGeom prst="roundRect">
             <a:avLst/>
@@ -12156,10 +12394,11 @@
           </a:fontRef>
         </p:style>
         <p:txBody>
-          <a:bodyPr rtlCol="0" anchor="ctr" wrap="square" lIns="45720" rIns="45720" tIns="18288" bIns="18288"/>
+          <a:bodyPr wrap="square" lIns="45720" tIns="18288" rIns="45720" bIns="18288" rtlCol="0" anchor="ctr"/>
           <a:lstStyle/>
           <a:p>
             <a:pPr algn="ctr"/>
+            <a:endParaRPr/>
           </a:p>
         </p:txBody>
       </p:sp>
@@ -12171,7 +12410,7 @@
         </p:nvSpPr>
         <p:spPr>
           <a:xfrm>
-            <a:off x="8229600" y="1664207"/>
+            <a:off x="8629003" y="2058176"/>
             <a:ext cx="548640" cy="237744"/>
           </a:xfrm>
           <a:prstGeom prst="roundRect">
@@ -12200,12 +12439,12 @@
           </a:fontRef>
         </p:style>
         <p:txBody>
-          <a:bodyPr rtlCol="0" anchor="ctr" wrap="square" lIns="45720" rIns="45720" tIns="18288" bIns="18288"/>
+          <a:bodyPr wrap="square" lIns="45720" tIns="18288" rIns="45720" bIns="18288" rtlCol="0" anchor="ctr"/>
           <a:lstStyle/>
           <a:p>
             <a:pPr algn="ctr"/>
             <a:r>
-              <a:rPr sz="1000" b="1" i="0">
+              <a:rPr sz="1000" b="1" i="0" dirty="0">
                 <a:solidFill>
                   <a:srgbClr val="FFFFFF"/>
                 </a:solidFill>
@@ -12223,8 +12462,8 @@
         </p:nvSpPr>
         <p:spPr>
           <a:xfrm>
-            <a:off x="4526280" y="1965960"/>
-            <a:ext cx="4297680" cy="2697480"/>
+            <a:off x="4742802" y="2376577"/>
+            <a:ext cx="5169811" cy="1785104"/>
           </a:xfrm>
           <a:prstGeom prst="rect">
             <a:avLst/>
@@ -12238,7 +12477,7 @@
           <a:lstStyle/>
           <a:p>
             <a:r>
-              <a:rPr sz="1100" b="1" i="0">
+              <a:rPr sz="1100" b="1" i="0" dirty="0">
                 <a:solidFill>
                   <a:srgbClr val="90C226"/>
                 </a:solidFill>
@@ -12247,7 +12486,7 @@
               <a:t>CREATE TABLE</a:t>
             </a:r>
             <a:r>
-              <a:rPr sz="1100" b="0" i="0">
+              <a:rPr sz="1100" b="0" i="0" dirty="0">
                 <a:solidFill>
                   <a:srgbClr val="E8EEF0"/>
                 </a:solidFill>
@@ -12258,16 +12497,34 @@
           </a:p>
           <a:p>
             <a:r>
-              <a:rPr sz="1100" b="0" i="0">
+              <a:rPr sz="1100" b="0" i="0" dirty="0">
                 <a:solidFill>
                   <a:srgbClr val="E8EEF0"/>
                 </a:solidFill>
                 <a:latin typeface="Courier New"/>
               </a:rPr>
-              <a:t>  emp_id     </a:t>
-            </a:r>
-            <a:r>
-              <a:rPr sz="1100" b="1" i="0">
+              <a:t>  </a:t>
+            </a:r>
+            <a:r>
+              <a:rPr sz="1100" b="0" i="0" dirty="0" err="1">
+                <a:solidFill>
+                  <a:srgbClr val="E8EEF0"/>
+                </a:solidFill>
+                <a:latin typeface="Courier New"/>
+              </a:rPr>
+              <a:t>emp_id</a:t>
+            </a:r>
+            <a:r>
+              <a:rPr sz="1100" b="0" i="0" dirty="0">
+                <a:solidFill>
+                  <a:srgbClr val="E8EEF0"/>
+                </a:solidFill>
+                <a:latin typeface="Courier New"/>
+              </a:rPr>
+              <a:t>     </a:t>
+            </a:r>
+            <a:r>
+              <a:rPr sz="1100" b="1" i="0" dirty="0">
                 <a:solidFill>
                   <a:srgbClr val="90C226"/>
                 </a:solidFill>
@@ -12276,7 +12533,7 @@
               <a:t>INT</a:t>
             </a:r>
             <a:r>
-              <a:rPr sz="1100" b="0" i="0">
+              <a:rPr sz="1100" b="0" i="0" dirty="0">
                 <a:solidFill>
                   <a:srgbClr val="E8EEF0"/>
                 </a:solidFill>
@@ -12287,7 +12544,7 @@
           </a:p>
           <a:p>
             <a:r>
-              <a:rPr sz="1100" b="0" i="0">
+              <a:rPr sz="1100" b="0" i="0" dirty="0">
                 <a:solidFill>
                   <a:srgbClr val="E8EEF0"/>
                 </a:solidFill>
@@ -12296,7 +12553,7 @@
               <a:t>  amount     </a:t>
             </a:r>
             <a:r>
-              <a:rPr sz="1100" b="1" i="0">
+              <a:rPr sz="1100" b="1" i="0" dirty="0">
                 <a:solidFill>
                   <a:srgbClr val="90C226"/>
                 </a:solidFill>
@@ -12305,7 +12562,7 @@
               <a:t>DECIMAL</a:t>
             </a:r>
             <a:r>
-              <a:rPr sz="1100" b="0" i="0">
+              <a:rPr sz="1100" b="0" i="0" dirty="0">
                 <a:solidFill>
                   <a:srgbClr val="E8EEF0"/>
                 </a:solidFill>
@@ -12314,7 +12571,7 @@
               <a:t>(</a:t>
             </a:r>
             <a:r>
-              <a:rPr sz="1100" b="0" i="0">
+              <a:rPr sz="1100" b="0" i="0" dirty="0">
                 <a:solidFill>
                   <a:srgbClr val="F2A15F"/>
                 </a:solidFill>
@@ -12323,7 +12580,7 @@
               <a:t>10</a:t>
             </a:r>
             <a:r>
-              <a:rPr sz="1100" b="0" i="0">
+              <a:rPr sz="1100" b="0" i="0" dirty="0">
                 <a:solidFill>
                   <a:srgbClr val="E8EEF0"/>
                 </a:solidFill>
@@ -12332,7 +12589,7 @@
               <a:t>,</a:t>
             </a:r>
             <a:r>
-              <a:rPr sz="1100" b="0" i="0">
+              <a:rPr sz="1100" b="0" i="0" dirty="0">
                 <a:solidFill>
                   <a:srgbClr val="F2A15F"/>
                 </a:solidFill>
@@ -12341,7 +12598,7 @@
               <a:t>2</a:t>
             </a:r>
             <a:r>
-              <a:rPr sz="1100" b="0" i="0">
+              <a:rPr sz="1100" b="0" i="0" dirty="0">
                 <a:solidFill>
                   <a:srgbClr val="E8EEF0"/>
                 </a:solidFill>
@@ -12352,16 +12609,34 @@
           </a:p>
           <a:p>
             <a:r>
-              <a:rPr sz="1100" b="0" i="0">
+              <a:rPr sz="1100" b="0" i="0" dirty="0">
                 <a:solidFill>
                   <a:srgbClr val="E8EEF0"/>
                 </a:solidFill>
                 <a:latin typeface="Courier New"/>
               </a:rPr>
-              <a:t>  valid_time </a:t>
-            </a:r>
-            <a:r>
-              <a:rPr sz="1100" b="1" i="0">
+              <a:t>  </a:t>
+            </a:r>
+            <a:r>
+              <a:rPr sz="1100" b="0" i="0" dirty="0" err="1">
+                <a:solidFill>
+                  <a:srgbClr val="E8EEF0"/>
+                </a:solidFill>
+                <a:latin typeface="Courier New"/>
+              </a:rPr>
+              <a:t>valid_time</a:t>
+            </a:r>
+            <a:r>
+              <a:rPr sz="1100" b="0" i="0" dirty="0">
+                <a:solidFill>
+                  <a:srgbClr val="E8EEF0"/>
+                </a:solidFill>
+                <a:latin typeface="Courier New"/>
+              </a:rPr>
+              <a:t> </a:t>
+            </a:r>
+            <a:r>
+              <a:rPr sz="1100" b="1" i="0" dirty="0">
                 <a:solidFill>
                   <a:srgbClr val="90C226"/>
                 </a:solidFill>
@@ -12370,38 +12645,81 @@
               <a:t>PERIOD FOR</a:t>
             </a:r>
             <a:r>
-              <a:rPr sz="1100" b="0" i="0">
+              <a:rPr sz="1100" b="0" i="0" dirty="0">
                 <a:solidFill>
                   <a:srgbClr val="E8EEF0"/>
                 </a:solidFill>
                 <a:latin typeface="Courier New"/>
               </a:rPr>
-              <a:t> valid_time</a:t>
-            </a:r>
-          </a:p>
-          <a:p>
-            <a:r>
-              <a:rPr sz="1100" b="0" i="0">
+              <a:t> </a:t>
+            </a:r>
+            <a:r>
+              <a:rPr sz="1100" b="0" i="0" dirty="0" err="1">
                 <a:solidFill>
                   <a:srgbClr val="E8EEF0"/>
                 </a:solidFill>
                 <a:latin typeface="Courier New"/>
               </a:rPr>
-              <a:t>    (from_date, to_date),</a:t>
-            </a:r>
-          </a:p>
-          <a:p>
-            <a:r>
-              <a:rPr sz="1100" b="0" i="0">
+              <a:t>valid_time</a:t>
+            </a:r>
+            <a:r>
+              <a:rPr sz="1100" b="0" i="0" dirty="0">
                 <a:solidFill>
                   <a:srgbClr val="E8EEF0"/>
                 </a:solidFill>
                 <a:latin typeface="Courier New"/>
               </a:rPr>
+              <a:t>(</a:t>
+            </a:r>
+            <a:r>
+              <a:rPr sz="1100" b="0" i="0" dirty="0" err="1">
+                <a:solidFill>
+                  <a:srgbClr val="E8EEF0"/>
+                </a:solidFill>
+                <a:latin typeface="Courier New"/>
+              </a:rPr>
+              <a:t>from_date</a:t>
+            </a:r>
+            <a:r>
+              <a:rPr sz="1100" b="0" i="0" dirty="0">
+                <a:solidFill>
+                  <a:srgbClr val="E8EEF0"/>
+                </a:solidFill>
+                <a:latin typeface="Courier New"/>
+              </a:rPr>
+              <a:t>, </a:t>
+            </a:r>
+            <a:r>
+              <a:rPr sz="1100" b="0" i="0" dirty="0" err="1">
+                <a:solidFill>
+                  <a:srgbClr val="E8EEF0"/>
+                </a:solidFill>
+                <a:latin typeface="Courier New"/>
+              </a:rPr>
+              <a:t>to_date</a:t>
+            </a:r>
+            <a:r>
+              <a:rPr sz="1100" b="0" i="0" dirty="0">
+                <a:solidFill>
+                  <a:srgbClr val="E8EEF0"/>
+                </a:solidFill>
+                <a:latin typeface="Courier New"/>
+              </a:rPr>
+              <a:t>),</a:t>
+            </a:r>
+          </a:p>
+          <a:p>
+            <a:r>
+              <a:rPr sz="1100" b="0" i="0" dirty="0">
+                <a:solidFill>
+                  <a:srgbClr val="E8EEF0"/>
+                </a:solidFill>
+                <a:latin typeface="Courier New"/>
+              </a:rPr>
               <a:t>  </a:t>
             </a:r>
             <a:r>
-              <a:rPr sz="1100" b="1" i="0">
+              <a:rPr sz="1100" b="1" i="0" dirty="0">
                 <a:solidFill>
                   <a:srgbClr val="90C226"/>
                 </a:solidFill>
@@ -12410,27 +12728,34 @@
               <a:t>PRIMARY KEY</a:t>
             </a:r>
             <a:r>
-              <a:rPr sz="1100" b="0" i="0">
+              <a:rPr sz="1100" b="0" i="0" dirty="0">
                 <a:solidFill>
                   <a:srgbClr val="E8EEF0"/>
                 </a:solidFill>
                 <a:latin typeface="Courier New"/>
               </a:rPr>
-              <a:t> (emp_id,</a:t>
-            </a:r>
-          </a:p>
-          <a:p>
-            <a:r>
-              <a:rPr sz="1100" b="0" i="0">
+              <a:t> (</a:t>
+            </a:r>
+            <a:r>
+              <a:rPr sz="1100" b="0" i="0" dirty="0" err="1">
                 <a:solidFill>
                   <a:srgbClr val="E8EEF0"/>
                 </a:solidFill>
                 <a:latin typeface="Courier New"/>
               </a:rPr>
-              <a:t>    valid_time </a:t>
-            </a:r>
-            <a:r>
-              <a:rPr sz="1100" b="1" i="0">
+              <a:t>emp_id,valid_time</a:t>
+            </a:r>
+            <a:r>
+              <a:rPr sz="1100" b="0" i="0" dirty="0">
+                <a:solidFill>
+                  <a:srgbClr val="E8EEF0"/>
+                </a:solidFill>
+                <a:latin typeface="Courier New"/>
+              </a:rPr>
+              <a:t> </a:t>
+            </a:r>
+            <a:r>
+              <a:rPr sz="1100" b="1" i="0" dirty="0">
                 <a:solidFill>
                   <a:srgbClr val="90C226"/>
                 </a:solidFill>
@@ -12439,7 +12764,7 @@
               <a:t>WITHOUT OVERLAPS</a:t>
             </a:r>
             <a:r>
-              <a:rPr sz="1100" b="0" i="0">
+              <a:rPr sz="1100" b="0" i="0" dirty="0">
                 <a:solidFill>
                   <a:srgbClr val="E8EEF0"/>
                 </a:solidFill>
@@ -12450,7 +12775,7 @@
           </a:p>
           <a:p>
             <a:r>
-              <a:rPr sz="1100" b="0" i="0">
+              <a:rPr sz="1100" b="0" i="0" dirty="0">
                 <a:solidFill>
                   <a:srgbClr val="E8EEF0"/>
                 </a:solidFill>
@@ -12459,7 +12784,7 @@
               <a:t>) </a:t>
             </a:r>
             <a:r>
-              <a:rPr sz="1100" b="1" i="0">
+              <a:rPr sz="1100" b="1" i="0" dirty="0">
                 <a:solidFill>
                   <a:srgbClr val="90C226"/>
                 </a:solidFill>
@@ -12468,7 +12793,7 @@
               <a:t>WITH SYSTEM VERSIONING</a:t>
             </a:r>
             <a:r>
-              <a:rPr sz="1100" b="0" i="0">
+              <a:rPr sz="1100" b="0" i="0" dirty="0">
                 <a:solidFill>
                   <a:srgbClr val="E8EEF0"/>
                 </a:solidFill>
@@ -12479,7 +12804,7 @@
           </a:p>
           <a:p>
             <a:r>
-              <a:rPr sz="1100" b="0" i="0">
+              <a:rPr sz="1100" b="0" i="0" dirty="0">
                 <a:solidFill>
                   <a:srgbClr val="FFFFFF"/>
                 </a:solidFill>
@@ -12490,7 +12815,7 @@
           </a:p>
           <a:p>
             <a:r>
-              <a:rPr sz="1100" b="0" i="1">
+              <a:rPr sz="1100" b="0" i="1" dirty="0">
                 <a:solidFill>
                   <a:srgbClr val="8FA6B0"/>
                 </a:solidFill>
@@ -12501,7 +12826,7 @@
           </a:p>
           <a:p>
             <a:r>
-              <a:rPr sz="1100" b="1" i="0">
+              <a:rPr sz="1100" b="1" i="0" dirty="0">
                 <a:solidFill>
                   <a:srgbClr val="90C226"/>
                 </a:solidFill>
@@ -12510,7 +12835,7 @@
               <a:t>SELECT</a:t>
             </a:r>
             <a:r>
-              <a:rPr sz="1100" b="0" i="0">
+              <a:rPr sz="1100" b="0" i="0" dirty="0">
                 <a:solidFill>
                   <a:srgbClr val="E8EEF0"/>
                 </a:solidFill>
@@ -12519,7 +12844,7 @@
               <a:t> * </a:t>
             </a:r>
             <a:r>
-              <a:rPr sz="1100" b="1" i="0">
+              <a:rPr sz="1100" b="1" i="0" dirty="0">
                 <a:solidFill>
                   <a:srgbClr val="90C226"/>
                 </a:solidFill>
@@ -12528,7 +12853,7 @@
               <a:t>FROM</a:t>
             </a:r>
             <a:r>
-              <a:rPr sz="1100" b="0" i="0">
+              <a:rPr sz="1100" b="0" i="0" dirty="0">
                 <a:solidFill>
                   <a:srgbClr val="E8EEF0"/>
                 </a:solidFill>
@@ -12539,7 +12864,7 @@
           </a:p>
           <a:p>
             <a:r>
-              <a:rPr sz="1100" b="0" i="0">
+              <a:rPr sz="1100" b="0" i="0" dirty="0">
                 <a:solidFill>
                   <a:srgbClr val="E8EEF0"/>
                 </a:solidFill>
@@ -12548,7 +12873,7 @@
               <a:t>  </a:t>
             </a:r>
             <a:r>
-              <a:rPr sz="1100" b="1" i="0">
+              <a:rPr sz="1100" b="1" i="0" dirty="0">
                 <a:solidFill>
                   <a:srgbClr val="90C226"/>
                 </a:solidFill>
@@ -12557,7 +12882,7 @@
               <a:t>FOR SYSTEM_TIME AS OF</a:t>
             </a:r>
             <a:r>
-              <a:rPr sz="1100" b="0" i="0">
+              <a:rPr sz="1100" b="0" i="0" dirty="0">
                 <a:solidFill>
                   <a:srgbClr val="E8EEF0"/>
                 </a:solidFill>
@@ -12566,7 +12891,7 @@
               <a:t> </a:t>
             </a:r>
             <a:r>
-              <a:rPr sz="1100" b="1" i="0">
+              <a:rPr sz="1100" b="1" i="0" dirty="0">
                 <a:solidFill>
                   <a:srgbClr val="90C226"/>
                 </a:solidFill>
@@ -12575,7 +12900,7 @@
               <a:t>TIMESTAMP</a:t>
             </a:r>
             <a:r>
-              <a:rPr sz="1100" b="0" i="0">
+              <a:rPr sz="1100" b="0" i="0" dirty="0">
                 <a:solidFill>
                   <a:srgbClr val="E8EEF0"/>
                 </a:solidFill>
@@ -12584,7 +12909,7 @@
               <a:t> </a:t>
             </a:r>
             <a:r>
-              <a:rPr sz="1100" b="0" i="0">
+              <a:rPr sz="1100" b="0" i="0" dirty="0">
                 <a:solidFill>
                   <a:srgbClr val="E6B91E"/>
                 </a:solidFill>
@@ -12593,7 +12918,7 @@
               <a:t>'2023-06-01'</a:t>
             </a:r>
             <a:r>
-              <a:rPr sz="1100" b="0" i="0">
+              <a:rPr sz="1100" b="0" i="0" dirty="0">
                 <a:solidFill>
                   <a:srgbClr val="E8EEF0"/>
                 </a:solidFill>
@@ -12612,7 +12937,7 @@
         </p:nvSpPr>
         <p:spPr>
           <a:xfrm>
-            <a:off x="4389120" y="4892040"/>
+            <a:off x="4822165" y="4336067"/>
             <a:ext cx="4572000" cy="548640"/>
           </a:xfrm>
           <a:prstGeom prst="rect">
@@ -12621,7 +12946,7 @@
           <a:noFill/>
         </p:spPr>
         <p:txBody>
-          <a:bodyPr wrap="square" anchor="t" lIns="45720" rIns="45720" tIns="27432" bIns="27432">
+          <a:bodyPr wrap="square" lIns="45720" tIns="27432" rIns="45720" bIns="27432" anchor="t">
             <a:spAutoFit/>
           </a:bodyPr>
           <a:lstStyle/>
@@ -12646,7 +12971,7 @@
 </file>
 
 <file path=ppt/slides/slide9.xml><?xml version="1.0" encoding="utf-8"?>
-<p:sld xmlns:a="http://schemas.openxmlformats.org/drawingml/2006/main" xmlns:p="http://schemas.openxmlformats.org/presentationml/2006/main" xmlns:r="http://schemas.openxmlformats.org/officeDocument/2006/relationships">
+<p:sld xmlns:a="http://schemas.openxmlformats.org/drawingml/2006/main" xmlns:r="http://schemas.openxmlformats.org/officeDocument/2006/relationships" xmlns:p="http://schemas.openxmlformats.org/presentationml/2006/main">
   <p:cSld>
     <p:spTree>
       <p:nvGrpSpPr>
@@ -12654,7 +12979,14 @@
         <p:cNvGrpSpPr/>
         <p:nvPr/>
       </p:nvGrpSpPr>
-      <p:grpSpPr/>
+      <p:grpSpPr>
+        <a:xfrm>
+          <a:off x="0" y="0"/>
+          <a:ext cx="0" cy="0"/>
+          <a:chOff x="0" y="0"/>
+          <a:chExt cx="0" cy="0"/>
+        </a:xfrm>
+      </p:grpSpPr>
       <p:sp>
         <p:nvSpPr>
           <p:cNvPr id="2" name="TextBox 1"/>
@@ -12672,7 +13004,7 @@
           <a:noFill/>
         </p:spPr>
         <p:txBody>
-          <a:bodyPr wrap="square" anchor="t" lIns="45720" rIns="45720" tIns="27432" bIns="27432">
+          <a:bodyPr wrap="square" lIns="45720" tIns="27432" rIns="45720" bIns="27432" anchor="t">
             <a:spAutoFit/>
           </a:bodyPr>
           <a:lstStyle/>
@@ -12705,7 +13037,7 @@
           <a:noFill/>
         </p:spPr>
         <p:txBody>
-          <a:bodyPr wrap="square" anchor="t" lIns="45720" rIns="45720" tIns="27432" bIns="27432">
+          <a:bodyPr wrap="square" lIns="45720" tIns="27432" rIns="45720" bIns="27432" anchor="t">
             <a:spAutoFit/>
           </a:bodyPr>
           <a:lstStyle/>
@@ -12738,7 +13070,7 @@
           <a:noFill/>
         </p:spPr>
         <p:txBody>
-          <a:bodyPr wrap="square" anchor="t" lIns="45720" rIns="45720" tIns="27432" bIns="27432">
+          <a:bodyPr wrap="square" lIns="45720" tIns="27432" rIns="45720" bIns="27432" anchor="t">
             <a:spAutoFit/>
           </a:bodyPr>
           <a:lstStyle/>
@@ -13068,7 +13400,7 @@
           <a:noFill/>
         </p:spPr>
         <p:txBody>
-          <a:bodyPr wrap="square" anchor="t" lIns="45720" rIns="45720" tIns="27432" bIns="27432">
+          <a:bodyPr wrap="square" lIns="45720" tIns="27432" rIns="45720" bIns="27432" anchor="t">
             <a:spAutoFit/>
           </a:bodyPr>
           <a:lstStyle/>
@@ -13101,7 +13433,7 @@
           <a:noFill/>
         </p:spPr>
         <p:txBody>
-          <a:bodyPr wrap="square" anchor="t" lIns="45720" rIns="45720" tIns="27432" bIns="27432">
+          <a:bodyPr wrap="square" lIns="45720" tIns="27432" rIns="45720" bIns="27432" anchor="t">
             <a:spAutoFit/>
           </a:bodyPr>
           <a:lstStyle/>
@@ -13154,10 +13486,11 @@
           </a:fontRef>
         </p:style>
         <p:txBody>
-          <a:bodyPr rtlCol="0" anchor="ctr" wrap="square" lIns="45720" rIns="45720" tIns="18288" bIns="18288"/>
+          <a:bodyPr wrap="square" lIns="45720" tIns="18288" rIns="45720" bIns="18288" rtlCol="0" anchor="ctr"/>
           <a:lstStyle/>
           <a:p>
             <a:pPr algn="ctr"/>
+            <a:endParaRPr/>
           </a:p>
         </p:txBody>
       </p:sp>
@@ -13198,10 +13531,11 @@
           </a:fontRef>
         </p:style>
         <p:txBody>
-          <a:bodyPr rtlCol="0" anchor="ctr" wrap="square" lIns="45720" rIns="45720" tIns="18288" bIns="18288"/>
+          <a:bodyPr wrap="square" lIns="45720" tIns="18288" rIns="45720" bIns="18288" rtlCol="0" anchor="ctr"/>
           <a:lstStyle/>
           <a:p>
             <a:pPr algn="ctr"/>
+            <a:endParaRPr/>
           </a:p>
         </p:txBody>
       </p:sp>
@@ -13222,7 +13556,7 @@
           <a:noFill/>
         </p:spPr>
         <p:txBody>
-          <a:bodyPr wrap="square" anchor="t" lIns="45720" rIns="45720" tIns="27432" bIns="27432">
+          <a:bodyPr wrap="square" lIns="45720" tIns="27432" rIns="45720" bIns="27432" anchor="t">
             <a:spAutoFit/>
           </a:bodyPr>
           <a:lstStyle/>
@@ -13275,10 +13609,11 @@
           </a:fontRef>
         </p:style>
         <p:txBody>
-          <a:bodyPr rtlCol="0" anchor="ctr" wrap="square" lIns="45720" rIns="45720" tIns="18288" bIns="18288"/>
+          <a:bodyPr wrap="square" lIns="45720" tIns="18288" rIns="45720" bIns="18288" rtlCol="0" anchor="ctr"/>
           <a:lstStyle/>
           <a:p>
             <a:pPr algn="ctr"/>
+            <a:endParaRPr/>
           </a:p>
         </p:txBody>
       </p:sp>
@@ -13319,10 +13654,11 @@
           </a:fontRef>
         </p:style>
         <p:txBody>
-          <a:bodyPr rtlCol="0" anchor="ctr" wrap="square" lIns="45720" rIns="45720" tIns="18288" bIns="18288"/>
+          <a:bodyPr wrap="square" lIns="45720" tIns="18288" rIns="45720" bIns="18288" rtlCol="0" anchor="ctr"/>
           <a:lstStyle/>
           <a:p>
             <a:pPr algn="ctr"/>
+            <a:endParaRPr/>
           </a:p>
         </p:txBody>
       </p:sp>
@@ -13343,7 +13679,7 @@
           <a:noFill/>
         </p:spPr>
         <p:txBody>
-          <a:bodyPr wrap="square" anchor="t" lIns="45720" rIns="45720" tIns="27432" bIns="27432">
+          <a:bodyPr wrap="square" lIns="45720" tIns="27432" rIns="45720" bIns="27432" anchor="t">
             <a:spAutoFit/>
           </a:bodyPr>
           <a:lstStyle/>
@@ -13396,10 +13732,11 @@
           </a:fontRef>
         </p:style>
         <p:txBody>
-          <a:bodyPr rtlCol="0" anchor="ctr" wrap="square" lIns="45720" rIns="45720" tIns="18288" bIns="18288"/>
+          <a:bodyPr wrap="square" lIns="45720" tIns="18288" rIns="45720" bIns="18288" rtlCol="0" anchor="ctr"/>
           <a:lstStyle/>
           <a:p>
             <a:pPr algn="ctr"/>
+            <a:endParaRPr/>
           </a:p>
         </p:txBody>
       </p:sp>
@@ -13440,10 +13777,11 @@
           </a:fontRef>
         </p:style>
         <p:txBody>
-          <a:bodyPr rtlCol="0" anchor="ctr" wrap="square" lIns="45720" rIns="45720" tIns="18288" bIns="18288"/>
+          <a:bodyPr wrap="square" lIns="45720" tIns="18288" rIns="45720" bIns="18288" rtlCol="0" anchor="ctr"/>
           <a:lstStyle/>
           <a:p>
             <a:pPr algn="ctr"/>
+            <a:endParaRPr/>
           </a:p>
         </p:txBody>
       </p:sp>
@@ -13464,7 +13802,7 @@
           <a:noFill/>
         </p:spPr>
         <p:txBody>
-          <a:bodyPr wrap="square" anchor="t" lIns="45720" rIns="45720" tIns="27432" bIns="27432">
+          <a:bodyPr wrap="square" lIns="45720" tIns="27432" rIns="45720" bIns="27432" anchor="t">
             <a:spAutoFit/>
           </a:bodyPr>
           <a:lstStyle/>
@@ -13517,10 +13855,11 @@
           </a:fontRef>
         </p:style>
         <p:txBody>
-          <a:bodyPr rtlCol="0" anchor="ctr" wrap="square" lIns="45720" rIns="45720" tIns="18288" bIns="18288"/>
+          <a:bodyPr wrap="square" lIns="45720" tIns="18288" rIns="45720" bIns="18288" rtlCol="0" anchor="ctr"/>
           <a:lstStyle/>
           <a:p>
             <a:pPr algn="ctr"/>
+            <a:endParaRPr/>
           </a:p>
         </p:txBody>
       </p:sp>
@@ -13561,10 +13900,11 @@
           </a:fontRef>
         </p:style>
         <p:txBody>
-          <a:bodyPr rtlCol="0" anchor="ctr" wrap="square" lIns="45720" rIns="45720" tIns="18288" bIns="18288"/>
+          <a:bodyPr wrap="square" lIns="45720" tIns="18288" rIns="45720" bIns="18288" rtlCol="0" anchor="ctr"/>
           <a:lstStyle/>
           <a:p>
             <a:pPr algn="ctr"/>
+            <a:endParaRPr/>
           </a:p>
         </p:txBody>
       </p:sp>
@@ -13585,7 +13925,7 @@
           <a:noFill/>
         </p:spPr>
         <p:txBody>
-          <a:bodyPr wrap="square" anchor="t" lIns="45720" rIns="45720" tIns="27432" bIns="27432">
+          <a:bodyPr wrap="square" lIns="45720" tIns="27432" rIns="45720" bIns="27432" anchor="t">
             <a:spAutoFit/>
           </a:bodyPr>
           <a:lstStyle/>
@@ -13638,10 +13978,11 @@
           </a:fontRef>
         </p:style>
         <p:txBody>
-          <a:bodyPr rtlCol="0" anchor="ctr" wrap="square" lIns="45720" rIns="45720" tIns="18288" bIns="18288"/>
+          <a:bodyPr wrap="square" lIns="45720" tIns="18288" rIns="45720" bIns="18288" rtlCol="0" anchor="ctr"/>
           <a:lstStyle/>
           <a:p>
             <a:pPr algn="ctr"/>
+            <a:endParaRPr/>
           </a:p>
         </p:txBody>
       </p:sp>
@@ -13682,10 +14023,11 @@
           </a:fontRef>
         </p:style>
         <p:txBody>
-          <a:bodyPr rtlCol="0" anchor="ctr" wrap="square" lIns="45720" rIns="45720" tIns="18288" bIns="18288"/>
+          <a:bodyPr wrap="square" lIns="45720" tIns="18288" rIns="45720" bIns="18288" rtlCol="0" anchor="ctr"/>
           <a:lstStyle/>
           <a:p>
             <a:pPr algn="ctr"/>
+            <a:endParaRPr/>
           </a:p>
         </p:txBody>
       </p:sp>
@@ -13706,7 +14048,7 @@
           <a:noFill/>
         </p:spPr>
         <p:txBody>
-          <a:bodyPr wrap="square" anchor="t" lIns="45720" rIns="45720" tIns="27432" bIns="27432">
+          <a:bodyPr wrap="square" lIns="45720" tIns="27432" rIns="45720" bIns="27432" anchor="t">
             <a:spAutoFit/>
           </a:bodyPr>
           <a:lstStyle/>
@@ -13759,10 +14101,11 @@
           </a:fontRef>
         </p:style>
         <p:txBody>
-          <a:bodyPr rtlCol="0" anchor="ctr" wrap="square" lIns="45720" rIns="45720" tIns="18288" bIns="18288"/>
+          <a:bodyPr wrap="square" lIns="45720" tIns="18288" rIns="45720" bIns="18288" rtlCol="0" anchor="ctr"/>
           <a:lstStyle/>
           <a:p>
             <a:pPr algn="ctr"/>
+            <a:endParaRPr/>
           </a:p>
         </p:txBody>
       </p:sp>
@@ -13803,10 +14146,11 @@
           </a:fontRef>
         </p:style>
         <p:txBody>
-          <a:bodyPr rtlCol="0" anchor="ctr" wrap="square" lIns="45720" rIns="45720" tIns="18288" bIns="18288"/>
+          <a:bodyPr wrap="square" lIns="45720" tIns="18288" rIns="45720" bIns="18288" rtlCol="0" anchor="ctr"/>
           <a:lstStyle/>
           <a:p>
             <a:pPr algn="ctr"/>
+            <a:endParaRPr/>
           </a:p>
         </p:txBody>
       </p:sp>
@@ -13827,7 +14171,7 @@
           <a:noFill/>
         </p:spPr>
         <p:txBody>
-          <a:bodyPr wrap="square" anchor="t" lIns="45720" rIns="45720" tIns="27432" bIns="27432">
+          <a:bodyPr wrap="square" lIns="45720" tIns="27432" rIns="45720" bIns="27432" anchor="t">
             <a:spAutoFit/>
           </a:bodyPr>
           <a:lstStyle/>
@@ -13880,10 +14224,11 @@
           </a:fontRef>
         </p:style>
         <p:txBody>
-          <a:bodyPr rtlCol="0" anchor="ctr" wrap="square" lIns="45720" rIns="45720" tIns="18288" bIns="18288"/>
+          <a:bodyPr wrap="square" lIns="45720" tIns="18288" rIns="45720" bIns="18288" rtlCol="0" anchor="ctr"/>
           <a:lstStyle/>
           <a:p>
             <a:pPr algn="ctr"/>
+            <a:endParaRPr/>
           </a:p>
         </p:txBody>
       </p:sp>
@@ -13924,10 +14269,11 @@
           </a:fontRef>
         </p:style>
         <p:txBody>
-          <a:bodyPr rtlCol="0" anchor="ctr" wrap="square" lIns="45720" rIns="45720" tIns="18288" bIns="18288"/>
+          <a:bodyPr wrap="square" lIns="45720" tIns="18288" rIns="45720" bIns="18288" rtlCol="0" anchor="ctr"/>
           <a:lstStyle/>
           <a:p>
             <a:pPr algn="ctr"/>
+            <a:endParaRPr/>
           </a:p>
         </p:txBody>
       </p:sp>
@@ -13948,7 +14294,7 @@
           <a:noFill/>
         </p:spPr>
         <p:txBody>
-          <a:bodyPr wrap="square" anchor="t" lIns="45720" rIns="45720" tIns="27432" bIns="27432">
+          <a:bodyPr wrap="square" lIns="45720" tIns="27432" rIns="45720" bIns="27432" anchor="t">
             <a:spAutoFit/>
           </a:bodyPr>
           <a:lstStyle/>
@@ -14001,10 +14347,11 @@
           </a:fontRef>
         </p:style>
         <p:txBody>
-          <a:bodyPr rtlCol="0" anchor="ctr" wrap="square" lIns="45720" rIns="45720" tIns="18288" bIns="18288"/>
+          <a:bodyPr wrap="square" lIns="45720" tIns="18288" rIns="45720" bIns="18288" rtlCol="0" anchor="ctr"/>
           <a:lstStyle/>
           <a:p>
             <a:pPr algn="ctr"/>
+            <a:endParaRPr/>
           </a:p>
         </p:txBody>
       </p:sp>
@@ -14045,10 +14392,11 @@
           </a:fontRef>
         </p:style>
         <p:txBody>
-          <a:bodyPr rtlCol="0" anchor="ctr" wrap="square" lIns="45720" rIns="45720" tIns="18288" bIns="18288"/>
+          <a:bodyPr wrap="square" lIns="45720" tIns="18288" rIns="45720" bIns="18288" rtlCol="0" anchor="ctr"/>
           <a:lstStyle/>
           <a:p>
             <a:pPr algn="ctr"/>
+            <a:endParaRPr/>
           </a:p>
         </p:txBody>
       </p:sp>
@@ -14069,7 +14417,7 @@
           <a:noFill/>
         </p:spPr>
         <p:txBody>
-          <a:bodyPr wrap="square" anchor="t" lIns="45720" rIns="45720" tIns="27432" bIns="27432">
+          <a:bodyPr wrap="square" lIns="45720" tIns="27432" rIns="45720" bIns="27432" anchor="t">
             <a:spAutoFit/>
           </a:bodyPr>
           <a:lstStyle/>
@@ -14122,10 +14470,11 @@
           </a:fontRef>
         </p:style>
         <p:txBody>
-          <a:bodyPr rtlCol="0" anchor="ctr" wrap="square" lIns="45720" rIns="45720" tIns="18288" bIns="18288"/>
+          <a:bodyPr wrap="square" lIns="45720" tIns="18288" rIns="45720" bIns="18288" rtlCol="0" anchor="ctr"/>
           <a:lstStyle/>
           <a:p>
             <a:pPr algn="ctr"/>
+            <a:endParaRPr/>
           </a:p>
         </p:txBody>
       </p:sp>
@@ -14166,10 +14515,11 @@
           </a:fontRef>
         </p:style>
         <p:txBody>
-          <a:bodyPr rtlCol="0" anchor="ctr" wrap="square" lIns="45720" rIns="45720" tIns="18288" bIns="18288"/>
+          <a:bodyPr wrap="square" lIns="45720" tIns="18288" rIns="45720" bIns="18288" rtlCol="0" anchor="ctr"/>
           <a:lstStyle/>
           <a:p>
             <a:pPr algn="ctr"/>
+            <a:endParaRPr/>
           </a:p>
         </p:txBody>
       </p:sp>
@@ -14190,7 +14540,7 @@
           <a:noFill/>
         </p:spPr>
         <p:txBody>
-          <a:bodyPr wrap="square" anchor="t" lIns="45720" rIns="45720" tIns="27432" bIns="27432">
+          <a:bodyPr wrap="square" lIns="45720" tIns="27432" rIns="45720" bIns="27432" anchor="t">
             <a:spAutoFit/>
           </a:bodyPr>
           <a:lstStyle/>
@@ -14243,10 +14593,11 @@
           </a:fontRef>
         </p:style>
         <p:txBody>
-          <a:bodyPr rtlCol="0" anchor="ctr" wrap="square" lIns="45720" rIns="45720" tIns="18288" bIns="18288"/>
+          <a:bodyPr wrap="square" lIns="45720" tIns="18288" rIns="45720" bIns="18288" rtlCol="0" anchor="ctr"/>
           <a:lstStyle/>
           <a:p>
             <a:pPr algn="ctr"/>
+            <a:endParaRPr/>
           </a:p>
         </p:txBody>
       </p:sp>
@@ -14287,10 +14638,11 @@
           </a:fontRef>
         </p:style>
         <p:txBody>
-          <a:bodyPr rtlCol="0" anchor="ctr" wrap="square" lIns="45720" rIns="45720" tIns="18288" bIns="18288"/>
+          <a:bodyPr wrap="square" lIns="45720" tIns="18288" rIns="45720" bIns="18288" rtlCol="0" anchor="ctr"/>
           <a:lstStyle/>
           <a:p>
             <a:pPr algn="ctr"/>
+            <a:endParaRPr/>
           </a:p>
         </p:txBody>
       </p:sp>
@@ -14311,7 +14663,7 @@
           <a:noFill/>
         </p:spPr>
         <p:txBody>
-          <a:bodyPr wrap="square" anchor="t" lIns="45720" rIns="45720" tIns="27432" bIns="27432">
+          <a:bodyPr wrap="square" lIns="45720" tIns="27432" rIns="45720" bIns="27432" anchor="t">
             <a:spAutoFit/>
           </a:bodyPr>
           <a:lstStyle/>
@@ -14364,10 +14716,11 @@
           </a:fontRef>
         </p:style>
         <p:txBody>
-          <a:bodyPr rtlCol="0" anchor="ctr" wrap="square" lIns="45720" rIns="45720" tIns="18288" bIns="18288"/>
+          <a:bodyPr wrap="square" lIns="45720" tIns="18288" rIns="45720" bIns="18288" rtlCol="0" anchor="ctr"/>
           <a:lstStyle/>
           <a:p>
             <a:pPr algn="ctr"/>
+            <a:endParaRPr/>
           </a:p>
         </p:txBody>
       </p:sp>
@@ -14408,10 +14761,11 @@
           </a:fontRef>
         </p:style>
         <p:txBody>
-          <a:bodyPr rtlCol="0" anchor="ctr" wrap="square" lIns="45720" rIns="45720" tIns="18288" bIns="18288"/>
+          <a:bodyPr wrap="square" lIns="45720" tIns="18288" rIns="45720" bIns="18288" rtlCol="0" anchor="ctr"/>
           <a:lstStyle/>
           <a:p>
             <a:pPr algn="ctr"/>
+            <a:endParaRPr/>
           </a:p>
         </p:txBody>
       </p:sp>
@@ -14432,7 +14786,7 @@
           <a:noFill/>
         </p:spPr>
         <p:txBody>
-          <a:bodyPr wrap="square" anchor="t" lIns="45720" rIns="45720" tIns="27432" bIns="27432">
+          <a:bodyPr wrap="square" lIns="45720" tIns="27432" rIns="45720" bIns="27432" anchor="t">
             <a:spAutoFit/>
           </a:bodyPr>
           <a:lstStyle/>
@@ -14485,10 +14839,11 @@
           </a:fontRef>
         </p:style>
         <p:txBody>
-          <a:bodyPr rtlCol="0" anchor="ctr" wrap="square" lIns="45720" rIns="45720" tIns="18288" bIns="18288"/>
+          <a:bodyPr wrap="square" lIns="45720" tIns="18288" rIns="45720" bIns="18288" rtlCol="0" anchor="ctr"/>
           <a:lstStyle/>
           <a:p>
             <a:pPr algn="ctr"/>
+            <a:endParaRPr/>
           </a:p>
         </p:txBody>
       </p:sp>
@@ -14529,10 +14884,11 @@
           </a:fontRef>
         </p:style>
         <p:txBody>
-          <a:bodyPr rtlCol="0" anchor="ctr" wrap="square" lIns="45720" rIns="45720" tIns="18288" bIns="18288"/>
+          <a:bodyPr wrap="square" lIns="45720" tIns="18288" rIns="45720" bIns="18288" rtlCol="0" anchor="ctr"/>
           <a:lstStyle/>
           <a:p>
             <a:pPr algn="ctr"/>
+            <a:endParaRPr/>
           </a:p>
         </p:txBody>
       </p:sp>
@@ -14553,7 +14909,7 @@
           <a:noFill/>
         </p:spPr>
         <p:txBody>
-          <a:bodyPr wrap="square" anchor="t" lIns="45720" rIns="45720" tIns="27432" bIns="27432">
+          <a:bodyPr wrap="square" lIns="45720" tIns="27432" rIns="45720" bIns="27432" anchor="t">
             <a:spAutoFit/>
           </a:bodyPr>
           <a:lstStyle/>
@@ -14606,10 +14962,11 @@
           </a:fontRef>
         </p:style>
         <p:txBody>
-          <a:bodyPr rtlCol="0" anchor="ctr" wrap="square" lIns="45720" rIns="45720" tIns="18288" bIns="18288"/>
+          <a:bodyPr wrap="square" lIns="45720" tIns="18288" rIns="45720" bIns="18288" rtlCol="0" anchor="ctr"/>
           <a:lstStyle/>
           <a:p>
             <a:pPr algn="ctr"/>
+            <a:endParaRPr/>
           </a:p>
         </p:txBody>
       </p:sp>
@@ -14650,10 +15007,11 @@
           </a:fontRef>
         </p:style>
         <p:txBody>
-          <a:bodyPr rtlCol="0" anchor="ctr" wrap="square" lIns="45720" rIns="45720" tIns="18288" bIns="18288"/>
+          <a:bodyPr wrap="square" lIns="45720" tIns="18288" rIns="45720" bIns="18288" rtlCol="0" anchor="ctr"/>
           <a:lstStyle/>
           <a:p>
             <a:pPr algn="ctr"/>
+            <a:endParaRPr/>
           </a:p>
         </p:txBody>
       </p:sp>
@@ -14958,4 +15316,319 @@
     </a:ext>
   </a:extLst>
 </a:theme>
+</file>
+
+<file path=ppt/theme/theme2.xml><?xml version="1.0" encoding="utf-8"?>
+<a:theme xmlns:a="http://schemas.openxmlformats.org/drawingml/2006/main" name="Office Theme">
+  <a:themeElements>
+    <a:clrScheme name="Office">
+      <a:dk1>
+        <a:sysClr val="windowText" lastClr="000000"/>
+      </a:dk1>
+      <a:lt1>
+        <a:sysClr val="window" lastClr="FFFFFF"/>
+      </a:lt1>
+      <a:dk2>
+        <a:srgbClr val="0E2841"/>
+      </a:dk2>
+      <a:lt2>
+        <a:srgbClr val="E8E8E8"/>
+      </a:lt2>
+      <a:accent1>
+        <a:srgbClr val="156082"/>
+      </a:accent1>
+      <a:accent2>
+        <a:srgbClr val="E97132"/>
+      </a:accent2>
+      <a:accent3>
+        <a:srgbClr val="196B24"/>
+      </a:accent3>
+      <a:accent4>
+        <a:srgbClr val="0F9ED5"/>
+      </a:accent4>
+      <a:accent5>
+        <a:srgbClr val="A02B93"/>
+      </a:accent5>
+      <a:accent6>
+        <a:srgbClr val="4EA72E"/>
+      </a:accent6>
+      <a:hlink>
+        <a:srgbClr val="467886"/>
+      </a:hlink>
+      <a:folHlink>
+        <a:srgbClr val="96607D"/>
+      </a:folHlink>
+    </a:clrScheme>
+    <a:fontScheme name="Office">
+      <a:majorFont>
+        <a:latin typeface="Aptos Display" panose="02110004020202020204"/>
+        <a:ea typeface=""/>
+        <a:cs typeface=""/>
+        <a:font script="Jpan" typeface="游ゴシック Light"/>
+        <a:font script="Hang" typeface="맑은 고딕"/>
+        <a:font script="Hans" typeface="等线 Light"/>
+        <a:font script="Hant" typeface="新細明體"/>
+        <a:font script="Arab" typeface="Times New Roman"/>
+        <a:font script="Hebr" typeface="Times New Roman"/>
+        <a:font script="Thai" typeface="Angsana New"/>
+        <a:font script="Ethi" typeface="Nyala"/>
+        <a:font script="Beng" typeface="Vrinda"/>
+        <a:font script="Gujr" typeface="Shruti"/>
+        <a:font script="Khmr" typeface="MoolBoran"/>
+        <a:font script="Knda" typeface="Tunga"/>
+        <a:font script="Guru" typeface="Raavi"/>
+        <a:font script="Cans" typeface="Euphemia"/>
+        <a:font script="Cher" typeface="Plantagenet Cherokee"/>
+        <a:font script="Yiii" typeface="Microsoft Yi Baiti"/>
+        <a:font script="Tibt" typeface="Microsoft Himalaya"/>
+        <a:font script="Thaa" typeface="MV Boli"/>
+        <a:font script="Deva" typeface="Mangal"/>
+        <a:font script="Telu" typeface="Gautami"/>
+        <a:font script="Taml" typeface="Latha"/>
+        <a:font script="Syrc" typeface="Estrangelo Edessa"/>
+        <a:font script="Orya" typeface="Kalinga"/>
+        <a:font script="Mlym" typeface="Kartika"/>
+        <a:font script="Laoo" typeface="DokChampa"/>
+        <a:font script="Sinh" typeface="Iskoola Pota"/>
+        <a:font script="Mong" typeface="Mongolian Baiti"/>
+        <a:font script="Viet" typeface="Times New Roman"/>
+        <a:font script="Uigh" typeface="Microsoft Uighur"/>
+        <a:font script="Geor" typeface="Sylfaen"/>
+        <a:font script="Armn" typeface="Arial"/>
+        <a:font script="Bugi" typeface="Leelawadee UI"/>
+        <a:font script="Bopo" typeface="Microsoft JhengHei"/>
+        <a:font script="Java" typeface="Javanese Text"/>
+        <a:font script="Lisu" typeface="Segoe UI"/>
+        <a:font script="Mymr" typeface="Myanmar Text"/>
+        <a:font script="Nkoo" typeface="Ebrima"/>
+        <a:font script="Olck" typeface="Nirmala UI"/>
+        <a:font script="Osma" typeface="Ebrima"/>
+        <a:font script="Phag" typeface="Phagspa"/>
+        <a:font script="Syrn" typeface="Estrangelo Edessa"/>
+        <a:font script="Syrj" typeface="Estrangelo Edessa"/>
+        <a:font script="Syre" typeface="Estrangelo Edessa"/>
+        <a:font script="Sora" typeface="Nirmala UI"/>
+        <a:font script="Tale" typeface="Microsoft Tai Le"/>
+        <a:font script="Talu" typeface="Microsoft New Tai Lue"/>
+        <a:font script="Tfng" typeface="Ebrima"/>
+      </a:majorFont>
+      <a:minorFont>
+        <a:latin typeface="Aptos" panose="02110004020202020204"/>
+        <a:ea typeface=""/>
+        <a:cs typeface=""/>
+        <a:font script="Jpan" typeface="游ゴシック"/>
+        <a:font script="Hang" typeface="맑은 고딕"/>
+        <a:font script="Hans" typeface="等线"/>
+        <a:font script="Hant" typeface="新細明體"/>
+        <a:font script="Arab" typeface="Arial"/>
+        <a:font script="Hebr" typeface="Arial"/>
+        <a:font script="Thai" typeface="Cordia New"/>
+        <a:font script="Ethi" typeface="Nyala"/>
+        <a:font script="Beng" typeface="Vrinda"/>
+        <a:font script="Gujr" typeface="Shruti"/>
+        <a:font script="Khmr" typeface="DaunPenh"/>
+        <a:font script="Knda" typeface="Tunga"/>
+        <a:font script="Guru" typeface="Raavi"/>
+        <a:font script="Cans" typeface="Euphemia"/>
+        <a:font script="Cher" typeface="Plantagenet Cherokee"/>
+        <a:font script="Yiii" typeface="Microsoft Yi Baiti"/>
+        <a:font script="Tibt" typeface="Microsoft Himalaya"/>
+        <a:font script="Thaa" typeface="MV Boli"/>
+        <a:font script="Deva" typeface="Mangal"/>
+        <a:font script="Telu" typeface="Gautami"/>
+        <a:font script="Taml" typeface="Latha"/>
+        <a:font script="Syrc" typeface="Estrangelo Edessa"/>
+        <a:font script="Orya" typeface="Kalinga"/>
+        <a:font script="Mlym" typeface="Kartika"/>
+        <a:font script="Laoo" typeface="DokChampa"/>
+        <a:font script="Sinh" typeface="Iskoola Pota"/>
+        <a:font script="Mong" typeface="Mongolian Baiti"/>
+        <a:font script="Viet" typeface="Arial"/>
+        <a:font script="Uigh" typeface="Microsoft Uighur"/>
+        <a:font script="Geor" typeface="Sylfaen"/>
+        <a:font script="Armn" typeface="Arial"/>
+        <a:font script="Bugi" typeface="Leelawadee UI"/>
+        <a:font script="Bopo" typeface="Microsoft JhengHei"/>
+        <a:font script="Java" typeface="Javanese Text"/>
+        <a:font script="Lisu" typeface="Segoe UI"/>
+        <a:font script="Mymr" typeface="Myanmar Text"/>
+        <a:font script="Nkoo" typeface="Ebrima"/>
+        <a:font script="Olck" typeface="Nirmala UI"/>
+        <a:font script="Osma" typeface="Ebrima"/>
+        <a:font script="Phag" typeface="Phagspa"/>
+        <a:font script="Syrn" typeface="Estrangelo Edessa"/>
+        <a:font script="Syrj" typeface="Estrangelo Edessa"/>
+        <a:font script="Syre" typeface="Estrangelo Edessa"/>
+        <a:font script="Sora" typeface="Nirmala UI"/>
+        <a:font script="Tale" typeface="Microsoft Tai Le"/>
+        <a:font script="Talu" typeface="Microsoft New Tai Lue"/>
+        <a:font script="Tfng" typeface="Ebrima"/>
+      </a:minorFont>
+    </a:fontScheme>
+    <a:fmtScheme name="Office">
+      <a:fillStyleLst>
+        <a:solidFill>
+          <a:schemeClr val="phClr"/>
+        </a:solidFill>
+        <a:gradFill rotWithShape="1">
+          <a:gsLst>
+            <a:gs pos="0">
+              <a:schemeClr val="phClr">
+                <a:lumMod val="110000"/>
+                <a:satMod val="105000"/>
+                <a:tint val="67000"/>
+              </a:schemeClr>
+            </a:gs>
+            <a:gs pos="50000">
+              <a:schemeClr val="phClr">
+                <a:lumMod val="105000"/>
+                <a:satMod val="103000"/>
+                <a:tint val="73000"/>
+              </a:schemeClr>
+            </a:gs>
+            <a:gs pos="100000">
+              <a:schemeClr val="phClr">
+                <a:lumMod val="105000"/>
+                <a:satMod val="109000"/>
+                <a:tint val="81000"/>
+              </a:schemeClr>
+            </a:gs>
+          </a:gsLst>
+          <a:lin ang="5400000" scaled="0"/>
+        </a:gradFill>
+        <a:gradFill rotWithShape="1">
+          <a:gsLst>
+            <a:gs pos="0">
+              <a:schemeClr val="phClr">
+                <a:satMod val="103000"/>
+                <a:lumMod val="102000"/>
+                <a:tint val="94000"/>
+              </a:schemeClr>
+            </a:gs>
+            <a:gs pos="50000">
+              <a:schemeClr val="phClr">
+                <a:satMod val="110000"/>
+                <a:lumMod val="100000"/>
+                <a:shade val="100000"/>
+              </a:schemeClr>
+            </a:gs>
+            <a:gs pos="100000">
+              <a:schemeClr val="phClr">
+                <a:lumMod val="99000"/>
+                <a:satMod val="120000"/>
+                <a:shade val="78000"/>
+              </a:schemeClr>
+            </a:gs>
+          </a:gsLst>
+          <a:lin ang="5400000" scaled="0"/>
+        </a:gradFill>
+      </a:fillStyleLst>
+      <a:lnStyleLst>
+        <a:ln w="12700" cap="flat" cmpd="sng" algn="ctr">
+          <a:solidFill>
+            <a:schemeClr val="phClr"/>
+          </a:solidFill>
+          <a:prstDash val="solid"/>
+          <a:miter lim="800000"/>
+        </a:ln>
+        <a:ln w="19050" cap="flat" cmpd="sng" algn="ctr">
+          <a:solidFill>
+            <a:schemeClr val="phClr"/>
+          </a:solidFill>
+          <a:prstDash val="solid"/>
+          <a:miter lim="800000"/>
+        </a:ln>
+        <a:ln w="25400" cap="flat" cmpd="sng" algn="ctr">
+          <a:solidFill>
+            <a:schemeClr val="phClr"/>
+          </a:solidFill>
+          <a:prstDash val="solid"/>
+          <a:miter lim="800000"/>
+        </a:ln>
+      </a:lnStyleLst>
+      <a:effectStyleLst>
+        <a:effectStyle>
+          <a:effectLst/>
+        </a:effectStyle>
+        <a:effectStyle>
+          <a:effectLst/>
+        </a:effectStyle>
+        <a:effectStyle>
+          <a:effectLst>
+            <a:outerShdw blurRad="57150" dist="19050" dir="5400000" algn="ctr" rotWithShape="0">
+              <a:srgbClr val="000000">
+                <a:alpha val="63000"/>
+              </a:srgbClr>
+            </a:outerShdw>
+          </a:effectLst>
+        </a:effectStyle>
+      </a:effectStyleLst>
+      <a:bgFillStyleLst>
+        <a:solidFill>
+          <a:schemeClr val="phClr"/>
+        </a:solidFill>
+        <a:solidFill>
+          <a:schemeClr val="phClr">
+            <a:tint val="95000"/>
+            <a:satMod val="170000"/>
+          </a:schemeClr>
+        </a:solidFill>
+        <a:gradFill rotWithShape="1">
+          <a:gsLst>
+            <a:gs pos="0">
+              <a:schemeClr val="phClr">
+                <a:tint val="93000"/>
+                <a:satMod val="150000"/>
+                <a:shade val="98000"/>
+                <a:lumMod val="102000"/>
+              </a:schemeClr>
+            </a:gs>
+            <a:gs pos="50000">
+              <a:schemeClr val="phClr">
+                <a:tint val="98000"/>
+                <a:satMod val="130000"/>
+                <a:shade val="90000"/>
+                <a:lumMod val="103000"/>
+              </a:schemeClr>
+            </a:gs>
+            <a:gs pos="100000">
+              <a:schemeClr val="phClr">
+                <a:shade val="63000"/>
+                <a:satMod val="120000"/>
+              </a:schemeClr>
+            </a:gs>
+          </a:gsLst>
+          <a:lin ang="5400000" scaled="0"/>
+        </a:gradFill>
+      </a:bgFillStyleLst>
+    </a:fmtScheme>
+  </a:themeElements>
+  <a:objectDefaults>
+    <a:lnDef>
+      <a:spPr/>
+      <a:bodyPr/>
+      <a:lstStyle/>
+      <a:style>
+        <a:lnRef idx="2">
+          <a:schemeClr val="accent1"/>
+        </a:lnRef>
+        <a:fillRef idx="0">
+          <a:schemeClr val="accent1"/>
+        </a:fillRef>
+        <a:effectRef idx="1">
+          <a:schemeClr val="accent1"/>
+        </a:effectRef>
+        <a:fontRef idx="minor">
+          <a:schemeClr val="tx1"/>
+        </a:fontRef>
+      </a:style>
+    </a:lnDef>
+  </a:objectDefaults>
+  <a:extraClrSchemeLst/>
+  <a:extLst>
+    <a:ext uri="{05A4C25C-085E-4340-85A3-A5531E510DB2}">
+      <thm15:themeFamily xmlns:thm15="http://schemas.microsoft.com/office/thememl/2012/main" name="Office Theme" id="{2E142A2C-CD16-42D6-873A-C26D2A0506FA}" vid="{1BDDFF52-6CD6-40A5-AB3C-68EB2F1E4D0A}"/>
+    </a:ext>
+  </a:extLst>
+</a:theme>
 </file>